--- a/CI_Architecture_ZenPharma.pptx
+++ b/CI_Architecture_ZenPharma.pptx
@@ -24,6 +24,10 @@
     <p:sldId id="269" r:id="rId18"/>
     <p:sldId id="270" r:id="rId19"/>
     <p:sldId id="271" r:id="rId20"/>
+    <p:sldId id="275" r:id="rId25"/>
+    <p:sldId id="276" r:id="rId26"/>
+    <p:sldId id="277" r:id="rId27"/>
+    <p:sldId id="278" r:id="rId28"/>
   </p:sldIdLst>
   <p:sldSz cx="12188825" cy="6858000"/>
   <p:notesSz cx="6858000" cy="9144000"/>
@@ -24126,7 +24130,7 @@
         <p:spPr>
           <a:xfrm>
             <a:off x="457200" y="1280160"/>
-            <a:ext cx="384048" cy="475488"/>
+            <a:ext cx="384048" cy="420624"/>
           </a:xfrm>
           <a:prstGeom prst="rect">
             <a:avLst/>
@@ -24169,8 +24173,8 @@
         </p:nvSpPr>
         <p:spPr>
           <a:xfrm>
-            <a:off x="457200" y="1316736"/>
-            <a:ext cx="384048" cy="384048"/>
+            <a:off x="457200" y="1307592"/>
+            <a:ext cx="384048" cy="329184"/>
           </a:xfrm>
           <a:prstGeom prst="rect">
             <a:avLst/>
@@ -24204,7 +24208,7 @@
         <p:spPr>
           <a:xfrm>
             <a:off x="877824" y="1280160"/>
-            <a:ext cx="5120640" cy="475488"/>
+            <a:ext cx="5120640" cy="420624"/>
           </a:xfrm>
           <a:prstGeom prst="rect">
             <a:avLst/>
@@ -24247,8 +24251,8 @@
         </p:nvSpPr>
         <p:spPr>
           <a:xfrm>
-            <a:off x="950976" y="1362456"/>
-            <a:ext cx="4937760" cy="347472"/>
+            <a:off x="950976" y="1321307"/>
+            <a:ext cx="4937759" cy="310896"/>
           </a:xfrm>
           <a:prstGeom prst="rect">
             <a:avLst/>
@@ -24281,8 +24285,8 @@
         </p:nvSpPr>
         <p:spPr>
           <a:xfrm>
-            <a:off x="457200" y="2084831"/>
-            <a:ext cx="384048" cy="475488"/>
+            <a:off x="457200" y="1984248"/>
+            <a:ext cx="384048" cy="420624"/>
           </a:xfrm>
           <a:prstGeom prst="rect">
             <a:avLst/>
@@ -24325,8 +24329,8 @@
         </p:nvSpPr>
         <p:spPr>
           <a:xfrm>
-            <a:off x="457200" y="2121408"/>
-            <a:ext cx="384048" cy="384048"/>
+            <a:off x="457200" y="2011679"/>
+            <a:ext cx="384048" cy="329184"/>
           </a:xfrm>
           <a:prstGeom prst="rect">
             <a:avLst/>
@@ -24359,8 +24363,8 @@
         </p:nvSpPr>
         <p:spPr>
           <a:xfrm>
-            <a:off x="877824" y="2084831"/>
-            <a:ext cx="5120640" cy="475488"/>
+            <a:off x="877824" y="1984248"/>
+            <a:ext cx="5120640" cy="420624"/>
           </a:xfrm>
           <a:prstGeom prst="rect">
             <a:avLst/>
@@ -24403,8 +24407,8 @@
         </p:nvSpPr>
         <p:spPr>
           <a:xfrm>
-            <a:off x="950976" y="2167127"/>
-            <a:ext cx="4937760" cy="347472"/>
+            <a:off x="950976" y="2025395"/>
+            <a:ext cx="4937759" cy="310896"/>
           </a:xfrm>
           <a:prstGeom prst="rect">
             <a:avLst/>
@@ -24437,8 +24441,8 @@
         </p:nvSpPr>
         <p:spPr>
           <a:xfrm>
-            <a:off x="457200" y="2889504"/>
-            <a:ext cx="384048" cy="475488"/>
+            <a:off x="457200" y="2688336"/>
+            <a:ext cx="384048" cy="420624"/>
           </a:xfrm>
           <a:prstGeom prst="rect">
             <a:avLst/>
@@ -24481,8 +24485,8 @@
         </p:nvSpPr>
         <p:spPr>
           <a:xfrm>
-            <a:off x="457200" y="2926080"/>
-            <a:ext cx="384048" cy="384048"/>
+            <a:off x="457200" y="2715768"/>
+            <a:ext cx="384048" cy="329184"/>
           </a:xfrm>
           <a:prstGeom prst="rect">
             <a:avLst/>
@@ -24515,8 +24519,8 @@
         </p:nvSpPr>
         <p:spPr>
           <a:xfrm>
-            <a:off x="877824" y="2889504"/>
-            <a:ext cx="5120640" cy="475488"/>
+            <a:off x="877824" y="2688336"/>
+            <a:ext cx="5120640" cy="420624"/>
           </a:xfrm>
           <a:prstGeom prst="rect">
             <a:avLst/>
@@ -24559,8 +24563,8 @@
         </p:nvSpPr>
         <p:spPr>
           <a:xfrm>
-            <a:off x="950976" y="2971800"/>
-            <a:ext cx="4937760" cy="347472"/>
+            <a:off x="950976" y="2729484"/>
+            <a:ext cx="4937759" cy="310896"/>
           </a:xfrm>
           <a:prstGeom prst="rect">
             <a:avLst/>
@@ -24593,8 +24597,8 @@
         </p:nvSpPr>
         <p:spPr>
           <a:xfrm>
-            <a:off x="457200" y="3694176"/>
-            <a:ext cx="384048" cy="475488"/>
+            <a:off x="457200" y="3392424"/>
+            <a:ext cx="384048" cy="420624"/>
           </a:xfrm>
           <a:prstGeom prst="rect">
             <a:avLst/>
@@ -24637,8 +24641,8 @@
         </p:nvSpPr>
         <p:spPr>
           <a:xfrm>
-            <a:off x="457200" y="3730752"/>
-            <a:ext cx="384048" cy="384048"/>
+            <a:off x="457200" y="3419856"/>
+            <a:ext cx="384048" cy="329184"/>
           </a:xfrm>
           <a:prstGeom prst="rect">
             <a:avLst/>
@@ -24671,8 +24675,8 @@
         </p:nvSpPr>
         <p:spPr>
           <a:xfrm>
-            <a:off x="877824" y="3694176"/>
-            <a:ext cx="5120640" cy="475488"/>
+            <a:off x="877824" y="3392424"/>
+            <a:ext cx="5120640" cy="420624"/>
           </a:xfrm>
           <a:prstGeom prst="rect">
             <a:avLst/>
@@ -24715,8 +24719,8 @@
         </p:nvSpPr>
         <p:spPr>
           <a:xfrm>
-            <a:off x="950976" y="3776472"/>
-            <a:ext cx="4937760" cy="347472"/>
+            <a:off x="950976" y="3433572"/>
+            <a:ext cx="4937759" cy="310896"/>
           </a:xfrm>
           <a:prstGeom prst="rect">
             <a:avLst/>
@@ -24749,8 +24753,8 @@
         </p:nvSpPr>
         <p:spPr>
           <a:xfrm>
-            <a:off x="457200" y="4498848"/>
-            <a:ext cx="384048" cy="475488"/>
+            <a:off x="457200" y="4096512"/>
+            <a:ext cx="384048" cy="420624"/>
           </a:xfrm>
           <a:prstGeom prst="rect">
             <a:avLst/>
@@ -24793,8 +24797,8 @@
         </p:nvSpPr>
         <p:spPr>
           <a:xfrm>
-            <a:off x="457200" y="4535424"/>
-            <a:ext cx="384048" cy="384048"/>
+            <a:off x="457200" y="4123944"/>
+            <a:ext cx="384048" cy="329184"/>
           </a:xfrm>
           <a:prstGeom prst="rect">
             <a:avLst/>
@@ -24827,8 +24831,8 @@
         </p:nvSpPr>
         <p:spPr>
           <a:xfrm>
-            <a:off x="877824" y="4498848"/>
-            <a:ext cx="5120640" cy="475488"/>
+            <a:off x="877824" y="4096512"/>
+            <a:ext cx="5120640" cy="420624"/>
           </a:xfrm>
           <a:prstGeom prst="rect">
             <a:avLst/>
@@ -24871,8 +24875,8 @@
         </p:nvSpPr>
         <p:spPr>
           <a:xfrm>
-            <a:off x="950976" y="4581144"/>
-            <a:ext cx="4937760" cy="347472"/>
+            <a:off x="950976" y="4137660"/>
+            <a:ext cx="4937759" cy="310896"/>
           </a:xfrm>
           <a:prstGeom prst="rect">
             <a:avLst/>
@@ -24905,8 +24909,8 @@
         </p:nvSpPr>
         <p:spPr>
           <a:xfrm>
-            <a:off x="457200" y="5303520"/>
-            <a:ext cx="384048" cy="475488"/>
+            <a:off x="457200" y="4800600"/>
+            <a:ext cx="384048" cy="420624"/>
           </a:xfrm>
           <a:prstGeom prst="rect">
             <a:avLst/>
@@ -24949,8 +24953,8 @@
         </p:nvSpPr>
         <p:spPr>
           <a:xfrm>
-            <a:off x="457200" y="5340096"/>
-            <a:ext cx="384048" cy="384048"/>
+            <a:off x="457200" y="4828032"/>
+            <a:ext cx="384048" cy="329184"/>
           </a:xfrm>
           <a:prstGeom prst="rect">
             <a:avLst/>
@@ -24983,8 +24987,8 @@
         </p:nvSpPr>
         <p:spPr>
           <a:xfrm>
-            <a:off x="877824" y="5303520"/>
-            <a:ext cx="5120640" cy="475488"/>
+            <a:off x="877824" y="4800600"/>
+            <a:ext cx="5120640" cy="420624"/>
           </a:xfrm>
           <a:prstGeom prst="rect">
             <a:avLst/>
@@ -25027,8 +25031,8 @@
         </p:nvSpPr>
         <p:spPr>
           <a:xfrm>
-            <a:off x="950976" y="5385816"/>
-            <a:ext cx="4937760" cy="347472"/>
+            <a:off x="950976" y="4841748"/>
+            <a:ext cx="4937759" cy="310896"/>
           </a:xfrm>
           <a:prstGeom prst="rect">
             <a:avLst/>
@@ -25062,7 +25066,7 @@
         <p:spPr>
           <a:xfrm>
             <a:off x="6400800" y="1280160"/>
-            <a:ext cx="384048" cy="475488"/>
+            <a:ext cx="384048" cy="420624"/>
           </a:xfrm>
           <a:prstGeom prst="rect">
             <a:avLst/>
@@ -25105,8 +25109,8 @@
         </p:nvSpPr>
         <p:spPr>
           <a:xfrm>
-            <a:off x="6400800" y="1316736"/>
-            <a:ext cx="384048" cy="384048"/>
+            <a:off x="6400800" y="1307592"/>
+            <a:ext cx="384048" cy="329184"/>
           </a:xfrm>
           <a:prstGeom prst="rect">
             <a:avLst/>
@@ -25126,6 +25130,942 @@
                   <a:srgbClr val="FFFFFF"/>
                 </a:solidFill>
               </a:rPr>
+              <a:t>9</a:t>
+            </a:r>
+          </a:p>
+        </p:txBody>
+      </p:sp>
+      <p:sp>
+        <p:nvSpPr>
+          <p:cNvPr id="32" name="Rectangle 31"/>
+          <p:cNvSpPr/>
+          <p:nvPr/>
+        </p:nvSpPr>
+        <p:spPr>
+          <a:xfrm>
+            <a:off x="6821424" y="1280160"/>
+            <a:ext cx="5120640" cy="420624"/>
+          </a:xfrm>
+          <a:prstGeom prst="rect">
+            <a:avLst/>
+          </a:prstGeom>
+          <a:solidFill>
+            <a:srgbClr val="FFFFFF"/>
+          </a:solidFill>
+          <a:ln>
+            <a:noFill/>
+          </a:ln>
+        </p:spPr>
+        <p:style>
+          <a:lnRef idx="1">
+            <a:schemeClr val="accent1"/>
+          </a:lnRef>
+          <a:fillRef idx="3">
+            <a:schemeClr val="accent1"/>
+          </a:fillRef>
+          <a:effectRef idx="2">
+            <a:schemeClr val="accent1"/>
+          </a:effectRef>
+          <a:fontRef idx="minor">
+            <a:schemeClr val="lt1"/>
+          </a:fontRef>
+        </p:style>
+        <p:txBody>
+          <a:bodyPr rtlCol="0" anchor="ctr"/>
+          <a:lstStyle/>
+          <a:p>
+            <a:pPr algn="ctr"/>
+            <a:endParaRPr/>
+          </a:p>
+        </p:txBody>
+      </p:sp>
+      <p:sp>
+        <p:nvSpPr>
+          <p:cNvPr id="33" name="TextBox 32"/>
+          <p:cNvSpPr txBox="1"/>
+          <p:nvPr/>
+        </p:nvSpPr>
+        <p:spPr>
+          <a:xfrm>
+            <a:off x="6894576" y="1321307"/>
+            <a:ext cx="4937759" cy="310896"/>
+          </a:xfrm>
+          <a:prstGeom prst="rect">
+            <a:avLst/>
+          </a:prstGeom>
+          <a:noFill/>
+        </p:spPr>
+        <p:txBody>
+          <a:bodyPr wrap="square">
+            <a:spAutoFit/>
+          </a:bodyPr>
+          <a:lstStyle/>
+          <a:p>
+            <a:pPr algn="l"/>
+            <a:r>
+              <a:rPr sz="1300" b="0" i="0">
+                <a:solidFill>
+                  <a:srgbClr val="1C2B3A"/>
+                </a:solidFill>
+              </a:rPr>
+              <a:t>Build Once, Deploy Many</a:t>
+            </a:r>
+          </a:p>
+        </p:txBody>
+      </p:sp>
+      <p:sp>
+        <p:nvSpPr>
+          <p:cNvPr id="34" name="Rectangle 33"/>
+          <p:cNvSpPr/>
+          <p:nvPr/>
+        </p:nvSpPr>
+        <p:spPr>
+          <a:xfrm>
+            <a:off x="6400800" y="1984248"/>
+            <a:ext cx="384048" cy="420624"/>
+          </a:xfrm>
+          <a:prstGeom prst="rect">
+            <a:avLst/>
+          </a:prstGeom>
+          <a:solidFill>
+            <a:srgbClr val="00A896"/>
+          </a:solidFill>
+          <a:ln>
+            <a:noFill/>
+          </a:ln>
+        </p:spPr>
+        <p:style>
+          <a:lnRef idx="1">
+            <a:schemeClr val="accent1"/>
+          </a:lnRef>
+          <a:fillRef idx="3">
+            <a:schemeClr val="accent1"/>
+          </a:fillRef>
+          <a:effectRef idx="2">
+            <a:schemeClr val="accent1"/>
+          </a:effectRef>
+          <a:fontRef idx="minor">
+            <a:schemeClr val="lt1"/>
+          </a:fontRef>
+        </p:style>
+        <p:txBody>
+          <a:bodyPr rtlCol="0" anchor="ctr"/>
+          <a:lstStyle/>
+          <a:p>
+            <a:pPr algn="ctr"/>
+            <a:endParaRPr/>
+          </a:p>
+        </p:txBody>
+      </p:sp>
+      <p:sp>
+        <p:nvSpPr>
+          <p:cNvPr id="35" name="TextBox 34"/>
+          <p:cNvSpPr txBox="1"/>
+          <p:nvPr/>
+        </p:nvSpPr>
+        <p:spPr>
+          <a:xfrm>
+            <a:off x="6400800" y="2011679"/>
+            <a:ext cx="384048" cy="329184"/>
+          </a:xfrm>
+          <a:prstGeom prst="rect">
+            <a:avLst/>
+          </a:prstGeom>
+          <a:noFill/>
+        </p:spPr>
+        <p:txBody>
+          <a:bodyPr wrap="square">
+            <a:spAutoFit/>
+          </a:bodyPr>
+          <a:lstStyle/>
+          <a:p>
+            <a:pPr algn="ctr"/>
+            <a:r>
+              <a:rPr sz="1300" b="1" i="0">
+                <a:solidFill>
+                  <a:srgbClr val="FFFFFF"/>
+                </a:solidFill>
+              </a:rPr>
+              <a:t>10</a:t>
+            </a:r>
+          </a:p>
+        </p:txBody>
+      </p:sp>
+      <p:sp>
+        <p:nvSpPr>
+          <p:cNvPr id="36" name="Rectangle 35"/>
+          <p:cNvSpPr/>
+          <p:nvPr/>
+        </p:nvSpPr>
+        <p:spPr>
+          <a:xfrm>
+            <a:off x="6821424" y="1984248"/>
+            <a:ext cx="5120640" cy="420624"/>
+          </a:xfrm>
+          <a:prstGeom prst="rect">
+            <a:avLst/>
+          </a:prstGeom>
+          <a:solidFill>
+            <a:srgbClr val="FFFFFF"/>
+          </a:solidFill>
+          <a:ln>
+            <a:noFill/>
+          </a:ln>
+        </p:spPr>
+        <p:style>
+          <a:lnRef idx="1">
+            <a:schemeClr val="accent1"/>
+          </a:lnRef>
+          <a:fillRef idx="3">
+            <a:schemeClr val="accent1"/>
+          </a:fillRef>
+          <a:effectRef idx="2">
+            <a:schemeClr val="accent1"/>
+          </a:effectRef>
+          <a:fontRef idx="minor">
+            <a:schemeClr val="lt1"/>
+          </a:fontRef>
+        </p:style>
+        <p:txBody>
+          <a:bodyPr rtlCol="0" anchor="ctr"/>
+          <a:lstStyle/>
+          <a:p>
+            <a:pPr algn="ctr"/>
+            <a:endParaRPr/>
+          </a:p>
+        </p:txBody>
+      </p:sp>
+      <p:sp>
+        <p:nvSpPr>
+          <p:cNvPr id="37" name="TextBox 36"/>
+          <p:cNvSpPr txBox="1"/>
+          <p:nvPr/>
+        </p:nvSpPr>
+        <p:spPr>
+          <a:xfrm>
+            <a:off x="6894576" y="2025395"/>
+            <a:ext cx="4937759" cy="310896"/>
+          </a:xfrm>
+          <a:prstGeom prst="rect">
+            <a:avLst/>
+          </a:prstGeom>
+          <a:noFill/>
+        </p:spPr>
+        <p:txBody>
+          <a:bodyPr wrap="square">
+            <a:spAutoFit/>
+          </a:bodyPr>
+          <a:lstStyle/>
+          <a:p>
+            <a:pPr algn="l"/>
+            <a:r>
+              <a:rPr sz="1300" b="0" i="0">
+                <a:solidFill>
+                  <a:srgbClr val="1C2B3A"/>
+                </a:solidFill>
+              </a:rPr>
+              <a:t>GitOps &amp; ArgoCD</a:t>
+            </a:r>
+          </a:p>
+        </p:txBody>
+      </p:sp>
+      <p:sp>
+        <p:nvSpPr>
+          <p:cNvPr id="38" name="Rectangle 37"/>
+          <p:cNvSpPr/>
+          <p:nvPr/>
+        </p:nvSpPr>
+        <p:spPr>
+          <a:xfrm>
+            <a:off x="6400800" y="2688336"/>
+            <a:ext cx="384048" cy="420624"/>
+          </a:xfrm>
+          <a:prstGeom prst="rect">
+            <a:avLst/>
+          </a:prstGeom>
+          <a:solidFill>
+            <a:srgbClr val="27AE60"/>
+          </a:solidFill>
+          <a:ln>
+            <a:noFill/>
+          </a:ln>
+        </p:spPr>
+        <p:style>
+          <a:lnRef idx="1">
+            <a:schemeClr val="accent1"/>
+          </a:lnRef>
+          <a:fillRef idx="3">
+            <a:schemeClr val="accent1"/>
+          </a:fillRef>
+          <a:effectRef idx="2">
+            <a:schemeClr val="accent1"/>
+          </a:effectRef>
+          <a:fontRef idx="minor">
+            <a:schemeClr val="lt1"/>
+          </a:fontRef>
+        </p:style>
+        <p:txBody>
+          <a:bodyPr rtlCol="0" anchor="ctr"/>
+          <a:lstStyle/>
+          <a:p>
+            <a:pPr algn="ctr"/>
+            <a:endParaRPr/>
+          </a:p>
+        </p:txBody>
+      </p:sp>
+      <p:sp>
+        <p:nvSpPr>
+          <p:cNvPr id="39" name="TextBox 38"/>
+          <p:cNvSpPr txBox="1"/>
+          <p:nvPr/>
+        </p:nvSpPr>
+        <p:spPr>
+          <a:xfrm>
+            <a:off x="6400800" y="2715768"/>
+            <a:ext cx="384048" cy="329184"/>
+          </a:xfrm>
+          <a:prstGeom prst="rect">
+            <a:avLst/>
+          </a:prstGeom>
+          <a:noFill/>
+        </p:spPr>
+        <p:txBody>
+          <a:bodyPr wrap="square">
+            <a:spAutoFit/>
+          </a:bodyPr>
+          <a:lstStyle/>
+          <a:p>
+            <a:pPr algn="ctr"/>
+            <a:r>
+              <a:rPr sz="1300" b="1" i="0">
+                <a:solidFill>
+                  <a:srgbClr val="FFFFFF"/>
+                </a:solidFill>
+              </a:rPr>
+              <a:t>11</a:t>
+            </a:r>
+          </a:p>
+        </p:txBody>
+      </p:sp>
+      <p:sp>
+        <p:nvSpPr>
+          <p:cNvPr id="40" name="Rectangle 39"/>
+          <p:cNvSpPr/>
+          <p:nvPr/>
+        </p:nvSpPr>
+        <p:spPr>
+          <a:xfrm>
+            <a:off x="6821424" y="2688336"/>
+            <a:ext cx="5120640" cy="420624"/>
+          </a:xfrm>
+          <a:prstGeom prst="rect">
+            <a:avLst/>
+          </a:prstGeom>
+          <a:solidFill>
+            <a:srgbClr val="FFFFFF"/>
+          </a:solidFill>
+          <a:ln>
+            <a:noFill/>
+          </a:ln>
+        </p:spPr>
+        <p:style>
+          <a:lnRef idx="1">
+            <a:schemeClr val="accent1"/>
+          </a:lnRef>
+          <a:fillRef idx="3">
+            <a:schemeClr val="accent1"/>
+          </a:fillRef>
+          <a:effectRef idx="2">
+            <a:schemeClr val="accent1"/>
+          </a:effectRef>
+          <a:fontRef idx="minor">
+            <a:schemeClr val="lt1"/>
+          </a:fontRef>
+        </p:style>
+        <p:txBody>
+          <a:bodyPr rtlCol="0" anchor="ctr"/>
+          <a:lstStyle/>
+          <a:p>
+            <a:pPr algn="ctr"/>
+            <a:endParaRPr/>
+          </a:p>
+        </p:txBody>
+      </p:sp>
+      <p:sp>
+        <p:nvSpPr>
+          <p:cNvPr id="41" name="TextBox 40"/>
+          <p:cNvSpPr txBox="1"/>
+          <p:nvPr/>
+        </p:nvSpPr>
+        <p:spPr>
+          <a:xfrm>
+            <a:off x="6894576" y="2729484"/>
+            <a:ext cx="4937759" cy="310896"/>
+          </a:xfrm>
+          <a:prstGeom prst="rect">
+            <a:avLst/>
+          </a:prstGeom>
+          <a:noFill/>
+        </p:spPr>
+        <p:txBody>
+          <a:bodyPr wrap="square">
+            <a:spAutoFit/>
+          </a:bodyPr>
+          <a:lstStyle/>
+          <a:p>
+            <a:pPr algn="l"/>
+            <a:r>
+              <a:rPr sz="1300" b="0" i="0">
+                <a:solidFill>
+                  <a:srgbClr val="1C2B3A"/>
+                </a:solidFill>
+              </a:rPr>
+              <a:t>Environment Promotion: DEV → QA → PROD</a:t>
+            </a:r>
+          </a:p>
+        </p:txBody>
+      </p:sp>
+      <p:sp>
+        <p:nvSpPr>
+          <p:cNvPr id="42" name="Rectangle 41"/>
+          <p:cNvSpPr/>
+          <p:nvPr/>
+        </p:nvSpPr>
+        <p:spPr>
+          <a:xfrm>
+            <a:off x="6400800" y="3392424"/>
+            <a:ext cx="384048" cy="420624"/>
+          </a:xfrm>
+          <a:prstGeom prst="rect">
+            <a:avLst/>
+          </a:prstGeom>
+          <a:solidFill>
+            <a:srgbClr val="1A5496"/>
+          </a:solidFill>
+          <a:ln>
+            <a:noFill/>
+          </a:ln>
+        </p:spPr>
+        <p:style>
+          <a:lnRef idx="1">
+            <a:schemeClr val="accent1"/>
+          </a:lnRef>
+          <a:fillRef idx="3">
+            <a:schemeClr val="accent1"/>
+          </a:fillRef>
+          <a:effectRef idx="2">
+            <a:schemeClr val="accent1"/>
+          </a:effectRef>
+          <a:fontRef idx="minor">
+            <a:schemeClr val="lt1"/>
+          </a:fontRef>
+        </p:style>
+        <p:txBody>
+          <a:bodyPr rtlCol="0" anchor="ctr"/>
+          <a:lstStyle/>
+          <a:p>
+            <a:pPr algn="ctr"/>
+            <a:endParaRPr/>
+          </a:p>
+        </p:txBody>
+      </p:sp>
+      <p:sp>
+        <p:nvSpPr>
+          <p:cNvPr id="43" name="TextBox 42"/>
+          <p:cNvSpPr txBox="1"/>
+          <p:nvPr/>
+        </p:nvSpPr>
+        <p:spPr>
+          <a:xfrm>
+            <a:off x="6400800" y="3419856"/>
+            <a:ext cx="384048" cy="329184"/>
+          </a:xfrm>
+          <a:prstGeom prst="rect">
+            <a:avLst/>
+          </a:prstGeom>
+          <a:noFill/>
+        </p:spPr>
+        <p:txBody>
+          <a:bodyPr wrap="square">
+            <a:spAutoFit/>
+          </a:bodyPr>
+          <a:lstStyle/>
+          <a:p>
+            <a:pPr algn="ctr"/>
+            <a:r>
+              <a:rPr sz="1300" b="1" i="0">
+                <a:solidFill>
+                  <a:srgbClr val="FFFFFF"/>
+                </a:solidFill>
+              </a:rPr>
+              <a:t>12</a:t>
+            </a:r>
+          </a:p>
+        </p:txBody>
+      </p:sp>
+      <p:sp>
+        <p:nvSpPr>
+          <p:cNvPr id="44" name="Rectangle 43"/>
+          <p:cNvSpPr/>
+          <p:nvPr/>
+        </p:nvSpPr>
+        <p:spPr>
+          <a:xfrm>
+            <a:off x="6821424" y="3392424"/>
+            <a:ext cx="5120640" cy="420624"/>
+          </a:xfrm>
+          <a:prstGeom prst="rect">
+            <a:avLst/>
+          </a:prstGeom>
+          <a:solidFill>
+            <a:srgbClr val="FFFFFF"/>
+          </a:solidFill>
+          <a:ln>
+            <a:noFill/>
+          </a:ln>
+        </p:spPr>
+        <p:style>
+          <a:lnRef idx="1">
+            <a:schemeClr val="accent1"/>
+          </a:lnRef>
+          <a:fillRef idx="3">
+            <a:schemeClr val="accent1"/>
+          </a:fillRef>
+          <a:effectRef idx="2">
+            <a:schemeClr val="accent1"/>
+          </a:effectRef>
+          <a:fontRef idx="minor">
+            <a:schemeClr val="lt1"/>
+          </a:fontRef>
+        </p:style>
+        <p:txBody>
+          <a:bodyPr rtlCol="0" anchor="ctr"/>
+          <a:lstStyle/>
+          <a:p>
+            <a:pPr algn="ctr"/>
+            <a:endParaRPr/>
+          </a:p>
+        </p:txBody>
+      </p:sp>
+      <p:sp>
+        <p:nvSpPr>
+          <p:cNvPr id="45" name="TextBox 44"/>
+          <p:cNvSpPr txBox="1"/>
+          <p:nvPr/>
+        </p:nvSpPr>
+        <p:spPr>
+          <a:xfrm>
+            <a:off x="6894576" y="3433572"/>
+            <a:ext cx="4937759" cy="310896"/>
+          </a:xfrm>
+          <a:prstGeom prst="rect">
+            <a:avLst/>
+          </a:prstGeom>
+          <a:noFill/>
+        </p:spPr>
+        <p:txBody>
+          <a:bodyPr wrap="square">
+            <a:spAutoFit/>
+          </a:bodyPr>
+          <a:lstStyle/>
+          <a:p>
+            <a:pPr algn="l"/>
+            <a:r>
+              <a:rPr sz="1300" b="0" i="0">
+                <a:solidFill>
+                  <a:srgbClr val="1C2B3A"/>
+                </a:solidFill>
+              </a:rPr>
+              <a:t>Frontend CI (zen-pharma-frontend)</a:t>
+            </a:r>
+          </a:p>
+        </p:txBody>
+      </p:sp>
+      <p:sp>
+        <p:nvSpPr>
+          <p:cNvPr id="46" name="Rectangle 45"/>
+          <p:cNvSpPr/>
+          <p:nvPr/>
+        </p:nvSpPr>
+        <p:spPr>
+          <a:xfrm>
+            <a:off x="6400800" y="4096512"/>
+            <a:ext cx="384048" cy="420624"/>
+          </a:xfrm>
+          <a:prstGeom prst="rect">
+            <a:avLst/>
+          </a:prstGeom>
+          <a:solidFill>
+            <a:srgbClr val="F39C12"/>
+          </a:solidFill>
+          <a:ln>
+            <a:noFill/>
+          </a:ln>
+        </p:spPr>
+        <p:style>
+          <a:lnRef idx="1">
+            <a:schemeClr val="accent1"/>
+          </a:lnRef>
+          <a:fillRef idx="3">
+            <a:schemeClr val="accent1"/>
+          </a:fillRef>
+          <a:effectRef idx="2">
+            <a:schemeClr val="accent1"/>
+          </a:effectRef>
+          <a:fontRef idx="minor">
+            <a:schemeClr val="lt1"/>
+          </a:fontRef>
+        </p:style>
+        <p:txBody>
+          <a:bodyPr rtlCol="0" anchor="ctr"/>
+          <a:lstStyle/>
+          <a:p>
+            <a:pPr algn="ctr"/>
+            <a:endParaRPr/>
+          </a:p>
+        </p:txBody>
+      </p:sp>
+      <p:sp>
+        <p:nvSpPr>
+          <p:cNvPr id="47" name="TextBox 46"/>
+          <p:cNvSpPr txBox="1"/>
+          <p:nvPr/>
+        </p:nvSpPr>
+        <p:spPr>
+          <a:xfrm>
+            <a:off x="6400800" y="4123944"/>
+            <a:ext cx="384048" cy="329184"/>
+          </a:xfrm>
+          <a:prstGeom prst="rect">
+            <a:avLst/>
+          </a:prstGeom>
+          <a:noFill/>
+        </p:spPr>
+        <p:txBody>
+          <a:bodyPr wrap="square">
+            <a:spAutoFit/>
+          </a:bodyPr>
+          <a:lstStyle/>
+          <a:p>
+            <a:pPr algn="ctr"/>
+            <a:r>
+              <a:rPr sz="1300" b="1" i="0">
+                <a:solidFill>
+                  <a:srgbClr val="FFFFFF"/>
+                </a:solidFill>
+              </a:rPr>
+              <a:t>13</a:t>
+            </a:r>
+          </a:p>
+        </p:txBody>
+      </p:sp>
+      <p:sp>
+        <p:nvSpPr>
+          <p:cNvPr id="48" name="Rectangle 47"/>
+          <p:cNvSpPr/>
+          <p:nvPr/>
+        </p:nvSpPr>
+        <p:spPr>
+          <a:xfrm>
+            <a:off x="6821424" y="4096512"/>
+            <a:ext cx="5120640" cy="420624"/>
+          </a:xfrm>
+          <a:prstGeom prst="rect">
+            <a:avLst/>
+          </a:prstGeom>
+          <a:solidFill>
+            <a:srgbClr val="FFFFFF"/>
+          </a:solidFill>
+          <a:ln>
+            <a:noFill/>
+          </a:ln>
+        </p:spPr>
+        <p:style>
+          <a:lnRef idx="1">
+            <a:schemeClr val="accent1"/>
+          </a:lnRef>
+          <a:fillRef idx="3">
+            <a:schemeClr val="accent1"/>
+          </a:fillRef>
+          <a:effectRef idx="2">
+            <a:schemeClr val="accent1"/>
+          </a:effectRef>
+          <a:fontRef idx="minor">
+            <a:schemeClr val="lt1"/>
+          </a:fontRef>
+        </p:style>
+        <p:txBody>
+          <a:bodyPr rtlCol="0" anchor="ctr"/>
+          <a:lstStyle/>
+          <a:p>
+            <a:pPr algn="ctr"/>
+            <a:endParaRPr/>
+          </a:p>
+        </p:txBody>
+      </p:sp>
+      <p:sp>
+        <p:nvSpPr>
+          <p:cNvPr id="49" name="TextBox 48"/>
+          <p:cNvSpPr txBox="1"/>
+          <p:nvPr/>
+        </p:nvSpPr>
+        <p:spPr>
+          <a:xfrm>
+            <a:off x="6894576" y="4137660"/>
+            <a:ext cx="4937759" cy="310896"/>
+          </a:xfrm>
+          <a:prstGeom prst="rect">
+            <a:avLst/>
+          </a:prstGeom>
+          <a:noFill/>
+        </p:spPr>
+        <p:txBody>
+          <a:bodyPr wrap="square">
+            <a:spAutoFit/>
+          </a:bodyPr>
+          <a:lstStyle/>
+          <a:p>
+            <a:pPr algn="l"/>
+            <a:r>
+              <a:rPr sz="1300" b="0" i="0">
+                <a:solidFill>
+                  <a:srgbClr val="1C2B3A"/>
+                </a:solidFill>
+              </a:rPr>
+              <a:t>Post-Deployment: Rollback</a:t>
+            </a:r>
+          </a:p>
+        </p:txBody>
+      </p:sp>
+      <p:sp>
+        <p:nvSpPr>
+          <p:cNvPr id="50" name="Rectangle 49"/>
+          <p:cNvSpPr/>
+          <p:nvPr/>
+        </p:nvSpPr>
+        <p:spPr>
+          <a:xfrm>
+            <a:off x="6400800" y="4800600"/>
+            <a:ext cx="384048" cy="420624"/>
+          </a:xfrm>
+          <a:prstGeom prst="rect">
+            <a:avLst/>
+          </a:prstGeom>
+          <a:solidFill>
+            <a:srgbClr val="E74C3C"/>
+          </a:solidFill>
+          <a:ln>
+            <a:noFill/>
+          </a:ln>
+        </p:spPr>
+        <p:style>
+          <a:lnRef idx="1">
+            <a:schemeClr val="accent1"/>
+          </a:lnRef>
+          <a:fillRef idx="3">
+            <a:schemeClr val="accent1"/>
+          </a:fillRef>
+          <a:effectRef idx="2">
+            <a:schemeClr val="accent1"/>
+          </a:effectRef>
+          <a:fontRef idx="minor">
+            <a:schemeClr val="lt1"/>
+          </a:fontRef>
+        </p:style>
+        <p:txBody>
+          <a:bodyPr rtlCol="0" anchor="ctr"/>
+          <a:lstStyle/>
+          <a:p>
+            <a:pPr algn="ctr"/>
+            <a:endParaRPr/>
+          </a:p>
+        </p:txBody>
+      </p:sp>
+      <p:sp>
+        <p:nvSpPr>
+          <p:cNvPr id="51" name="TextBox 50"/>
+          <p:cNvSpPr txBox="1"/>
+          <p:nvPr/>
+        </p:nvSpPr>
+        <p:spPr>
+          <a:xfrm>
+            <a:off x="6400800" y="4828032"/>
+            <a:ext cx="384048" cy="329184"/>
+          </a:xfrm>
+          <a:prstGeom prst="rect">
+            <a:avLst/>
+          </a:prstGeom>
+          <a:noFill/>
+        </p:spPr>
+        <p:txBody>
+          <a:bodyPr wrap="square">
+            <a:spAutoFit/>
+          </a:bodyPr>
+          <a:lstStyle/>
+          <a:p>
+            <a:pPr algn="ctr"/>
+            <a:r>
+              <a:rPr sz="1300" b="1" i="0">
+                <a:solidFill>
+                  <a:srgbClr val="FFFFFF"/>
+                </a:solidFill>
+              </a:rPr>
+              <a:t>14</a:t>
+            </a:r>
+          </a:p>
+        </p:txBody>
+      </p:sp>
+      <p:sp>
+        <p:nvSpPr>
+          <p:cNvPr id="52" name="Rectangle 51"/>
+          <p:cNvSpPr/>
+          <p:nvPr/>
+        </p:nvSpPr>
+        <p:spPr>
+          <a:xfrm>
+            <a:off x="6821424" y="4800600"/>
+            <a:ext cx="5120640" cy="420624"/>
+          </a:xfrm>
+          <a:prstGeom prst="rect">
+            <a:avLst/>
+          </a:prstGeom>
+          <a:solidFill>
+            <a:srgbClr val="FFFFFF"/>
+          </a:solidFill>
+          <a:ln>
+            <a:noFill/>
+          </a:ln>
+        </p:spPr>
+        <p:style>
+          <a:lnRef idx="1">
+            <a:schemeClr val="accent1"/>
+          </a:lnRef>
+          <a:fillRef idx="3">
+            <a:schemeClr val="accent1"/>
+          </a:fillRef>
+          <a:effectRef idx="2">
+            <a:schemeClr val="accent1"/>
+          </a:effectRef>
+          <a:fontRef idx="minor">
+            <a:schemeClr val="lt1"/>
+          </a:fontRef>
+        </p:style>
+        <p:txBody>
+          <a:bodyPr rtlCol="0" anchor="ctr"/>
+          <a:lstStyle/>
+          <a:p>
+            <a:pPr algn="ctr"/>
+            <a:endParaRPr/>
+          </a:p>
+        </p:txBody>
+      </p:sp>
+      <p:sp>
+        <p:nvSpPr>
+          <p:cNvPr id="53" name="TextBox 52"/>
+          <p:cNvSpPr txBox="1"/>
+          <p:nvPr/>
+        </p:nvSpPr>
+        <p:spPr>
+          <a:xfrm>
+            <a:off x="6894576" y="4841748"/>
+            <a:ext cx="4937759" cy="310896"/>
+          </a:xfrm>
+          <a:prstGeom prst="rect">
+            <a:avLst/>
+          </a:prstGeom>
+          <a:noFill/>
+        </p:spPr>
+        <p:txBody>
+          <a:bodyPr wrap="square">
+            <a:spAutoFit/>
+          </a:bodyPr>
+          <a:lstStyle/>
+          <a:p>
+            <a:pPr algn="l"/>
+            <a:r>
+              <a:rPr sz="1300" b="0" i="0">
+                <a:solidFill>
+                  <a:srgbClr val="1C2B3A"/>
+                </a:solidFill>
+              </a:rPr>
+              <a:t>Post-Deployment: Bugfix</a:t>
+            </a:r>
+          </a:p>
+        </p:txBody>
+      </p:sp>
+      <p:sp>
+        <p:nvSpPr>
+          <p:cNvPr id="6" name="Rectangle 5"/>
+          <p:cNvSpPr/>
+          <p:nvPr/>
+        </p:nvSpPr>
+        <p:spPr>
+          <a:xfrm>
+            <a:off x="457200" y="5504688"/>
+            <a:ext cx="384048" cy="420624"/>
+          </a:xfrm>
+          <a:prstGeom prst="rect">
+            <a:avLst/>
+          </a:prstGeom>
+          <a:solidFill>
+            <a:srgbClr val="1A5496"/>
+          </a:solidFill>
+          <a:ln>
+            <a:noFill/>
+          </a:ln>
+        </p:spPr>
+        <p:style>
+          <a:lnRef idx="1">
+            <a:schemeClr val="accent1"/>
+          </a:lnRef>
+          <a:fillRef idx="3">
+            <a:schemeClr val="accent1"/>
+          </a:fillRef>
+          <a:effectRef idx="2">
+            <a:schemeClr val="accent1"/>
+          </a:effectRef>
+          <a:fontRef idx="minor">
+            <a:schemeClr val="lt1"/>
+          </a:fontRef>
+        </p:style>
+        <p:txBody>
+          <a:bodyPr rtlCol="0" anchor="ctr"/>
+          <a:lstStyle/>
+          <a:p>
+            <a:pPr algn="ctr"/>
+            <a:endParaRPr/>
+          </a:p>
+        </p:txBody>
+      </p:sp>
+      <p:sp>
+        <p:nvSpPr>
+          <p:cNvPr id="7" name="TextBox 6"/>
+          <p:cNvSpPr txBox="1"/>
+          <p:nvPr/>
+        </p:nvSpPr>
+        <p:spPr>
+          <a:xfrm>
+            <a:off x="457200" y="5532120"/>
+            <a:ext cx="384048" cy="329184"/>
+          </a:xfrm>
+          <a:prstGeom prst="rect">
+            <a:avLst/>
+          </a:prstGeom>
+          <a:noFill/>
+        </p:spPr>
+        <p:txBody>
+          <a:bodyPr wrap="square">
+            <a:spAutoFit/>
+          </a:bodyPr>
+          <a:lstStyle/>
+          <a:p>
+            <a:pPr algn="ctr"/>
+            <a:r>
+              <a:rPr sz="1300" b="1" i="0">
+                <a:solidFill>
+                  <a:srgbClr val="FFFFFF"/>
+                </a:solidFill>
+              </a:rPr>
               <a:t>7</a:t>
             </a:r>
           </a:p>
@@ -25133,14 +26073,326 @@
       </p:sp>
       <p:sp>
         <p:nvSpPr>
+          <p:cNvPr id="8" name="Rectangle 7"/>
+          <p:cNvSpPr/>
+          <p:nvPr/>
+        </p:nvSpPr>
+        <p:spPr>
+          <a:xfrm>
+            <a:off x="877824" y="5504688"/>
+            <a:ext cx="5120640" cy="420624"/>
+          </a:xfrm>
+          <a:prstGeom prst="rect">
+            <a:avLst/>
+          </a:prstGeom>
+          <a:solidFill>
+            <a:srgbClr val="FFFFFF"/>
+          </a:solidFill>
+          <a:ln>
+            <a:noFill/>
+          </a:ln>
+        </p:spPr>
+        <p:style>
+          <a:lnRef idx="1">
+            <a:schemeClr val="accent1"/>
+          </a:lnRef>
+          <a:fillRef idx="3">
+            <a:schemeClr val="accent1"/>
+          </a:fillRef>
+          <a:effectRef idx="2">
+            <a:schemeClr val="accent1"/>
+          </a:effectRef>
+          <a:fontRef idx="minor">
+            <a:schemeClr val="lt1"/>
+          </a:fontRef>
+        </p:style>
+        <p:txBody>
+          <a:bodyPr rtlCol="0" anchor="ctr"/>
+          <a:lstStyle/>
+          <a:p>
+            <a:pPr algn="ctr"/>
+            <a:endParaRPr/>
+          </a:p>
+        </p:txBody>
+      </p:sp>
+      <p:sp>
+        <p:nvSpPr>
+          <p:cNvPr id="9" name="TextBox 8"/>
+          <p:cNvSpPr txBox="1"/>
+          <p:nvPr/>
+        </p:nvSpPr>
+        <p:spPr>
+          <a:xfrm>
+            <a:off x="950976" y="5545836"/>
+            <a:ext cx="4937759" cy="310896"/>
+          </a:xfrm>
+          <a:prstGeom prst="rect">
+            <a:avLst/>
+          </a:prstGeom>
+          <a:noFill/>
+        </p:spPr>
+        <p:txBody>
+          <a:bodyPr wrap="square">
+            <a:spAutoFit/>
+          </a:bodyPr>
+          <a:lstStyle/>
+          <a:p>
+            <a:pPr algn="l"/>
+            <a:r>
+              <a:rPr sz="1300" b="0" i="0">
+                <a:solidFill>
+                  <a:srgbClr val="1C2B3A"/>
+                </a:solidFill>
+              </a:rPr>
+              <a:t>CD Prerequisites: Standing Up ArgoCD</a:t>
+            </a:r>
+          </a:p>
+        </p:txBody>
+      </p:sp>
+      <p:sp>
+        <p:nvSpPr>
+          <p:cNvPr id="6" name="Rectangle 5"/>
+          <p:cNvSpPr/>
+          <p:nvPr/>
+        </p:nvSpPr>
+        <p:spPr>
+          <a:xfrm>
+            <a:off x="457200" y="6208776"/>
+            <a:ext cx="384048" cy="420624"/>
+          </a:xfrm>
+          <a:prstGeom prst="rect">
+            <a:avLst/>
+          </a:prstGeom>
+          <a:solidFill>
+            <a:srgbClr val="1A5496"/>
+          </a:solidFill>
+          <a:ln>
+            <a:noFill/>
+          </a:ln>
+        </p:spPr>
+        <p:style>
+          <a:lnRef idx="1">
+            <a:schemeClr val="accent1"/>
+          </a:lnRef>
+          <a:fillRef idx="3">
+            <a:schemeClr val="accent1"/>
+          </a:fillRef>
+          <a:effectRef idx="2">
+            <a:schemeClr val="accent1"/>
+          </a:effectRef>
+          <a:fontRef idx="minor">
+            <a:schemeClr val="lt1"/>
+          </a:fontRef>
+        </p:style>
+        <p:txBody>
+          <a:bodyPr rtlCol="0" anchor="ctr"/>
+          <a:lstStyle/>
+          <a:p>
+            <a:pPr algn="ctr"/>
+            <a:endParaRPr/>
+          </a:p>
+        </p:txBody>
+      </p:sp>
+      <p:sp>
+        <p:nvSpPr>
+          <p:cNvPr id="7" name="TextBox 6"/>
+          <p:cNvSpPr txBox="1"/>
+          <p:nvPr/>
+        </p:nvSpPr>
+        <p:spPr>
+          <a:xfrm>
+            <a:off x="457200" y="6236208"/>
+            <a:ext cx="384048" cy="329184"/>
+          </a:xfrm>
+          <a:prstGeom prst="rect">
+            <a:avLst/>
+          </a:prstGeom>
+          <a:noFill/>
+        </p:spPr>
+        <p:txBody>
+          <a:bodyPr wrap="square">
+            <a:spAutoFit/>
+          </a:bodyPr>
+          <a:lstStyle/>
+          <a:p>
+            <a:pPr algn="ctr"/>
+            <a:r>
+              <a:rPr sz="1300" b="1" i="0">
+                <a:solidFill>
+                  <a:srgbClr val="FFFFFF"/>
+                </a:solidFill>
+              </a:rPr>
+              <a:t>8</a:t>
+            </a:r>
+          </a:p>
+        </p:txBody>
+      </p:sp>
+      <p:sp>
+        <p:nvSpPr>
+          <p:cNvPr id="8" name="Rectangle 7"/>
+          <p:cNvSpPr/>
+          <p:nvPr/>
+        </p:nvSpPr>
+        <p:spPr>
+          <a:xfrm>
+            <a:off x="877824" y="6208776"/>
+            <a:ext cx="5120640" cy="420624"/>
+          </a:xfrm>
+          <a:prstGeom prst="rect">
+            <a:avLst/>
+          </a:prstGeom>
+          <a:solidFill>
+            <a:srgbClr val="FFFFFF"/>
+          </a:solidFill>
+          <a:ln>
+            <a:noFill/>
+          </a:ln>
+        </p:spPr>
+        <p:style>
+          <a:lnRef idx="1">
+            <a:schemeClr val="accent1"/>
+          </a:lnRef>
+          <a:fillRef idx="3">
+            <a:schemeClr val="accent1"/>
+          </a:fillRef>
+          <a:effectRef idx="2">
+            <a:schemeClr val="accent1"/>
+          </a:effectRef>
+          <a:fontRef idx="minor">
+            <a:schemeClr val="lt1"/>
+          </a:fontRef>
+        </p:style>
+        <p:txBody>
+          <a:bodyPr rtlCol="0" anchor="ctr"/>
+          <a:lstStyle/>
+          <a:p>
+            <a:pPr algn="ctr"/>
+            <a:endParaRPr/>
+          </a:p>
+        </p:txBody>
+      </p:sp>
+      <p:sp>
+        <p:nvSpPr>
+          <p:cNvPr id="9" name="TextBox 8"/>
+          <p:cNvSpPr txBox="1"/>
+          <p:nvPr/>
+        </p:nvSpPr>
+        <p:spPr>
+          <a:xfrm>
+            <a:off x="950976" y="6249924"/>
+            <a:ext cx="4937759" cy="310896"/>
+          </a:xfrm>
+          <a:prstGeom prst="rect">
+            <a:avLst/>
+          </a:prstGeom>
+          <a:noFill/>
+        </p:spPr>
+        <p:txBody>
+          <a:bodyPr wrap="square">
+            <a:spAutoFit/>
+          </a:bodyPr>
+          <a:lstStyle/>
+          <a:p>
+            <a:pPr algn="l"/>
+            <a:r>
+              <a:rPr sz="1300" b="0" i="0">
+                <a:solidFill>
+                  <a:srgbClr val="1C2B3A"/>
+                </a:solidFill>
+              </a:rPr>
+              <a:t>Why Helm Charts, Not Raw K8s Manifests</a:t>
+            </a:r>
+          </a:p>
+        </p:txBody>
+      </p:sp>
+      <p:sp>
+        <p:nvSpPr>
+          <p:cNvPr id="30" name="Rectangle 29"/>
+          <p:cNvSpPr/>
+          <p:nvPr/>
+        </p:nvSpPr>
+        <p:spPr>
+          <a:xfrm>
+            <a:off x="6400800" y="5504688"/>
+            <a:ext cx="384048" cy="420624"/>
+          </a:xfrm>
+          <a:prstGeom prst="rect">
+            <a:avLst/>
+          </a:prstGeom>
+          <a:solidFill>
+            <a:srgbClr val="00A896"/>
+          </a:solidFill>
+          <a:ln>
+            <a:noFill/>
+          </a:ln>
+        </p:spPr>
+        <p:style>
+          <a:lnRef idx="1">
+            <a:schemeClr val="accent1"/>
+          </a:lnRef>
+          <a:fillRef idx="3">
+            <a:schemeClr val="accent1"/>
+          </a:fillRef>
+          <a:effectRef idx="2">
+            <a:schemeClr val="accent1"/>
+          </a:effectRef>
+          <a:fontRef idx="minor">
+            <a:schemeClr val="lt1"/>
+          </a:fontRef>
+        </p:style>
+        <p:txBody>
+          <a:bodyPr rtlCol="0" anchor="ctr"/>
+          <a:lstStyle/>
+          <a:p>
+            <a:pPr algn="ctr"/>
+            <a:endParaRPr/>
+          </a:p>
+        </p:txBody>
+      </p:sp>
+      <p:sp>
+        <p:nvSpPr>
+          <p:cNvPr id="31" name="TextBox 30"/>
+          <p:cNvSpPr txBox="1"/>
+          <p:nvPr/>
+        </p:nvSpPr>
+        <p:spPr>
+          <a:xfrm>
+            <a:off x="6400800" y="5532120"/>
+            <a:ext cx="384048" cy="329184"/>
+          </a:xfrm>
+          <a:prstGeom prst="rect">
+            <a:avLst/>
+          </a:prstGeom>
+          <a:noFill/>
+        </p:spPr>
+        <p:txBody>
+          <a:bodyPr wrap="square">
+            <a:spAutoFit/>
+          </a:bodyPr>
+          <a:lstStyle/>
+          <a:p>
+            <a:pPr algn="ctr"/>
+            <a:r>
+              <a:rPr sz="1300" b="1" i="0">
+                <a:solidFill>
+                  <a:srgbClr val="FFFFFF"/>
+                </a:solidFill>
+              </a:rPr>
+              <a:t>15</a:t>
+            </a:r>
+          </a:p>
+        </p:txBody>
+      </p:sp>
+      <p:sp>
+        <p:nvSpPr>
           <p:cNvPr id="32" name="Rectangle 31"/>
           <p:cNvSpPr/>
           <p:nvPr/>
         </p:nvSpPr>
         <p:spPr>
           <a:xfrm>
-            <a:off x="6821424" y="1280160"/>
-            <a:ext cx="5120640" cy="475488"/>
+            <a:off x="6821424" y="5504688"/>
+            <a:ext cx="5120640" cy="420624"/>
           </a:xfrm>
           <a:prstGeom prst="rect">
             <a:avLst/>
@@ -25183,8 +26435,8 @@
         </p:nvSpPr>
         <p:spPr>
           <a:xfrm>
-            <a:off x="6894576" y="1362456"/>
-            <a:ext cx="4937760" cy="347472"/>
+            <a:off x="6894576" y="5545836"/>
+            <a:ext cx="4937759" cy="310896"/>
           </a:xfrm>
           <a:prstGeom prst="rect">
             <a:avLst/>
@@ -25204,7 +26456,3885 @@
                   <a:srgbClr val="1C2B3A"/>
                 </a:solidFill>
               </a:rPr>
-              <a:t>Build Once, Deploy Many</a:t>
+              <a:t>Values File Flow: CI → ArgoCD → Deploy</a:t>
+            </a:r>
+          </a:p>
+        </p:txBody>
+      </p:sp>
+      <p:sp>
+        <p:nvSpPr>
+          <p:cNvPr id="30" name="Rectangle 29"/>
+          <p:cNvSpPr/>
+          <p:nvPr/>
+        </p:nvSpPr>
+        <p:spPr>
+          <a:xfrm>
+            <a:off x="6400800" y="6208776"/>
+            <a:ext cx="384048" cy="420624"/>
+          </a:xfrm>
+          <a:prstGeom prst="rect">
+            <a:avLst/>
+          </a:prstGeom>
+          <a:solidFill>
+            <a:srgbClr val="00A896"/>
+          </a:solidFill>
+          <a:ln>
+            <a:noFill/>
+          </a:ln>
+        </p:spPr>
+        <p:style>
+          <a:lnRef idx="1">
+            <a:schemeClr val="accent1"/>
+          </a:lnRef>
+          <a:fillRef idx="3">
+            <a:schemeClr val="accent1"/>
+          </a:fillRef>
+          <a:effectRef idx="2">
+            <a:schemeClr val="accent1"/>
+          </a:effectRef>
+          <a:fontRef idx="minor">
+            <a:schemeClr val="lt1"/>
+          </a:fontRef>
+        </p:style>
+        <p:txBody>
+          <a:bodyPr rtlCol="0" anchor="ctr"/>
+          <a:lstStyle/>
+          <a:p>
+            <a:pPr algn="ctr"/>
+            <a:endParaRPr/>
+          </a:p>
+        </p:txBody>
+      </p:sp>
+      <p:sp>
+        <p:nvSpPr>
+          <p:cNvPr id="31" name="TextBox 30"/>
+          <p:cNvSpPr txBox="1"/>
+          <p:nvPr/>
+        </p:nvSpPr>
+        <p:spPr>
+          <a:xfrm>
+            <a:off x="6400800" y="6236208"/>
+            <a:ext cx="384048" cy="329184"/>
+          </a:xfrm>
+          <a:prstGeom prst="rect">
+            <a:avLst/>
+          </a:prstGeom>
+          <a:noFill/>
+        </p:spPr>
+        <p:txBody>
+          <a:bodyPr wrap="square">
+            <a:spAutoFit/>
+          </a:bodyPr>
+          <a:lstStyle/>
+          <a:p>
+            <a:pPr algn="ctr"/>
+            <a:r>
+              <a:rPr sz="1300" b="1" i="0">
+                <a:solidFill>
+                  <a:srgbClr val="FFFFFF"/>
+                </a:solidFill>
+              </a:rPr>
+              <a:t>16</a:t>
+            </a:r>
+          </a:p>
+        </p:txBody>
+      </p:sp>
+      <p:sp>
+        <p:nvSpPr>
+          <p:cNvPr id="32" name="Rectangle 31"/>
+          <p:cNvSpPr/>
+          <p:nvPr/>
+        </p:nvSpPr>
+        <p:spPr>
+          <a:xfrm>
+            <a:off x="6821424" y="6208776"/>
+            <a:ext cx="5120640" cy="420624"/>
+          </a:xfrm>
+          <a:prstGeom prst="rect">
+            <a:avLst/>
+          </a:prstGeom>
+          <a:solidFill>
+            <a:srgbClr val="FFFFFF"/>
+          </a:solidFill>
+          <a:ln>
+            <a:noFill/>
+          </a:ln>
+        </p:spPr>
+        <p:style>
+          <a:lnRef idx="1">
+            <a:schemeClr val="accent1"/>
+          </a:lnRef>
+          <a:fillRef idx="3">
+            <a:schemeClr val="accent1"/>
+          </a:fillRef>
+          <a:effectRef idx="2">
+            <a:schemeClr val="accent1"/>
+          </a:effectRef>
+          <a:fontRef idx="minor">
+            <a:schemeClr val="lt1"/>
+          </a:fontRef>
+        </p:style>
+        <p:txBody>
+          <a:bodyPr rtlCol="0" anchor="ctr"/>
+          <a:lstStyle/>
+          <a:p>
+            <a:pPr algn="ctr"/>
+            <a:endParaRPr/>
+          </a:p>
+        </p:txBody>
+      </p:sp>
+      <p:sp>
+        <p:nvSpPr>
+          <p:cNvPr id="33" name="TextBox 32"/>
+          <p:cNvSpPr txBox="1"/>
+          <p:nvPr/>
+        </p:nvSpPr>
+        <p:spPr>
+          <a:xfrm>
+            <a:off x="6894576" y="6249924"/>
+            <a:ext cx="4937759" cy="310896"/>
+          </a:xfrm>
+          <a:prstGeom prst="rect">
+            <a:avLst/>
+          </a:prstGeom>
+          <a:noFill/>
+        </p:spPr>
+        <p:txBody>
+          <a:bodyPr wrap="square">
+            <a:spAutoFit/>
+          </a:bodyPr>
+          <a:lstStyle/>
+          <a:p>
+            <a:pPr algn="l"/>
+            <a:r>
+              <a:rPr sz="1300" b="0" i="0">
+                <a:solidFill>
+                  <a:srgbClr val="1C2B3A"/>
+                </a:solidFill>
+              </a:rPr>
+              <a:t>Kubernetes Resources per Service</a:t>
+            </a:r>
+          </a:p>
+        </p:txBody>
+      </p:sp>
+    </p:spTree>
+  </p:cSld>
+  <p:clrMapOvr>
+    <a:masterClrMapping/>
+  </p:clrMapOvr>
+</p:sld>
+</file>
+
+<file path=ppt/slides/slide20.xml><?xml version="1.0" encoding="utf-8"?>
+<p:sld xmlns:a="http://schemas.openxmlformats.org/drawingml/2006/main" xmlns:p="http://schemas.openxmlformats.org/presentationml/2006/main" xmlns:r="http://schemas.openxmlformats.org/officeDocument/2006/relationships">
+  <p:cSld>
+    <p:spTree>
+      <p:nvGrpSpPr>
+        <p:cNvPr id="1" name=""/>
+        <p:cNvGrpSpPr/>
+        <p:nvPr/>
+      </p:nvGrpSpPr>
+      <p:grpSpPr/>
+      <p:sp>
+        <p:nvSpPr>
+          <p:cNvPr id="2" name="Rectangle 1"/>
+          <p:cNvSpPr/>
+          <p:nvPr/>
+        </p:nvSpPr>
+        <p:spPr>
+          <a:xfrm>
+            <a:off x="0" y="0"/>
+            <a:ext cx="12188952" cy="6858000"/>
+          </a:xfrm>
+          <a:prstGeom prst="rect">
+            <a:avLst/>
+          </a:prstGeom>
+          <a:solidFill>
+            <a:srgbClr val="F5F7FA"/>
+          </a:solidFill>
+          <a:ln>
+            <a:noFill/>
+          </a:ln>
+        </p:spPr>
+        <p:style>
+          <a:lnRef idx="1">
+            <a:schemeClr val="accent1"/>
+          </a:lnRef>
+          <a:fillRef idx="3">
+            <a:schemeClr val="accent1"/>
+          </a:fillRef>
+          <a:effectRef idx="2">
+            <a:schemeClr val="accent1"/>
+          </a:effectRef>
+          <a:fontRef idx="minor">
+            <a:schemeClr val="lt1"/>
+          </a:fontRef>
+        </p:style>
+        <p:txBody>
+          <a:bodyPr rtlCol="0" anchor="ctr"/>
+          <a:lstStyle/>
+          <a:p>
+            <a:pPr algn="ctr"/>
+            <a:endParaRPr/>
+          </a:p>
+        </p:txBody>
+      </p:sp>
+      <p:sp>
+        <p:nvSpPr>
+          <p:cNvPr id="3" name="Rectangle 2"/>
+          <p:cNvSpPr/>
+          <p:nvPr/>
+        </p:nvSpPr>
+        <p:spPr>
+          <a:xfrm>
+            <a:off x="0" y="0"/>
+            <a:ext cx="12188952" cy="1005840"/>
+          </a:xfrm>
+          <a:prstGeom prst="rect">
+            <a:avLst/>
+          </a:prstGeom>
+          <a:solidFill>
+            <a:srgbClr val="1A5496"/>
+          </a:solidFill>
+          <a:ln>
+            <a:noFill/>
+          </a:ln>
+        </p:spPr>
+        <p:style>
+          <a:lnRef idx="1">
+            <a:schemeClr val="accent1"/>
+          </a:lnRef>
+          <a:fillRef idx="3">
+            <a:schemeClr val="accent1"/>
+          </a:fillRef>
+          <a:effectRef idx="2">
+            <a:schemeClr val="accent1"/>
+          </a:effectRef>
+          <a:fontRef idx="minor">
+            <a:schemeClr val="lt1"/>
+          </a:fontRef>
+        </p:style>
+        <p:txBody>
+          <a:bodyPr rtlCol="0" anchor="ctr"/>
+          <a:lstStyle/>
+          <a:p>
+            <a:pPr algn="ctr"/>
+            <a:endParaRPr/>
+          </a:p>
+        </p:txBody>
+      </p:sp>
+      <p:sp>
+        <p:nvSpPr>
+          <p:cNvPr id="4" name="TextBox 3"/>
+          <p:cNvSpPr txBox="1"/>
+          <p:nvPr/>
+        </p:nvSpPr>
+        <p:spPr>
+          <a:xfrm>
+            <a:off x="320040" y="109728"/>
+            <a:ext cx="10972800" cy="640080"/>
+          </a:xfrm>
+          <a:prstGeom prst="rect">
+            <a:avLst/>
+          </a:prstGeom>
+          <a:noFill/>
+        </p:spPr>
+        <p:txBody>
+          <a:bodyPr wrap="square">
+            <a:spAutoFit/>
+          </a:bodyPr>
+          <a:lstStyle/>
+          <a:p>
+            <a:pPr algn="l"/>
+            <a:r>
+              <a:rPr sz="2800" b="1" i="0">
+                <a:solidFill>
+                  <a:srgbClr val="FFFFFF"/>
+                </a:solidFill>
+              </a:rPr>
+              <a:t>CD Prerequisites: Standing Up ArgoCD</a:t>
+            </a:r>
+          </a:p>
+        </p:txBody>
+      </p:sp>
+      <p:sp>
+        <p:nvSpPr>
+          <p:cNvPr id="5" name="TextBox 4"/>
+          <p:cNvSpPr txBox="1"/>
+          <p:nvPr/>
+        </p:nvSpPr>
+        <p:spPr>
+          <a:xfrm>
+            <a:off x="320040" y="658368"/>
+            <a:ext cx="10972800" cy="365760"/>
+          </a:xfrm>
+          <a:prstGeom prst="rect">
+            <a:avLst/>
+          </a:prstGeom>
+          <a:noFill/>
+        </p:spPr>
+        <p:txBody>
+          <a:bodyPr wrap="square">
+            <a:spAutoFit/>
+          </a:bodyPr>
+          <a:lstStyle/>
+          <a:p>
+            <a:pPr algn="l"/>
+            <a:r>
+              <a:rPr sz="1400" b="0" i="0">
+                <a:solidFill>
+                  <a:srgbClr val="ADCCF5"/>
+                </a:solidFill>
+              </a:rPr>
+              <a:t>Three resources, installed top-down, before any service can deploy</a:t>
+            </a:r>
+          </a:p>
+        </p:txBody>
+      </p:sp>
+      <p:sp>
+        <p:nvSpPr>
+          <p:cNvPr id="6" name="Rectangle 5"/>
+          <p:cNvSpPr/>
+          <p:nvPr/>
+        </p:nvSpPr>
+        <p:spPr>
+          <a:xfrm>
+            <a:off x="0" y="1005840"/>
+            <a:ext cx="12188952" cy="36576"/>
+          </a:xfrm>
+          <a:prstGeom prst="rect">
+            <a:avLst/>
+          </a:prstGeom>
+          <a:solidFill>
+            <a:srgbClr val="00A896"/>
+          </a:solidFill>
+          <a:ln>
+            <a:noFill/>
+          </a:ln>
+        </p:spPr>
+        <p:style>
+          <a:lnRef idx="1">
+            <a:schemeClr val="accent1"/>
+          </a:lnRef>
+          <a:fillRef idx="3">
+            <a:schemeClr val="accent1"/>
+          </a:fillRef>
+          <a:effectRef idx="2">
+            <a:schemeClr val="accent1"/>
+          </a:effectRef>
+          <a:fontRef idx="minor">
+            <a:schemeClr val="lt1"/>
+          </a:fontRef>
+        </p:style>
+        <p:txBody>
+          <a:bodyPr rtlCol="0" anchor="ctr"/>
+          <a:lstStyle/>
+          <a:p>
+            <a:pPr algn="ctr"/>
+            <a:endParaRPr/>
+          </a:p>
+        </p:txBody>
+      </p:sp>
+      <p:sp>
+        <p:nvSpPr>
+          <p:cNvPr id="7" name="TextBox 6"/>
+          <p:cNvSpPr txBox="1"/>
+          <p:nvPr/>
+        </p:nvSpPr>
+        <p:spPr>
+          <a:xfrm>
+            <a:off x="274320" y="1188720"/>
+            <a:ext cx="5303520" cy="5120640"/>
+          </a:xfrm>
+          <a:prstGeom prst="rect">
+            <a:avLst/>
+          </a:prstGeom>
+          <a:noFill/>
+        </p:spPr>
+        <p:txBody>
+          <a:bodyPr wrap="square">
+            <a:spAutoFit/>
+          </a:bodyPr>
+          <a:lstStyle/>
+          <a:p>
+            <a:endParaRPr/>
+          </a:p>
+          <a:p>
+            <a:pPr algn="l">
+              <a:spcBef>
+                <a:spcPts val="400"/>
+              </a:spcBef>
+            </a:pPr>
+            <a:r>
+              <a:rPr sz="1400" b="1" i="0">
+                <a:solidFill>
+                  <a:srgbClr val="1A5496"/>
+                </a:solidFill>
+              </a:rPr>
+              <a:t>◆  1. Controller Installation</a:t>
+            </a:r>
+          </a:p>
+          <a:p>
+            <a:pPr algn="l"/>
+            <a:r>
+              <a:rPr sz="1200" b="0" i="0">
+                <a:solidFill>
+                  <a:srgbClr val="1C2B3A"/>
+                </a:solidFill>
+              </a:rPr>
+              <a:t>The argocd Namespace and core controller are installed once per cluster (Terraform-managed). An Ingress (ssl-passthrough, cert-manager TLS) exposes the UI/API at argocd.pharma.internal. Everything below depends on this existing first.</a:t>
+            </a:r>
+          </a:p>
+          <a:p>
+            <a:pPr algn="l"/>
+            <a:endParaRPr sz="1200" b="0" i="0">
+              <a:solidFill>
+                <a:srgbClr val="1C2B3A"/>
+              </a:solidFill>
+            </a:endParaRPr>
+          </a:p>
+          <a:p>
+            <a:pPr algn="l">
+              <a:spcBef>
+                <a:spcPts val="400"/>
+              </a:spcBef>
+            </a:pPr>
+            <a:r>
+              <a:rPr sz="1400" b="1" i="0">
+                <a:solidFill>
+                  <a:srgbClr val="1A5496"/>
+                </a:solidFill>
+              </a:rPr>
+              <a:t>◆  2. AppProject — the Access Boundary</a:t>
+            </a:r>
+          </a:p>
+          <a:p>
+            <a:pPr algn="l"/>
+            <a:r>
+              <a:rPr sz="1200" b="0" i="0">
+                <a:solidFill>
+                  <a:srgbClr val="1C2B3A"/>
+                </a:solidFill>
+              </a:rPr>
+              <a:t>A single pharma AppProject scopes what any Application inside it may do: allowed source repos (zen-gitops + Helm chart repos), allowed destination namespaces (dev/qa/prod/argocd/monitoring), and RBAC roles (pharma-admin → pharma-devops-team group).</a:t>
+            </a:r>
+          </a:p>
+          <a:p>
+            <a:pPr algn="l"/>
+            <a:endParaRPr sz="1200" b="0" i="0">
+              <a:solidFill>
+                <a:srgbClr val="1C2B3A"/>
+              </a:solidFill>
+            </a:endParaRPr>
+          </a:p>
+          <a:p>
+            <a:pPr algn="l">
+              <a:spcBef>
+                <a:spcPts val="400"/>
+              </a:spcBef>
+            </a:pPr>
+            <a:r>
+              <a:rPr sz="1400" b="1" i="0">
+                <a:solidFill>
+                  <a:srgbClr val="1A5496"/>
+                </a:solidFill>
+              </a:rPr>
+              <a:t>◆  3. Application — the Deployment Unit</a:t>
+            </a:r>
+          </a:p>
+          <a:p>
+            <a:pPr algn="l"/>
+            <a:r>
+              <a:rPr sz="1200" b="0" i="0">
+                <a:solidFill>
+                  <a:srgbClr val="1C2B3A"/>
+                </a:solidFill>
+              </a:rPr>
+              <a:t>One Application per service+environment (e.g. auth-service-dev). References project: pharma, a source (repo + path + Helm values file) and a destination (namespace). This is the object ArgoCD actually reconciles.</a:t>
+            </a:r>
+          </a:p>
+          <a:p>
+            <a:pPr algn="l"/>
+            <a:endParaRPr sz="1200" b="0" i="0">
+              <a:solidFill>
+                <a:srgbClr val="1C2B3A"/>
+              </a:solidFill>
+            </a:endParaRPr>
+          </a:p>
+          <a:p>
+            <a:pPr algn="l">
+              <a:spcBef>
+                <a:spcPts val="400"/>
+              </a:spcBef>
+            </a:pPr>
+            <a:r>
+              <a:rPr sz="1400" b="1" i="0">
+                <a:solidFill>
+                  <a:srgbClr val="1A5496"/>
+                </a:solidFill>
+              </a:rPr>
+              <a:t>◆  Why the order matters</a:t>
+            </a:r>
+          </a:p>
+          <a:p>
+            <a:pPr algn="l"/>
+            <a:r>
+              <a:rPr sz="1200" b="0" i="0">
+                <a:solidFill>
+                  <a:srgbClr val="1C2B3A"/>
+                </a:solidFill>
+              </a:rPr>
+              <a:t>An Application with project: pharma is rejected by the API server if the pharma AppProject doesn't exist yet. Controller → Project → Application is a hard dependency chain, not a convention.</a:t>
+            </a:r>
+          </a:p>
+        </p:txBody>
+      </p:sp>
+      <p:sp>
+        <p:nvSpPr>
+          <p:cNvPr id="8" name="Rectangle 7"/>
+          <p:cNvSpPr/>
+          <p:nvPr/>
+        </p:nvSpPr>
+        <p:spPr>
+          <a:xfrm>
+            <a:off x="5806440" y="1143000"/>
+            <a:ext cx="6035040" cy="411480"/>
+          </a:xfrm>
+          <a:prstGeom prst="rect">
+            <a:avLst/>
+          </a:prstGeom>
+          <a:solidFill>
+            <a:srgbClr val="1A5496"/>
+          </a:solidFill>
+          <a:ln>
+            <a:noFill/>
+          </a:ln>
+        </p:spPr>
+        <p:style>
+          <a:lnRef idx="1">
+            <a:schemeClr val="accent1"/>
+          </a:lnRef>
+          <a:fillRef idx="3">
+            <a:schemeClr val="accent1"/>
+          </a:fillRef>
+          <a:effectRef idx="2">
+            <a:schemeClr val="accent1"/>
+          </a:effectRef>
+          <a:fontRef idx="minor">
+            <a:schemeClr val="lt1"/>
+          </a:fontRef>
+        </p:style>
+        <p:txBody>
+          <a:bodyPr rtlCol="0" anchor="ctr"/>
+          <a:lstStyle/>
+          <a:p>
+            <a:pPr algn="ctr"/>
+            <a:endParaRPr/>
+          </a:p>
+        </p:txBody>
+      </p:sp>
+      <p:sp>
+        <p:nvSpPr>
+          <p:cNvPr id="9" name="TextBox 8"/>
+          <p:cNvSpPr txBox="1"/>
+          <p:nvPr/>
+        </p:nvSpPr>
+        <p:spPr>
+          <a:xfrm>
+            <a:off x="5897880" y="1170432"/>
+            <a:ext cx="5852160" cy="347472"/>
+          </a:xfrm>
+          <a:prstGeom prst="rect">
+            <a:avLst/>
+          </a:prstGeom>
+          <a:noFill/>
+        </p:spPr>
+        <p:txBody>
+          <a:bodyPr wrap="square">
+            <a:spAutoFit/>
+          </a:bodyPr>
+          <a:lstStyle/>
+          <a:p>
+            <a:pPr algn="l"/>
+            <a:r>
+              <a:rPr sz="1300" b="1" i="0">
+                <a:solidFill>
+                  <a:srgbClr val="FFFFFF"/>
+                </a:solidFill>
+              </a:rPr>
+              <a:t>argocd/ folder — install &amp; projects</a:t>
+            </a:r>
+          </a:p>
+        </p:txBody>
+      </p:sp>
+      <p:sp>
+        <p:nvSpPr>
+          <p:cNvPr id="10" name="Rectangle 9"/>
+          <p:cNvSpPr/>
+          <p:nvPr/>
+        </p:nvSpPr>
+        <p:spPr>
+          <a:xfrm>
+            <a:off x="5806440" y="1627632"/>
+            <a:ext cx="6035040" cy="457200"/>
+          </a:xfrm>
+          <a:prstGeom prst="rect">
+            <a:avLst/>
+          </a:prstGeom>
+          <a:solidFill>
+            <a:srgbClr val="E8F0FE"/>
+          </a:solidFill>
+          <a:ln>
+            <a:noFill/>
+          </a:ln>
+        </p:spPr>
+        <p:style>
+          <a:lnRef idx="1">
+            <a:schemeClr val="accent1"/>
+          </a:lnRef>
+          <a:fillRef idx="3">
+            <a:schemeClr val="accent1"/>
+          </a:fillRef>
+          <a:effectRef idx="2">
+            <a:schemeClr val="accent1"/>
+          </a:effectRef>
+          <a:fontRef idx="minor">
+            <a:schemeClr val="lt1"/>
+          </a:fontRef>
+        </p:style>
+        <p:txBody>
+          <a:bodyPr rtlCol="0" anchor="ctr"/>
+          <a:lstStyle/>
+          <a:p>
+            <a:pPr algn="ctr"/>
+            <a:endParaRPr/>
+          </a:p>
+        </p:txBody>
+      </p:sp>
+      <p:sp>
+        <p:nvSpPr>
+          <p:cNvPr id="11" name="TextBox 10"/>
+          <p:cNvSpPr txBox="1"/>
+          <p:nvPr/>
+        </p:nvSpPr>
+        <p:spPr>
+          <a:xfrm>
+            <a:off x="5897880" y="1700784"/>
+            <a:ext cx="5852160" cy="320040"/>
+          </a:xfrm>
+          <a:prstGeom prst="rect">
+            <a:avLst/>
+          </a:prstGeom>
+          <a:noFill/>
+        </p:spPr>
+        <p:txBody>
+          <a:bodyPr wrap="square">
+            <a:spAutoFit/>
+          </a:bodyPr>
+          <a:lstStyle/>
+          <a:p>
+            <a:pPr algn="l"/>
+            <a:r>
+              <a:rPr sz="1150" b="1" i="0">
+                <a:solidFill>
+                  <a:srgbClr val="1A5496"/>
+                </a:solidFill>
+              </a:rPr>
+              <a:t>zen-gitops/argocd/</a:t>
+            </a:r>
+          </a:p>
+        </p:txBody>
+      </p:sp>
+      <p:sp>
+        <p:nvSpPr>
+          <p:cNvPr id="12" name="Rectangle 11"/>
+          <p:cNvSpPr/>
+          <p:nvPr/>
+        </p:nvSpPr>
+        <p:spPr>
+          <a:xfrm>
+            <a:off x="5806440" y="2121408"/>
+            <a:ext cx="6035040" cy="457200"/>
+          </a:xfrm>
+          <a:prstGeom prst="rect">
+            <a:avLst/>
+          </a:prstGeom>
+          <a:solidFill>
+            <a:srgbClr val="FFFFFF"/>
+          </a:solidFill>
+          <a:ln>
+            <a:noFill/>
+          </a:ln>
+        </p:spPr>
+        <p:style>
+          <a:lnRef idx="1">
+            <a:schemeClr val="accent1"/>
+          </a:lnRef>
+          <a:fillRef idx="3">
+            <a:schemeClr val="accent1"/>
+          </a:fillRef>
+          <a:effectRef idx="2">
+            <a:schemeClr val="accent1"/>
+          </a:effectRef>
+          <a:fontRef idx="minor">
+            <a:schemeClr val="lt1"/>
+          </a:fontRef>
+        </p:style>
+        <p:txBody>
+          <a:bodyPr rtlCol="0" anchor="ctr"/>
+          <a:lstStyle/>
+          <a:p>
+            <a:pPr algn="ctr"/>
+            <a:endParaRPr/>
+          </a:p>
+        </p:txBody>
+      </p:sp>
+      <p:sp>
+        <p:nvSpPr>
+          <p:cNvPr id="13" name="TextBox 12"/>
+          <p:cNvSpPr txBox="1"/>
+          <p:nvPr/>
+        </p:nvSpPr>
+        <p:spPr>
+          <a:xfrm>
+            <a:off x="5897880" y="2194560"/>
+            <a:ext cx="5852160" cy="320040"/>
+          </a:xfrm>
+          <a:prstGeom prst="rect">
+            <a:avLst/>
+          </a:prstGeom>
+          <a:noFill/>
+        </p:spPr>
+        <p:txBody>
+          <a:bodyPr wrap="square">
+            <a:spAutoFit/>
+          </a:bodyPr>
+          <a:lstStyle/>
+          <a:p>
+            <a:pPr algn="l"/>
+            <a:r>
+              <a:rPr sz="1150" b="0" i="0">
+                <a:solidFill>
+                  <a:srgbClr val="00A896"/>
+                </a:solidFill>
+              </a:rPr>
+              <a:t>  install/</a:t>
+            </a:r>
+          </a:p>
+        </p:txBody>
+      </p:sp>
+      <p:sp>
+        <p:nvSpPr>
+          <p:cNvPr id="14" name="Rectangle 13"/>
+          <p:cNvSpPr/>
+          <p:nvPr/>
+        </p:nvSpPr>
+        <p:spPr>
+          <a:xfrm>
+            <a:off x="5806440" y="2615184"/>
+            <a:ext cx="6035040" cy="457200"/>
+          </a:xfrm>
+          <a:prstGeom prst="rect">
+            <a:avLst/>
+          </a:prstGeom>
+          <a:solidFill>
+            <a:srgbClr val="E8F0FE"/>
+          </a:solidFill>
+          <a:ln>
+            <a:noFill/>
+          </a:ln>
+        </p:spPr>
+        <p:style>
+          <a:lnRef idx="1">
+            <a:schemeClr val="accent1"/>
+          </a:lnRef>
+          <a:fillRef idx="3">
+            <a:schemeClr val="accent1"/>
+          </a:fillRef>
+          <a:effectRef idx="2">
+            <a:schemeClr val="accent1"/>
+          </a:effectRef>
+          <a:fontRef idx="minor">
+            <a:schemeClr val="lt1"/>
+          </a:fontRef>
+        </p:style>
+        <p:txBody>
+          <a:bodyPr rtlCol="0" anchor="ctr"/>
+          <a:lstStyle/>
+          <a:p>
+            <a:pPr algn="ctr"/>
+            <a:endParaRPr/>
+          </a:p>
+        </p:txBody>
+      </p:sp>
+      <p:sp>
+        <p:nvSpPr>
+          <p:cNvPr id="15" name="TextBox 14"/>
+          <p:cNvSpPr txBox="1"/>
+          <p:nvPr/>
+        </p:nvSpPr>
+        <p:spPr>
+          <a:xfrm>
+            <a:off x="5897880" y="2688336"/>
+            <a:ext cx="5852160" cy="320040"/>
+          </a:xfrm>
+          <a:prstGeom prst="rect">
+            <a:avLst/>
+          </a:prstGeom>
+          <a:noFill/>
+        </p:spPr>
+        <p:txBody>
+          <a:bodyPr wrap="square">
+            <a:spAutoFit/>
+          </a:bodyPr>
+          <a:lstStyle/>
+          <a:p>
+            <a:pPr algn="l"/>
+            <a:r>
+              <a:rPr sz="1150" b="0" i="0">
+                <a:solidFill>
+                  <a:srgbClr val="27AE60"/>
+                </a:solidFill>
+              </a:rPr>
+              <a:t>    argocd-namespace.yaml   ← Namespace: argocd</a:t>
+            </a:r>
+          </a:p>
+        </p:txBody>
+      </p:sp>
+      <p:sp>
+        <p:nvSpPr>
+          <p:cNvPr id="16" name="Rectangle 15"/>
+          <p:cNvSpPr/>
+          <p:nvPr/>
+        </p:nvSpPr>
+        <p:spPr>
+          <a:xfrm>
+            <a:off x="5806440" y="3108960"/>
+            <a:ext cx="6035040" cy="457200"/>
+          </a:xfrm>
+          <a:prstGeom prst="rect">
+            <a:avLst/>
+          </a:prstGeom>
+          <a:solidFill>
+            <a:srgbClr val="FFFFFF"/>
+          </a:solidFill>
+          <a:ln>
+            <a:noFill/>
+          </a:ln>
+        </p:spPr>
+        <p:style>
+          <a:lnRef idx="1">
+            <a:schemeClr val="accent1"/>
+          </a:lnRef>
+          <a:fillRef idx="3">
+            <a:schemeClr val="accent1"/>
+          </a:fillRef>
+          <a:effectRef idx="2">
+            <a:schemeClr val="accent1"/>
+          </a:effectRef>
+          <a:fontRef idx="minor">
+            <a:schemeClr val="lt1"/>
+          </a:fontRef>
+        </p:style>
+        <p:txBody>
+          <a:bodyPr rtlCol="0" anchor="ctr"/>
+          <a:lstStyle/>
+          <a:p>
+            <a:pPr algn="ctr"/>
+            <a:endParaRPr/>
+          </a:p>
+        </p:txBody>
+      </p:sp>
+      <p:sp>
+        <p:nvSpPr>
+          <p:cNvPr id="17" name="TextBox 16"/>
+          <p:cNvSpPr txBox="1"/>
+          <p:nvPr/>
+        </p:nvSpPr>
+        <p:spPr>
+          <a:xfrm>
+            <a:off x="5897880" y="3182112"/>
+            <a:ext cx="5852160" cy="320040"/>
+          </a:xfrm>
+          <a:prstGeom prst="rect">
+            <a:avLst/>
+          </a:prstGeom>
+          <a:noFill/>
+        </p:spPr>
+        <p:txBody>
+          <a:bodyPr wrap="square">
+            <a:spAutoFit/>
+          </a:bodyPr>
+          <a:lstStyle/>
+          <a:p>
+            <a:pPr algn="l"/>
+            <a:r>
+              <a:rPr sz="1150" b="0" i="0">
+                <a:solidFill>
+                  <a:srgbClr val="F39C12"/>
+                </a:solidFill>
+              </a:rPr>
+              <a:t>    argocd-ingress.yaml     ← UI/API ingress (TLS)</a:t>
+            </a:r>
+          </a:p>
+        </p:txBody>
+      </p:sp>
+      <p:sp>
+        <p:nvSpPr>
+          <p:cNvPr id="18" name="Rectangle 17"/>
+          <p:cNvSpPr/>
+          <p:nvPr/>
+        </p:nvSpPr>
+        <p:spPr>
+          <a:xfrm>
+            <a:off x="5806440" y="3602736"/>
+            <a:ext cx="6035040" cy="457200"/>
+          </a:xfrm>
+          <a:prstGeom prst="rect">
+            <a:avLst/>
+          </a:prstGeom>
+          <a:solidFill>
+            <a:srgbClr val="E8F0FE"/>
+          </a:solidFill>
+          <a:ln>
+            <a:noFill/>
+          </a:ln>
+        </p:spPr>
+        <p:style>
+          <a:lnRef idx="1">
+            <a:schemeClr val="accent1"/>
+          </a:lnRef>
+          <a:fillRef idx="3">
+            <a:schemeClr val="accent1"/>
+          </a:fillRef>
+          <a:effectRef idx="2">
+            <a:schemeClr val="accent1"/>
+          </a:effectRef>
+          <a:fontRef idx="minor">
+            <a:schemeClr val="lt1"/>
+          </a:fontRef>
+        </p:style>
+        <p:txBody>
+          <a:bodyPr rtlCol="0" anchor="ctr"/>
+          <a:lstStyle/>
+          <a:p>
+            <a:pPr algn="ctr"/>
+            <a:endParaRPr/>
+          </a:p>
+        </p:txBody>
+      </p:sp>
+      <p:sp>
+        <p:nvSpPr>
+          <p:cNvPr id="19" name="TextBox 18"/>
+          <p:cNvSpPr txBox="1"/>
+          <p:nvPr/>
+        </p:nvSpPr>
+        <p:spPr>
+          <a:xfrm>
+            <a:off x="5897880" y="3675888"/>
+            <a:ext cx="5852160" cy="320040"/>
+          </a:xfrm>
+          <a:prstGeom prst="rect">
+            <a:avLst/>
+          </a:prstGeom>
+          <a:noFill/>
+        </p:spPr>
+        <p:txBody>
+          <a:bodyPr wrap="square">
+            <a:spAutoFit/>
+          </a:bodyPr>
+          <a:lstStyle/>
+          <a:p>
+            <a:pPr algn="l"/>
+            <a:r>
+              <a:rPr sz="1150" b="0" i="0">
+                <a:solidFill>
+                  <a:srgbClr val="E74C3C"/>
+                </a:solidFill>
+              </a:rPr>
+              <a:t>    (Terraform-managed, once per cluster)</a:t>
+            </a:r>
+          </a:p>
+        </p:txBody>
+      </p:sp>
+      <p:sp>
+        <p:nvSpPr>
+          <p:cNvPr id="20" name="Rectangle 19"/>
+          <p:cNvSpPr/>
+          <p:nvPr/>
+        </p:nvSpPr>
+        <p:spPr>
+          <a:xfrm>
+            <a:off x="5806440" y="4096512"/>
+            <a:ext cx="6035040" cy="457200"/>
+          </a:xfrm>
+          <a:prstGeom prst="rect">
+            <a:avLst/>
+          </a:prstGeom>
+          <a:solidFill>
+            <a:srgbClr val="FFFFFF"/>
+          </a:solidFill>
+          <a:ln>
+            <a:noFill/>
+          </a:ln>
+        </p:spPr>
+        <p:style>
+          <a:lnRef idx="1">
+            <a:schemeClr val="accent1"/>
+          </a:lnRef>
+          <a:fillRef idx="3">
+            <a:schemeClr val="accent1"/>
+          </a:fillRef>
+          <a:effectRef idx="2">
+            <a:schemeClr val="accent1"/>
+          </a:effectRef>
+          <a:fontRef idx="minor">
+            <a:schemeClr val="lt1"/>
+          </a:fontRef>
+        </p:style>
+        <p:txBody>
+          <a:bodyPr rtlCol="0" anchor="ctr"/>
+          <a:lstStyle/>
+          <a:p>
+            <a:pPr algn="ctr"/>
+            <a:endParaRPr/>
+          </a:p>
+        </p:txBody>
+      </p:sp>
+      <p:sp>
+        <p:nvSpPr>
+          <p:cNvPr id="21" name="TextBox 20"/>
+          <p:cNvSpPr txBox="1"/>
+          <p:nvPr/>
+        </p:nvSpPr>
+        <p:spPr>
+          <a:xfrm>
+            <a:off x="5897880" y="4169664"/>
+            <a:ext cx="5852160" cy="320040"/>
+          </a:xfrm>
+          <a:prstGeom prst="rect">
+            <a:avLst/>
+          </a:prstGeom>
+          <a:noFill/>
+        </p:spPr>
+        <p:txBody>
+          <a:bodyPr wrap="square">
+            <a:spAutoFit/>
+          </a:bodyPr>
+          <a:lstStyle/>
+          <a:p>
+            <a:pPr algn="l"/>
+            <a:r>
+              <a:rPr sz="1150" b="0" i="0">
+                <a:solidFill>
+                  <a:srgbClr val="00A896"/>
+                </a:solidFill>
+              </a:rPr>
+              <a:t>  projects/</a:t>
+            </a:r>
+          </a:p>
+        </p:txBody>
+      </p:sp>
+      <p:sp>
+        <p:nvSpPr>
+          <p:cNvPr id="22" name="Rectangle 21"/>
+          <p:cNvSpPr/>
+          <p:nvPr/>
+        </p:nvSpPr>
+        <p:spPr>
+          <a:xfrm>
+            <a:off x="5806440" y="4590288"/>
+            <a:ext cx="6035040" cy="457200"/>
+          </a:xfrm>
+          <a:prstGeom prst="rect">
+            <a:avLst/>
+          </a:prstGeom>
+          <a:solidFill>
+            <a:srgbClr val="E8F0FE"/>
+          </a:solidFill>
+          <a:ln>
+            <a:noFill/>
+          </a:ln>
+        </p:spPr>
+        <p:style>
+          <a:lnRef idx="1">
+            <a:schemeClr val="accent1"/>
+          </a:lnRef>
+          <a:fillRef idx="3">
+            <a:schemeClr val="accent1"/>
+          </a:fillRef>
+          <a:effectRef idx="2">
+            <a:schemeClr val="accent1"/>
+          </a:effectRef>
+          <a:fontRef idx="minor">
+            <a:schemeClr val="lt1"/>
+          </a:fontRef>
+        </p:style>
+        <p:txBody>
+          <a:bodyPr rtlCol="0" anchor="ctr"/>
+          <a:lstStyle/>
+          <a:p>
+            <a:pPr algn="ctr"/>
+            <a:endParaRPr/>
+          </a:p>
+        </p:txBody>
+      </p:sp>
+      <p:sp>
+        <p:nvSpPr>
+          <p:cNvPr id="23" name="TextBox 22"/>
+          <p:cNvSpPr txBox="1"/>
+          <p:nvPr/>
+        </p:nvSpPr>
+        <p:spPr>
+          <a:xfrm>
+            <a:off x="5897880" y="4663440"/>
+            <a:ext cx="5852160" cy="320040"/>
+          </a:xfrm>
+          <a:prstGeom prst="rect">
+            <a:avLst/>
+          </a:prstGeom>
+          <a:noFill/>
+        </p:spPr>
+        <p:txBody>
+          <a:bodyPr wrap="square">
+            <a:spAutoFit/>
+          </a:bodyPr>
+          <a:lstStyle/>
+          <a:p>
+            <a:pPr algn="l"/>
+            <a:r>
+              <a:rPr sz="1150" b="0" i="0">
+                <a:solidFill>
+                  <a:srgbClr val="27AE60"/>
+                </a:solidFill>
+              </a:rPr>
+              <a:t>    pharma-project.yaml     ← AppProject: pharma</a:t>
+            </a:r>
+          </a:p>
+        </p:txBody>
+      </p:sp>
+      <p:sp>
+        <p:nvSpPr>
+          <p:cNvPr id="24" name="Rectangle 23"/>
+          <p:cNvSpPr/>
+          <p:nvPr/>
+        </p:nvSpPr>
+        <p:spPr>
+          <a:xfrm>
+            <a:off x="5806440" y="5084064"/>
+            <a:ext cx="6035040" cy="457200"/>
+          </a:xfrm>
+          <a:prstGeom prst="rect">
+            <a:avLst/>
+          </a:prstGeom>
+          <a:solidFill>
+            <a:srgbClr val="FFFFFF"/>
+          </a:solidFill>
+          <a:ln>
+            <a:noFill/>
+          </a:ln>
+        </p:spPr>
+        <p:style>
+          <a:lnRef idx="1">
+            <a:schemeClr val="accent1"/>
+          </a:lnRef>
+          <a:fillRef idx="3">
+            <a:schemeClr val="accent1"/>
+          </a:fillRef>
+          <a:effectRef idx="2">
+            <a:schemeClr val="accent1"/>
+          </a:effectRef>
+          <a:fontRef idx="minor">
+            <a:schemeClr val="lt1"/>
+          </a:fontRef>
+        </p:style>
+        <p:txBody>
+          <a:bodyPr rtlCol="0" anchor="ctr"/>
+          <a:lstStyle/>
+          <a:p>
+            <a:pPr algn="ctr"/>
+            <a:endParaRPr/>
+          </a:p>
+        </p:txBody>
+      </p:sp>
+      <p:sp>
+        <p:nvSpPr>
+          <p:cNvPr id="25" name="TextBox 24"/>
+          <p:cNvSpPr txBox="1"/>
+          <p:nvPr/>
+        </p:nvSpPr>
+        <p:spPr>
+          <a:xfrm>
+            <a:off x="5897880" y="5157216"/>
+            <a:ext cx="5852160" cy="320040"/>
+          </a:xfrm>
+          <a:prstGeom prst="rect">
+            <a:avLst/>
+          </a:prstGeom>
+          <a:noFill/>
+        </p:spPr>
+        <p:txBody>
+          <a:bodyPr wrap="square">
+            <a:spAutoFit/>
+          </a:bodyPr>
+          <a:lstStyle/>
+          <a:p>
+            <a:pPr algn="l"/>
+            <a:r>
+              <a:rPr sz="1150" b="0" i="0">
+                <a:solidFill>
+                  <a:srgbClr val="F39C12"/>
+                </a:solidFill>
+              </a:rPr>
+              <a:t>    sourceRepos + destinations + roles</a:t>
+            </a:r>
+          </a:p>
+        </p:txBody>
+      </p:sp>
+      <p:sp>
+        <p:nvSpPr>
+          <p:cNvPr id="26" name="Rectangle 25"/>
+          <p:cNvSpPr/>
+          <p:nvPr/>
+        </p:nvSpPr>
+        <p:spPr>
+          <a:xfrm>
+            <a:off x="5806440" y="5577840"/>
+            <a:ext cx="6035040" cy="457200"/>
+          </a:xfrm>
+          <a:prstGeom prst="rect">
+            <a:avLst/>
+          </a:prstGeom>
+          <a:solidFill>
+            <a:srgbClr val="E8F0FE"/>
+          </a:solidFill>
+          <a:ln>
+            <a:noFill/>
+          </a:ln>
+        </p:spPr>
+        <p:style>
+          <a:lnRef idx="1">
+            <a:schemeClr val="accent1"/>
+          </a:lnRef>
+          <a:fillRef idx="3">
+            <a:schemeClr val="accent1"/>
+          </a:fillRef>
+          <a:effectRef idx="2">
+            <a:schemeClr val="accent1"/>
+          </a:effectRef>
+          <a:fontRef idx="minor">
+            <a:schemeClr val="lt1"/>
+          </a:fontRef>
+        </p:style>
+        <p:txBody>
+          <a:bodyPr rtlCol="0" anchor="ctr"/>
+          <a:lstStyle/>
+          <a:p>
+            <a:pPr algn="ctr"/>
+            <a:endParaRPr/>
+          </a:p>
+        </p:txBody>
+      </p:sp>
+      <p:sp>
+        <p:nvSpPr>
+          <p:cNvPr id="27" name="TextBox 26"/>
+          <p:cNvSpPr txBox="1"/>
+          <p:nvPr/>
+        </p:nvSpPr>
+        <p:spPr>
+          <a:xfrm>
+            <a:off x="5897880" y="5650992"/>
+            <a:ext cx="5852160" cy="320040"/>
+          </a:xfrm>
+          <a:prstGeom prst="rect">
+            <a:avLst/>
+          </a:prstGeom>
+          <a:noFill/>
+        </p:spPr>
+        <p:txBody>
+          <a:bodyPr wrap="square">
+            <a:spAutoFit/>
+          </a:bodyPr>
+          <a:lstStyle/>
+          <a:p>
+            <a:pPr algn="l"/>
+            <a:r>
+              <a:rPr sz="1150" b="0" i="0">
+                <a:solidFill>
+                  <a:srgbClr val="E74C3C"/>
+                </a:solidFill>
+              </a:rPr>
+              <a:t>    apps/dev|qa|prod/*.yaml reference this by name</a:t>
+            </a:r>
+          </a:p>
+        </p:txBody>
+      </p:sp>
+      <p:sp>
+        <p:nvSpPr>
+          <p:cNvPr id="28" name="Rectangle 27"/>
+          <p:cNvSpPr/>
+          <p:nvPr/>
+        </p:nvSpPr>
+        <p:spPr>
+          <a:xfrm>
+            <a:off x="5806440" y="6126480"/>
+            <a:ext cx="6035040" cy="502920"/>
+          </a:xfrm>
+          <a:prstGeom prst="rect">
+            <a:avLst/>
+          </a:prstGeom>
+          <a:solidFill>
+            <a:srgbClr val="E8F0FE"/>
+          </a:solidFill>
+          <a:ln>
+            <a:noFill/>
+          </a:ln>
+        </p:spPr>
+        <p:style>
+          <a:lnRef idx="1">
+            <a:schemeClr val="accent1"/>
+          </a:lnRef>
+          <a:fillRef idx="3">
+            <a:schemeClr val="accent1"/>
+          </a:fillRef>
+          <a:effectRef idx="2">
+            <a:schemeClr val="accent1"/>
+          </a:effectRef>
+          <a:fontRef idx="minor">
+            <a:schemeClr val="lt1"/>
+          </a:fontRef>
+        </p:style>
+        <p:txBody>
+          <a:bodyPr rtlCol="0" anchor="ctr"/>
+          <a:lstStyle/>
+          <a:p>
+            <a:pPr algn="ctr"/>
+            <a:endParaRPr/>
+          </a:p>
+        </p:txBody>
+      </p:sp>
+      <p:sp>
+        <p:nvSpPr>
+          <p:cNvPr id="29" name="TextBox 28"/>
+          <p:cNvSpPr txBox="1"/>
+          <p:nvPr/>
+        </p:nvSpPr>
+        <p:spPr>
+          <a:xfrm>
+            <a:off x="5897880" y="6172200"/>
+            <a:ext cx="5897880" cy="384048"/>
+          </a:xfrm>
+          <a:prstGeom prst="rect">
+            <a:avLst/>
+          </a:prstGeom>
+          <a:noFill/>
+        </p:spPr>
+        <p:txBody>
+          <a:bodyPr wrap="square">
+            <a:spAutoFit/>
+          </a:bodyPr>
+          <a:lstStyle/>
+          <a:p>
+            <a:pPr algn="l"/>
+            <a:r>
+              <a:rPr sz="1100" b="0" i="1">
+                <a:solidFill>
+                  <a:srgbClr val="1A5496"/>
+                </a:solidFill>
+              </a:rPr>
+              <a:t>Install order:   namespace → ingress → AppProject → Applications   (each references the one before it by name)</a:t>
+            </a:r>
+          </a:p>
+        </p:txBody>
+      </p:sp>
+    </p:spTree>
+  </p:cSld>
+  <p:clrMapOvr>
+    <a:masterClrMapping/>
+  </p:clrMapOvr>
+</p:sld>
+</file>
+
+<file path=ppt/slides/slide21.xml><?xml version="1.0" encoding="utf-8"?>
+<p:sld xmlns:a="http://schemas.openxmlformats.org/drawingml/2006/main" xmlns:p="http://schemas.openxmlformats.org/presentationml/2006/main" xmlns:r="http://schemas.openxmlformats.org/officeDocument/2006/relationships">
+  <p:cSld>
+    <p:spTree>
+      <p:nvGrpSpPr>
+        <p:cNvPr id="1" name=""/>
+        <p:cNvGrpSpPr/>
+        <p:nvPr/>
+      </p:nvGrpSpPr>
+      <p:grpSpPr/>
+      <p:sp>
+        <p:nvSpPr>
+          <p:cNvPr id="2" name="Rectangle 1"/>
+          <p:cNvSpPr/>
+          <p:nvPr/>
+        </p:nvSpPr>
+        <p:spPr>
+          <a:xfrm>
+            <a:off x="0" y="0"/>
+            <a:ext cx="12188952" cy="6858000"/>
+          </a:xfrm>
+          <a:prstGeom prst="rect">
+            <a:avLst/>
+          </a:prstGeom>
+          <a:solidFill>
+            <a:srgbClr val="F5F7FA"/>
+          </a:solidFill>
+          <a:ln>
+            <a:noFill/>
+          </a:ln>
+        </p:spPr>
+        <p:style>
+          <a:lnRef idx="1">
+            <a:schemeClr val="accent1"/>
+          </a:lnRef>
+          <a:fillRef idx="3">
+            <a:schemeClr val="accent1"/>
+          </a:fillRef>
+          <a:effectRef idx="2">
+            <a:schemeClr val="accent1"/>
+          </a:effectRef>
+          <a:fontRef idx="minor">
+            <a:schemeClr val="lt1"/>
+          </a:fontRef>
+        </p:style>
+        <p:txBody>
+          <a:bodyPr rtlCol="0" anchor="ctr"/>
+          <a:lstStyle/>
+          <a:p>
+            <a:pPr algn="ctr"/>
+            <a:endParaRPr/>
+          </a:p>
+        </p:txBody>
+      </p:sp>
+      <p:sp>
+        <p:nvSpPr>
+          <p:cNvPr id="3" name="Rectangle 2"/>
+          <p:cNvSpPr/>
+          <p:nvPr/>
+        </p:nvSpPr>
+        <p:spPr>
+          <a:xfrm>
+            <a:off x="0" y="0"/>
+            <a:ext cx="12188952" cy="1005840"/>
+          </a:xfrm>
+          <a:prstGeom prst="rect">
+            <a:avLst/>
+          </a:prstGeom>
+          <a:solidFill>
+            <a:srgbClr val="1A5496"/>
+          </a:solidFill>
+          <a:ln>
+            <a:noFill/>
+          </a:ln>
+        </p:spPr>
+        <p:style>
+          <a:lnRef idx="1">
+            <a:schemeClr val="accent1"/>
+          </a:lnRef>
+          <a:fillRef idx="3">
+            <a:schemeClr val="accent1"/>
+          </a:fillRef>
+          <a:effectRef idx="2">
+            <a:schemeClr val="accent1"/>
+          </a:effectRef>
+          <a:fontRef idx="minor">
+            <a:schemeClr val="lt1"/>
+          </a:fontRef>
+        </p:style>
+        <p:txBody>
+          <a:bodyPr rtlCol="0" anchor="ctr"/>
+          <a:lstStyle/>
+          <a:p>
+            <a:pPr algn="ctr"/>
+            <a:endParaRPr/>
+          </a:p>
+        </p:txBody>
+      </p:sp>
+      <p:sp>
+        <p:nvSpPr>
+          <p:cNvPr id="4" name="TextBox 3"/>
+          <p:cNvSpPr txBox="1"/>
+          <p:nvPr/>
+        </p:nvSpPr>
+        <p:spPr>
+          <a:xfrm>
+            <a:off x="320040" y="109728"/>
+            <a:ext cx="10972800" cy="640080"/>
+          </a:xfrm>
+          <a:prstGeom prst="rect">
+            <a:avLst/>
+          </a:prstGeom>
+          <a:noFill/>
+        </p:spPr>
+        <p:txBody>
+          <a:bodyPr wrap="square">
+            <a:spAutoFit/>
+          </a:bodyPr>
+          <a:lstStyle/>
+          <a:p>
+            <a:pPr algn="l"/>
+            <a:r>
+              <a:rPr sz="2800" b="1" i="0">
+                <a:solidFill>
+                  <a:srgbClr val="FFFFFF"/>
+                </a:solidFill>
+              </a:rPr>
+              <a:t>Why Helm Charts, Not Raw K8s Manifests</a:t>
+            </a:r>
+          </a:p>
+        </p:txBody>
+      </p:sp>
+      <p:sp>
+        <p:nvSpPr>
+          <p:cNvPr id="5" name="TextBox 4"/>
+          <p:cNvSpPr txBox="1"/>
+          <p:nvPr/>
+        </p:nvSpPr>
+        <p:spPr>
+          <a:xfrm>
+            <a:off x="320040" y="658368"/>
+            <a:ext cx="10972800" cy="365760"/>
+          </a:xfrm>
+          <a:prstGeom prst="rect">
+            <a:avLst/>
+          </a:prstGeom>
+          <a:noFill/>
+        </p:spPr>
+        <p:txBody>
+          <a:bodyPr wrap="square">
+            <a:spAutoFit/>
+          </a:bodyPr>
+          <a:lstStyle/>
+          <a:p>
+            <a:pPr algn="l"/>
+            <a:r>
+              <a:rPr sz="1400" b="0" i="0">
+                <a:solidFill>
+                  <a:srgbClr val="ADCCF5"/>
+                </a:solidFill>
+              </a:rPr>
+              <a:t>One templated chart replaces per-service YAML — CI only ever changes one line</a:t>
+            </a:r>
+          </a:p>
+        </p:txBody>
+      </p:sp>
+      <p:sp>
+        <p:nvSpPr>
+          <p:cNvPr id="6" name="Rectangle 5"/>
+          <p:cNvSpPr/>
+          <p:nvPr/>
+        </p:nvSpPr>
+        <p:spPr>
+          <a:xfrm>
+            <a:off x="0" y="1005840"/>
+            <a:ext cx="12188952" cy="36576"/>
+          </a:xfrm>
+          <a:prstGeom prst="rect">
+            <a:avLst/>
+          </a:prstGeom>
+          <a:solidFill>
+            <a:srgbClr val="00A896"/>
+          </a:solidFill>
+          <a:ln>
+            <a:noFill/>
+          </a:ln>
+        </p:spPr>
+        <p:style>
+          <a:lnRef idx="1">
+            <a:schemeClr val="accent1"/>
+          </a:lnRef>
+          <a:fillRef idx="3">
+            <a:schemeClr val="accent1"/>
+          </a:fillRef>
+          <a:effectRef idx="2">
+            <a:schemeClr val="accent1"/>
+          </a:effectRef>
+          <a:fontRef idx="minor">
+            <a:schemeClr val="lt1"/>
+          </a:fontRef>
+        </p:style>
+        <p:txBody>
+          <a:bodyPr rtlCol="0" anchor="ctr"/>
+          <a:lstStyle/>
+          <a:p>
+            <a:pPr algn="ctr"/>
+            <a:endParaRPr/>
+          </a:p>
+        </p:txBody>
+      </p:sp>
+      <p:sp>
+        <p:nvSpPr>
+          <p:cNvPr id="7" name="Rectangle 6"/>
+          <p:cNvSpPr/>
+          <p:nvPr/>
+        </p:nvSpPr>
+        <p:spPr>
+          <a:xfrm>
+            <a:off x="274320" y="1188720"/>
+            <a:ext cx="5577840" cy="1783080"/>
+          </a:xfrm>
+          <a:prstGeom prst="rect">
+            <a:avLst/>
+          </a:prstGeom>
+          <a:solidFill>
+            <a:srgbClr val="FFFFFF"/>
+          </a:solidFill>
+          <a:ln>
+            <a:noFill/>
+          </a:ln>
+        </p:spPr>
+        <p:style>
+          <a:lnRef idx="1">
+            <a:schemeClr val="accent1"/>
+          </a:lnRef>
+          <a:fillRef idx="3">
+            <a:schemeClr val="accent1"/>
+          </a:fillRef>
+          <a:effectRef idx="2">
+            <a:schemeClr val="accent1"/>
+          </a:effectRef>
+          <a:fontRef idx="minor">
+            <a:schemeClr val="lt1"/>
+          </a:fontRef>
+        </p:style>
+        <p:txBody>
+          <a:bodyPr rtlCol="0" anchor="ctr"/>
+          <a:lstStyle/>
+          <a:p>
+            <a:pPr algn="ctr"/>
+            <a:endParaRPr/>
+          </a:p>
+        </p:txBody>
+      </p:sp>
+      <p:sp>
+        <p:nvSpPr>
+          <p:cNvPr id="8" name="Rectangle 7"/>
+          <p:cNvSpPr/>
+          <p:nvPr/>
+        </p:nvSpPr>
+        <p:spPr>
+          <a:xfrm>
+            <a:off x="274320" y="1188720"/>
+            <a:ext cx="91440" cy="1783080"/>
+          </a:xfrm>
+          <a:prstGeom prst="rect">
+            <a:avLst/>
+          </a:prstGeom>
+          <a:solidFill>
+            <a:srgbClr val="1A5496"/>
+          </a:solidFill>
+          <a:ln>
+            <a:noFill/>
+          </a:ln>
+        </p:spPr>
+        <p:style>
+          <a:lnRef idx="1">
+            <a:schemeClr val="accent1"/>
+          </a:lnRef>
+          <a:fillRef idx="3">
+            <a:schemeClr val="accent1"/>
+          </a:fillRef>
+          <a:effectRef idx="2">
+            <a:schemeClr val="accent1"/>
+          </a:effectRef>
+          <a:fontRef idx="minor">
+            <a:schemeClr val="lt1"/>
+          </a:fontRef>
+        </p:style>
+        <p:txBody>
+          <a:bodyPr rtlCol="0" anchor="ctr"/>
+          <a:lstStyle/>
+          <a:p>
+            <a:pPr algn="ctr"/>
+            <a:endParaRPr/>
+          </a:p>
+        </p:txBody>
+      </p:sp>
+      <p:sp>
+        <p:nvSpPr>
+          <p:cNvPr id="9" name="TextBox 8"/>
+          <p:cNvSpPr txBox="1"/>
+          <p:nvPr/>
+        </p:nvSpPr>
+        <p:spPr>
+          <a:xfrm>
+            <a:off x="457200" y="1280160"/>
+            <a:ext cx="5303520" cy="384048"/>
+          </a:xfrm>
+          <a:prstGeom prst="rect">
+            <a:avLst/>
+          </a:prstGeom>
+          <a:noFill/>
+        </p:spPr>
+        <p:txBody>
+          <a:bodyPr wrap="square">
+            <a:spAutoFit/>
+          </a:bodyPr>
+          <a:lstStyle/>
+          <a:p>
+            <a:pPr algn="l"/>
+            <a:r>
+              <a:rPr sz="1400" b="1" i="0">
+                <a:solidFill>
+                  <a:srgbClr val="1A5496"/>
+                </a:solidFill>
+              </a:rPr>
+              <a:t>One Chart, Eight Services</a:t>
+            </a:r>
+          </a:p>
+        </p:txBody>
+      </p:sp>
+      <p:sp>
+        <p:nvSpPr>
+          <p:cNvPr id="10" name="TextBox 9"/>
+          <p:cNvSpPr txBox="1"/>
+          <p:nvPr/>
+        </p:nvSpPr>
+        <p:spPr>
+          <a:xfrm>
+            <a:off x="457200" y="1691640"/>
+            <a:ext cx="5303520" cy="1207008"/>
+          </a:xfrm>
+          <a:prstGeom prst="rect">
+            <a:avLst/>
+          </a:prstGeom>
+          <a:noFill/>
+        </p:spPr>
+        <p:txBody>
+          <a:bodyPr wrap="square">
+            <a:spAutoFit/>
+          </a:bodyPr>
+          <a:lstStyle/>
+          <a:p>
+            <a:pPr algn="l"/>
+            <a:r>
+              <a:rPr sz="1150" b="0" i="0">
+                <a:solidFill>
+                  <a:srgbClr val="1C2B3A"/>
+                </a:solidFill>
+              </a:rPr>
+              <a:t>helm-charts/ has a single deployment.yaml, service.yaml, ingress.yaml, configmap.yaml, hpa.yaml, serviceaccount.yaml. Raw manifests would mean 8 services × 6 files = 48 YAML files to keep in sync by hand.</a:t>
+            </a:r>
+          </a:p>
+        </p:txBody>
+      </p:sp>
+      <p:sp>
+        <p:nvSpPr>
+          <p:cNvPr id="11" name="Rectangle 10"/>
+          <p:cNvSpPr/>
+          <p:nvPr/>
+        </p:nvSpPr>
+        <p:spPr>
+          <a:xfrm>
+            <a:off x="274320" y="3035808"/>
+            <a:ext cx="5577840" cy="1783080"/>
+          </a:xfrm>
+          <a:prstGeom prst="rect">
+            <a:avLst/>
+          </a:prstGeom>
+          <a:solidFill>
+            <a:srgbClr val="FFFFFF"/>
+          </a:solidFill>
+          <a:ln>
+            <a:noFill/>
+          </a:ln>
+        </p:spPr>
+        <p:style>
+          <a:lnRef idx="1">
+            <a:schemeClr val="accent1"/>
+          </a:lnRef>
+          <a:fillRef idx="3">
+            <a:schemeClr val="accent1"/>
+          </a:fillRef>
+          <a:effectRef idx="2">
+            <a:schemeClr val="accent1"/>
+          </a:effectRef>
+          <a:fontRef idx="minor">
+            <a:schemeClr val="lt1"/>
+          </a:fontRef>
+        </p:style>
+        <p:txBody>
+          <a:bodyPr rtlCol="0" anchor="ctr"/>
+          <a:lstStyle/>
+          <a:p>
+            <a:pPr algn="ctr"/>
+            <a:endParaRPr/>
+          </a:p>
+        </p:txBody>
+      </p:sp>
+      <p:sp>
+        <p:nvSpPr>
+          <p:cNvPr id="12" name="Rectangle 11"/>
+          <p:cNvSpPr/>
+          <p:nvPr/>
+        </p:nvSpPr>
+        <p:spPr>
+          <a:xfrm>
+            <a:off x="274320" y="3035808"/>
+            <a:ext cx="91440" cy="1783080"/>
+          </a:xfrm>
+          <a:prstGeom prst="rect">
+            <a:avLst/>
+          </a:prstGeom>
+          <a:solidFill>
+            <a:srgbClr val="00A896"/>
+          </a:solidFill>
+          <a:ln>
+            <a:noFill/>
+          </a:ln>
+        </p:spPr>
+        <p:style>
+          <a:lnRef idx="1">
+            <a:schemeClr val="accent1"/>
+          </a:lnRef>
+          <a:fillRef idx="3">
+            <a:schemeClr val="accent1"/>
+          </a:fillRef>
+          <a:effectRef idx="2">
+            <a:schemeClr val="accent1"/>
+          </a:effectRef>
+          <a:fontRef idx="minor">
+            <a:schemeClr val="lt1"/>
+          </a:fontRef>
+        </p:style>
+        <p:txBody>
+          <a:bodyPr rtlCol="0" anchor="ctr"/>
+          <a:lstStyle/>
+          <a:p>
+            <a:pPr algn="ctr"/>
+            <a:endParaRPr/>
+          </a:p>
+        </p:txBody>
+      </p:sp>
+      <p:sp>
+        <p:nvSpPr>
+          <p:cNvPr id="13" name="TextBox 12"/>
+          <p:cNvSpPr txBox="1"/>
+          <p:nvPr/>
+        </p:nvSpPr>
+        <p:spPr>
+          <a:xfrm>
+            <a:off x="457200" y="3127248"/>
+            <a:ext cx="5303520" cy="384048"/>
+          </a:xfrm>
+          <a:prstGeom prst="rect">
+            <a:avLst/>
+          </a:prstGeom>
+          <a:noFill/>
+        </p:spPr>
+        <p:txBody>
+          <a:bodyPr wrap="square">
+            <a:spAutoFit/>
+          </a:bodyPr>
+          <a:lstStyle/>
+          <a:p>
+            <a:pPr algn="l"/>
+            <a:r>
+              <a:rPr sz="1400" b="1" i="0">
+                <a:solidFill>
+                  <a:srgbClr val="00A896"/>
+                </a:solidFill>
+              </a:rPr>
+              <a:t>Tiny, Reviewable Values Files</a:t>
+            </a:r>
+          </a:p>
+        </p:txBody>
+      </p:sp>
+      <p:sp>
+        <p:nvSpPr>
+          <p:cNvPr id="14" name="TextBox 13"/>
+          <p:cNvSpPr txBox="1"/>
+          <p:nvPr/>
+        </p:nvSpPr>
+        <p:spPr>
+          <a:xfrm>
+            <a:off x="457200" y="3538728"/>
+            <a:ext cx="5303520" cy="1207008"/>
+          </a:xfrm>
+          <a:prstGeom prst="rect">
+            <a:avLst/>
+          </a:prstGeom>
+          <a:noFill/>
+        </p:spPr>
+        <p:txBody>
+          <a:bodyPr wrap="square">
+            <a:spAutoFit/>
+          </a:bodyPr>
+          <a:lstStyle/>
+          <a:p>
+            <a:pPr algn="l"/>
+            <a:r>
+              <a:rPr sz="1150" b="0" i="0">
+                <a:solidFill>
+                  <a:srgbClr val="1C2B3A"/>
+                </a:solidFill>
+              </a:rPr>
+              <a:t>Each service+environment gets one values-&lt;service&gt;.yaml (~50–80 lines) instead of a full manifest. A PR reviewer sees exactly what changed — usually one line: image.tag.</a:t>
+            </a:r>
+          </a:p>
+        </p:txBody>
+      </p:sp>
+      <p:sp>
+        <p:nvSpPr>
+          <p:cNvPr id="15" name="Rectangle 14"/>
+          <p:cNvSpPr/>
+          <p:nvPr/>
+        </p:nvSpPr>
+        <p:spPr>
+          <a:xfrm>
+            <a:off x="274320" y="4882896"/>
+            <a:ext cx="5577840" cy="1783080"/>
+          </a:xfrm>
+          <a:prstGeom prst="rect">
+            <a:avLst/>
+          </a:prstGeom>
+          <a:solidFill>
+            <a:srgbClr val="FFFFFF"/>
+          </a:solidFill>
+          <a:ln>
+            <a:noFill/>
+          </a:ln>
+        </p:spPr>
+        <p:style>
+          <a:lnRef idx="1">
+            <a:schemeClr val="accent1"/>
+          </a:lnRef>
+          <a:fillRef idx="3">
+            <a:schemeClr val="accent1"/>
+          </a:fillRef>
+          <a:effectRef idx="2">
+            <a:schemeClr val="accent1"/>
+          </a:effectRef>
+          <a:fontRef idx="minor">
+            <a:schemeClr val="lt1"/>
+          </a:fontRef>
+        </p:style>
+        <p:txBody>
+          <a:bodyPr rtlCol="0" anchor="ctr"/>
+          <a:lstStyle/>
+          <a:p>
+            <a:pPr algn="ctr"/>
+            <a:endParaRPr/>
+          </a:p>
+        </p:txBody>
+      </p:sp>
+      <p:sp>
+        <p:nvSpPr>
+          <p:cNvPr id="16" name="Rectangle 15"/>
+          <p:cNvSpPr/>
+          <p:nvPr/>
+        </p:nvSpPr>
+        <p:spPr>
+          <a:xfrm>
+            <a:off x="274320" y="4882896"/>
+            <a:ext cx="91440" cy="1783080"/>
+          </a:xfrm>
+          <a:prstGeom prst="rect">
+            <a:avLst/>
+          </a:prstGeom>
+          <a:solidFill>
+            <a:srgbClr val="27AE60"/>
+          </a:solidFill>
+          <a:ln>
+            <a:noFill/>
+          </a:ln>
+        </p:spPr>
+        <p:style>
+          <a:lnRef idx="1">
+            <a:schemeClr val="accent1"/>
+          </a:lnRef>
+          <a:fillRef idx="3">
+            <a:schemeClr val="accent1"/>
+          </a:fillRef>
+          <a:effectRef idx="2">
+            <a:schemeClr val="accent1"/>
+          </a:effectRef>
+          <a:fontRef idx="minor">
+            <a:schemeClr val="lt1"/>
+          </a:fontRef>
+        </p:style>
+        <p:txBody>
+          <a:bodyPr rtlCol="0" anchor="ctr"/>
+          <a:lstStyle/>
+          <a:p>
+            <a:pPr algn="ctr"/>
+            <a:endParaRPr/>
+          </a:p>
+        </p:txBody>
+      </p:sp>
+      <p:sp>
+        <p:nvSpPr>
+          <p:cNvPr id="17" name="TextBox 16"/>
+          <p:cNvSpPr txBox="1"/>
+          <p:nvPr/>
+        </p:nvSpPr>
+        <p:spPr>
+          <a:xfrm>
+            <a:off x="457200" y="4974336"/>
+            <a:ext cx="5303520" cy="384048"/>
+          </a:xfrm>
+          <a:prstGeom prst="rect">
+            <a:avLst/>
+          </a:prstGeom>
+          <a:noFill/>
+        </p:spPr>
+        <p:txBody>
+          <a:bodyPr wrap="square">
+            <a:spAutoFit/>
+          </a:bodyPr>
+          <a:lstStyle/>
+          <a:p>
+            <a:pPr algn="l"/>
+            <a:r>
+              <a:rPr sz="1400" b="1" i="0">
+                <a:solidFill>
+                  <a:srgbClr val="27AE60"/>
+                </a:solidFill>
+              </a:rPr>
+              <a:t>Config-Change Auto-Restart</a:t>
+            </a:r>
+          </a:p>
+        </p:txBody>
+      </p:sp>
+      <p:sp>
+        <p:nvSpPr>
+          <p:cNvPr id="18" name="TextBox 17"/>
+          <p:cNvSpPr txBox="1"/>
+          <p:nvPr/>
+        </p:nvSpPr>
+        <p:spPr>
+          <a:xfrm>
+            <a:off x="457200" y="5385816"/>
+            <a:ext cx="5303520" cy="1207008"/>
+          </a:xfrm>
+          <a:prstGeom prst="rect">
+            <a:avLst/>
+          </a:prstGeom>
+          <a:noFill/>
+        </p:spPr>
+        <p:txBody>
+          <a:bodyPr wrap="square">
+            <a:spAutoFit/>
+          </a:bodyPr>
+          <a:lstStyle/>
+          <a:p>
+            <a:pPr algn="l"/>
+            <a:r>
+              <a:rPr sz="1150" b="0" i="0">
+                <a:solidFill>
+                  <a:srgbClr val="1C2B3A"/>
+                </a:solidFill>
+              </a:rPr>
+              <a:t>deployment.yaml stamps a checksum/config annotation from configmap.yaml's contents. Any ConfigMap edit changes the checksum, which forces a pod rollout automatically — no separate restart step to forget.</a:t>
+            </a:r>
+          </a:p>
+        </p:txBody>
+      </p:sp>
+      <p:sp>
+        <p:nvSpPr>
+          <p:cNvPr id="19" name="Rectangle 18"/>
+          <p:cNvSpPr/>
+          <p:nvPr/>
+        </p:nvSpPr>
+        <p:spPr>
+          <a:xfrm>
+            <a:off x="6263640" y="1188720"/>
+            <a:ext cx="5577840" cy="1783080"/>
+          </a:xfrm>
+          <a:prstGeom prst="rect">
+            <a:avLst/>
+          </a:prstGeom>
+          <a:solidFill>
+            <a:srgbClr val="FFFFFF"/>
+          </a:solidFill>
+          <a:ln>
+            <a:noFill/>
+          </a:ln>
+        </p:spPr>
+        <p:style>
+          <a:lnRef idx="1">
+            <a:schemeClr val="accent1"/>
+          </a:lnRef>
+          <a:fillRef idx="3">
+            <a:schemeClr val="accent1"/>
+          </a:fillRef>
+          <a:effectRef idx="2">
+            <a:schemeClr val="accent1"/>
+          </a:effectRef>
+          <a:fontRef idx="minor">
+            <a:schemeClr val="lt1"/>
+          </a:fontRef>
+        </p:style>
+        <p:txBody>
+          <a:bodyPr rtlCol="0" anchor="ctr"/>
+          <a:lstStyle/>
+          <a:p>
+            <a:pPr algn="ctr"/>
+            <a:endParaRPr/>
+          </a:p>
+        </p:txBody>
+      </p:sp>
+      <p:sp>
+        <p:nvSpPr>
+          <p:cNvPr id="20" name="Rectangle 19"/>
+          <p:cNvSpPr/>
+          <p:nvPr/>
+        </p:nvSpPr>
+        <p:spPr>
+          <a:xfrm>
+            <a:off x="6263640" y="1188720"/>
+            <a:ext cx="91440" cy="1783080"/>
+          </a:xfrm>
+          <a:prstGeom prst="rect">
+            <a:avLst/>
+          </a:prstGeom>
+          <a:solidFill>
+            <a:srgbClr val="E74C3C"/>
+          </a:solidFill>
+          <a:ln>
+            <a:noFill/>
+          </a:ln>
+        </p:spPr>
+        <p:style>
+          <a:lnRef idx="1">
+            <a:schemeClr val="accent1"/>
+          </a:lnRef>
+          <a:fillRef idx="3">
+            <a:schemeClr val="accent1"/>
+          </a:fillRef>
+          <a:effectRef idx="2">
+            <a:schemeClr val="accent1"/>
+          </a:effectRef>
+          <a:fontRef idx="minor">
+            <a:schemeClr val="lt1"/>
+          </a:fontRef>
+        </p:style>
+        <p:txBody>
+          <a:bodyPr rtlCol="0" anchor="ctr"/>
+          <a:lstStyle/>
+          <a:p>
+            <a:pPr algn="ctr"/>
+            <a:endParaRPr/>
+          </a:p>
+        </p:txBody>
+      </p:sp>
+      <p:sp>
+        <p:nvSpPr>
+          <p:cNvPr id="21" name="TextBox 20"/>
+          <p:cNvSpPr txBox="1"/>
+          <p:nvPr/>
+        </p:nvSpPr>
+        <p:spPr>
+          <a:xfrm>
+            <a:off x="6446520" y="1280160"/>
+            <a:ext cx="5303520" cy="384048"/>
+          </a:xfrm>
+          <a:prstGeom prst="rect">
+            <a:avLst/>
+          </a:prstGeom>
+          <a:noFill/>
+        </p:spPr>
+        <p:txBody>
+          <a:bodyPr wrap="square">
+            <a:spAutoFit/>
+          </a:bodyPr>
+          <a:lstStyle/>
+          <a:p>
+            <a:pPr algn="l"/>
+            <a:r>
+              <a:rPr sz="1400" b="1" i="0">
+                <a:solidFill>
+                  <a:srgbClr val="E74C3C"/>
+                </a:solidFill>
+              </a:rPr>
+              <a:t>Consistent Naming, Zero Copy-Paste Drift</a:t>
+            </a:r>
+          </a:p>
+        </p:txBody>
+      </p:sp>
+      <p:sp>
+        <p:nvSpPr>
+          <p:cNvPr id="22" name="TextBox 21"/>
+          <p:cNvSpPr txBox="1"/>
+          <p:nvPr/>
+        </p:nvSpPr>
+        <p:spPr>
+          <a:xfrm>
+            <a:off x="6446520" y="1691640"/>
+            <a:ext cx="5303520" cy="1207008"/>
+          </a:xfrm>
+          <a:prstGeom prst="rect">
+            <a:avLst/>
+          </a:prstGeom>
+          <a:noFill/>
+        </p:spPr>
+        <p:txBody>
+          <a:bodyPr wrap="square">
+            <a:spAutoFit/>
+          </a:bodyPr>
+          <a:lstStyle/>
+          <a:p>
+            <a:pPr algn="l"/>
+            <a:r>
+              <a:rPr sz="1150" b="0" i="0">
+                <a:solidFill>
+                  <a:srgbClr val="1C2B3A"/>
+                </a:solidFill>
+              </a:rPr>
+              <a:t>_helpers.tpl generates fullname, labels, and selectorLabels the same way for every service. Raw manifests rely on humans typing matching label sets across 8 copies — one typo breaks selectors.</a:t>
+            </a:r>
+          </a:p>
+        </p:txBody>
+      </p:sp>
+      <p:sp>
+        <p:nvSpPr>
+          <p:cNvPr id="23" name="Rectangle 22"/>
+          <p:cNvSpPr/>
+          <p:nvPr/>
+        </p:nvSpPr>
+        <p:spPr>
+          <a:xfrm>
+            <a:off x="6263640" y="3035808"/>
+            <a:ext cx="5577840" cy="1783080"/>
+          </a:xfrm>
+          <a:prstGeom prst="rect">
+            <a:avLst/>
+          </a:prstGeom>
+          <a:solidFill>
+            <a:srgbClr val="FFFFFF"/>
+          </a:solidFill>
+          <a:ln>
+            <a:noFill/>
+          </a:ln>
+        </p:spPr>
+        <p:style>
+          <a:lnRef idx="1">
+            <a:schemeClr val="accent1"/>
+          </a:lnRef>
+          <a:fillRef idx="3">
+            <a:schemeClr val="accent1"/>
+          </a:fillRef>
+          <a:effectRef idx="2">
+            <a:schemeClr val="accent1"/>
+          </a:effectRef>
+          <a:fontRef idx="minor">
+            <a:schemeClr val="lt1"/>
+          </a:fontRef>
+        </p:style>
+        <p:txBody>
+          <a:bodyPr rtlCol="0" anchor="ctr"/>
+          <a:lstStyle/>
+          <a:p>
+            <a:pPr algn="ctr"/>
+            <a:endParaRPr/>
+          </a:p>
+        </p:txBody>
+      </p:sp>
+      <p:sp>
+        <p:nvSpPr>
+          <p:cNvPr id="24" name="Rectangle 23"/>
+          <p:cNvSpPr/>
+          <p:nvPr/>
+        </p:nvSpPr>
+        <p:spPr>
+          <a:xfrm>
+            <a:off x="6263640" y="3035808"/>
+            <a:ext cx="91440" cy="1783080"/>
+          </a:xfrm>
+          <a:prstGeom prst="rect">
+            <a:avLst/>
+          </a:prstGeom>
+          <a:solidFill>
+            <a:srgbClr val="F39C12"/>
+          </a:solidFill>
+          <a:ln>
+            <a:noFill/>
+          </a:ln>
+        </p:spPr>
+        <p:style>
+          <a:lnRef idx="1">
+            <a:schemeClr val="accent1"/>
+          </a:lnRef>
+          <a:fillRef idx="3">
+            <a:schemeClr val="accent1"/>
+          </a:fillRef>
+          <a:effectRef idx="2">
+            <a:schemeClr val="accent1"/>
+          </a:effectRef>
+          <a:fontRef idx="minor">
+            <a:schemeClr val="lt1"/>
+          </a:fontRef>
+        </p:style>
+        <p:txBody>
+          <a:bodyPr rtlCol="0" anchor="ctr"/>
+          <a:lstStyle/>
+          <a:p>
+            <a:pPr algn="ctr"/>
+            <a:endParaRPr/>
+          </a:p>
+        </p:txBody>
+      </p:sp>
+      <p:sp>
+        <p:nvSpPr>
+          <p:cNvPr id="25" name="TextBox 24"/>
+          <p:cNvSpPr txBox="1"/>
+          <p:nvPr/>
+        </p:nvSpPr>
+        <p:spPr>
+          <a:xfrm>
+            <a:off x="6446520" y="3127248"/>
+            <a:ext cx="5303520" cy="384048"/>
+          </a:xfrm>
+          <a:prstGeom prst="rect">
+            <a:avLst/>
+          </a:prstGeom>
+          <a:noFill/>
+        </p:spPr>
+        <p:txBody>
+          <a:bodyPr wrap="square">
+            <a:spAutoFit/>
+          </a:bodyPr>
+          <a:lstStyle/>
+          <a:p>
+            <a:pPr algn="l"/>
+            <a:r>
+              <a:rPr sz="1400" b="1" i="0">
+                <a:solidFill>
+                  <a:srgbClr val="F39C12"/>
+                </a:solidFill>
+              </a:rPr>
+              <a:t>Environment Promotion = Swap One File</a:t>
+            </a:r>
+          </a:p>
+        </p:txBody>
+      </p:sp>
+      <p:sp>
+        <p:nvSpPr>
+          <p:cNvPr id="26" name="TextBox 25"/>
+          <p:cNvSpPr txBox="1"/>
+          <p:nvPr/>
+        </p:nvSpPr>
+        <p:spPr>
+          <a:xfrm>
+            <a:off x="6446520" y="3538728"/>
+            <a:ext cx="5303520" cy="1207008"/>
+          </a:xfrm>
+          <a:prstGeom prst="rect">
+            <a:avLst/>
+          </a:prstGeom>
+          <a:noFill/>
+        </p:spPr>
+        <p:txBody>
+          <a:bodyPr wrap="square">
+            <a:spAutoFit/>
+          </a:bodyPr>
+          <a:lstStyle/>
+          <a:p>
+            <a:pPr algn="l"/>
+            <a:r>
+              <a:rPr sz="1150" b="0" i="0">
+                <a:solidFill>
+                  <a:srgbClr val="1C2B3A"/>
+                </a:solidFill>
+              </a:rPr>
+              <a:t>Promoting DEV → QA → PROD means pointing the same chart at envs/qa/values-auth-service.yaml instead of dev's. The rendered manifests differ only where the values file differs — nothing is retyped.</a:t>
+            </a:r>
+          </a:p>
+        </p:txBody>
+      </p:sp>
+      <p:sp>
+        <p:nvSpPr>
+          <p:cNvPr id="27" name="Rectangle 26"/>
+          <p:cNvSpPr/>
+          <p:nvPr/>
+        </p:nvSpPr>
+        <p:spPr>
+          <a:xfrm>
+            <a:off x="6263640" y="4882896"/>
+            <a:ext cx="5577840" cy="1783080"/>
+          </a:xfrm>
+          <a:prstGeom prst="rect">
+            <a:avLst/>
+          </a:prstGeom>
+          <a:solidFill>
+            <a:srgbClr val="FFFFFF"/>
+          </a:solidFill>
+          <a:ln>
+            <a:noFill/>
+          </a:ln>
+        </p:spPr>
+        <p:style>
+          <a:lnRef idx="1">
+            <a:schemeClr val="accent1"/>
+          </a:lnRef>
+          <a:fillRef idx="3">
+            <a:schemeClr val="accent1"/>
+          </a:fillRef>
+          <a:effectRef idx="2">
+            <a:schemeClr val="accent1"/>
+          </a:effectRef>
+          <a:fontRef idx="minor">
+            <a:schemeClr val="lt1"/>
+          </a:fontRef>
+        </p:style>
+        <p:txBody>
+          <a:bodyPr rtlCol="0" anchor="ctr"/>
+          <a:lstStyle/>
+          <a:p>
+            <a:pPr algn="ctr"/>
+            <a:endParaRPr/>
+          </a:p>
+        </p:txBody>
+      </p:sp>
+      <p:sp>
+        <p:nvSpPr>
+          <p:cNvPr id="28" name="Rectangle 27"/>
+          <p:cNvSpPr/>
+          <p:nvPr/>
+        </p:nvSpPr>
+        <p:spPr>
+          <a:xfrm>
+            <a:off x="6263640" y="4882896"/>
+            <a:ext cx="91440" cy="1783080"/>
+          </a:xfrm>
+          <a:prstGeom prst="rect">
+            <a:avLst/>
+          </a:prstGeom>
+          <a:solidFill>
+            <a:srgbClr val="6C757D"/>
+          </a:solidFill>
+          <a:ln>
+            <a:noFill/>
+          </a:ln>
+        </p:spPr>
+        <p:style>
+          <a:lnRef idx="1">
+            <a:schemeClr val="accent1"/>
+          </a:lnRef>
+          <a:fillRef idx="3">
+            <a:schemeClr val="accent1"/>
+          </a:fillRef>
+          <a:effectRef idx="2">
+            <a:schemeClr val="accent1"/>
+          </a:effectRef>
+          <a:fontRef idx="minor">
+            <a:schemeClr val="lt1"/>
+          </a:fontRef>
+        </p:style>
+        <p:txBody>
+          <a:bodyPr rtlCol="0" anchor="ctr"/>
+          <a:lstStyle/>
+          <a:p>
+            <a:pPr algn="ctr"/>
+            <a:endParaRPr/>
+          </a:p>
+        </p:txBody>
+      </p:sp>
+      <p:sp>
+        <p:nvSpPr>
+          <p:cNvPr id="29" name="TextBox 28"/>
+          <p:cNvSpPr txBox="1"/>
+          <p:nvPr/>
+        </p:nvSpPr>
+        <p:spPr>
+          <a:xfrm>
+            <a:off x="6446520" y="4974336"/>
+            <a:ext cx="5303520" cy="384048"/>
+          </a:xfrm>
+          <a:prstGeom prst="rect">
+            <a:avLst/>
+          </a:prstGeom>
+          <a:noFill/>
+        </p:spPr>
+        <p:txBody>
+          <a:bodyPr wrap="square">
+            <a:spAutoFit/>
+          </a:bodyPr>
+          <a:lstStyle/>
+          <a:p>
+            <a:pPr algn="l"/>
+            <a:r>
+              <a:rPr sz="1400" b="1" i="0">
+                <a:solidFill>
+                  <a:srgbClr val="6C757D"/>
+                </a:solidFill>
+              </a:rPr>
+              <a:t>Versioned as a Unit</a:t>
+            </a:r>
+          </a:p>
+        </p:txBody>
+      </p:sp>
+      <p:sp>
+        <p:nvSpPr>
+          <p:cNvPr id="30" name="TextBox 29"/>
+          <p:cNvSpPr txBox="1"/>
+          <p:nvPr/>
+        </p:nvSpPr>
+        <p:spPr>
+          <a:xfrm>
+            <a:off x="6446520" y="5385816"/>
+            <a:ext cx="5303520" cy="1207008"/>
+          </a:xfrm>
+          <a:prstGeom prst="rect">
+            <a:avLst/>
+          </a:prstGeom>
+          <a:noFill/>
+        </p:spPr>
+        <p:txBody>
+          <a:bodyPr wrap="square">
+            <a:spAutoFit/>
+          </a:bodyPr>
+          <a:lstStyle/>
+          <a:p>
+            <a:pPr algn="l"/>
+            <a:r>
+              <a:rPr sz="1150" b="0" i="0">
+                <a:solidFill>
+                  <a:srgbClr val="1C2B3A"/>
+                </a:solidFill>
+              </a:rPr>
+              <a:t>Chart.yaml (version: 1.0.0) tracks the template's own evolution independently of any service's application version (appVersion), so template changes and app releases are audited separately.</a:t>
+            </a:r>
+          </a:p>
+        </p:txBody>
+      </p:sp>
+    </p:spTree>
+  </p:cSld>
+  <p:clrMapOvr>
+    <a:masterClrMapping/>
+  </p:clrMapOvr>
+</p:sld>
+</file>
+
+<file path=ppt/slides/slide22.xml><?xml version="1.0" encoding="utf-8"?>
+<p:sld xmlns:a="http://schemas.openxmlformats.org/drawingml/2006/main" xmlns:p="http://schemas.openxmlformats.org/presentationml/2006/main" xmlns:r="http://schemas.openxmlformats.org/officeDocument/2006/relationships">
+  <p:cSld>
+    <p:spTree>
+      <p:nvGrpSpPr>
+        <p:cNvPr id="1" name=""/>
+        <p:cNvGrpSpPr/>
+        <p:nvPr/>
+      </p:nvGrpSpPr>
+      <p:grpSpPr/>
+      <p:sp>
+        <p:nvSpPr>
+          <p:cNvPr id="2" name="Rectangle 1"/>
+          <p:cNvSpPr/>
+          <p:nvPr/>
+        </p:nvSpPr>
+        <p:spPr>
+          <a:xfrm>
+            <a:off x="0" y="0"/>
+            <a:ext cx="12188952" cy="6858000"/>
+          </a:xfrm>
+          <a:prstGeom prst="rect">
+            <a:avLst/>
+          </a:prstGeom>
+          <a:solidFill>
+            <a:srgbClr val="F5F7FA"/>
+          </a:solidFill>
+          <a:ln>
+            <a:noFill/>
+          </a:ln>
+        </p:spPr>
+        <p:style>
+          <a:lnRef idx="1">
+            <a:schemeClr val="accent1"/>
+          </a:lnRef>
+          <a:fillRef idx="3">
+            <a:schemeClr val="accent1"/>
+          </a:fillRef>
+          <a:effectRef idx="2">
+            <a:schemeClr val="accent1"/>
+          </a:effectRef>
+          <a:fontRef idx="minor">
+            <a:schemeClr val="lt1"/>
+          </a:fontRef>
+        </p:style>
+        <p:txBody>
+          <a:bodyPr rtlCol="0" anchor="ctr"/>
+          <a:lstStyle/>
+          <a:p>
+            <a:pPr algn="ctr"/>
+            <a:endParaRPr/>
+          </a:p>
+        </p:txBody>
+      </p:sp>
+      <p:sp>
+        <p:nvSpPr>
+          <p:cNvPr id="3" name="Rectangle 2"/>
+          <p:cNvSpPr/>
+          <p:nvPr/>
+        </p:nvSpPr>
+        <p:spPr>
+          <a:xfrm>
+            <a:off x="0" y="0"/>
+            <a:ext cx="12188952" cy="1005840"/>
+          </a:xfrm>
+          <a:prstGeom prst="rect">
+            <a:avLst/>
+          </a:prstGeom>
+          <a:solidFill>
+            <a:srgbClr val="1A5496"/>
+          </a:solidFill>
+          <a:ln>
+            <a:noFill/>
+          </a:ln>
+        </p:spPr>
+        <p:style>
+          <a:lnRef idx="1">
+            <a:schemeClr val="accent1"/>
+          </a:lnRef>
+          <a:fillRef idx="3">
+            <a:schemeClr val="accent1"/>
+          </a:fillRef>
+          <a:effectRef idx="2">
+            <a:schemeClr val="accent1"/>
+          </a:effectRef>
+          <a:fontRef idx="minor">
+            <a:schemeClr val="lt1"/>
+          </a:fontRef>
+        </p:style>
+        <p:txBody>
+          <a:bodyPr rtlCol="0" anchor="ctr"/>
+          <a:lstStyle/>
+          <a:p>
+            <a:pPr algn="ctr"/>
+            <a:endParaRPr/>
+          </a:p>
+        </p:txBody>
+      </p:sp>
+      <p:sp>
+        <p:nvSpPr>
+          <p:cNvPr id="4" name="TextBox 3"/>
+          <p:cNvSpPr txBox="1"/>
+          <p:nvPr/>
+        </p:nvSpPr>
+        <p:spPr>
+          <a:xfrm>
+            <a:off x="320040" y="109728"/>
+            <a:ext cx="10972800" cy="640080"/>
+          </a:xfrm>
+          <a:prstGeom prst="rect">
+            <a:avLst/>
+          </a:prstGeom>
+          <a:noFill/>
+        </p:spPr>
+        <p:txBody>
+          <a:bodyPr wrap="square">
+            <a:spAutoFit/>
+          </a:bodyPr>
+          <a:lstStyle/>
+          <a:p>
+            <a:pPr algn="l"/>
+            <a:r>
+              <a:rPr sz="2800" b="1" i="0">
+                <a:solidFill>
+                  <a:srgbClr val="FFFFFF"/>
+                </a:solidFill>
+              </a:rPr>
+              <a:t>Values File Flow: CI → ArgoCD → Deploy</a:t>
+            </a:r>
+          </a:p>
+        </p:txBody>
+      </p:sp>
+      <p:sp>
+        <p:nvSpPr>
+          <p:cNvPr id="5" name="TextBox 4"/>
+          <p:cNvSpPr txBox="1"/>
+          <p:nvPr/>
+        </p:nvSpPr>
+        <p:spPr>
+          <a:xfrm>
+            <a:off x="320040" y="658368"/>
+            <a:ext cx="10972800" cy="365760"/>
+          </a:xfrm>
+          <a:prstGeom prst="rect">
+            <a:avLst/>
+          </a:prstGeom>
+          <a:noFill/>
+        </p:spPr>
+        <p:txBody>
+          <a:bodyPr wrap="square">
+            <a:spAutoFit/>
+          </a:bodyPr>
+          <a:lstStyle/>
+          <a:p>
+            <a:pPr algn="l"/>
+            <a:r>
+              <a:rPr sz="1400" b="0" i="0">
+                <a:solidFill>
+                  <a:srgbClr val="ADCCF5"/>
+                </a:solidFill>
+              </a:rPr>
+              <a:t>DEV ~4 min end-to-end  |  QA/PROD gated by review  |  The values file is the only artifact that changes</a:t>
+            </a:r>
+          </a:p>
+        </p:txBody>
+      </p:sp>
+      <p:sp>
+        <p:nvSpPr>
+          <p:cNvPr id="6" name="Rectangle 5"/>
+          <p:cNvSpPr/>
+          <p:nvPr/>
+        </p:nvSpPr>
+        <p:spPr>
+          <a:xfrm>
+            <a:off x="0" y="1005840"/>
+            <a:ext cx="12188952" cy="36576"/>
+          </a:xfrm>
+          <a:prstGeom prst="rect">
+            <a:avLst/>
+          </a:prstGeom>
+          <a:solidFill>
+            <a:srgbClr val="00A896"/>
+          </a:solidFill>
+          <a:ln>
+            <a:noFill/>
+          </a:ln>
+        </p:spPr>
+        <p:style>
+          <a:lnRef idx="1">
+            <a:schemeClr val="accent1"/>
+          </a:lnRef>
+          <a:fillRef idx="3">
+            <a:schemeClr val="accent1"/>
+          </a:fillRef>
+          <a:effectRef idx="2">
+            <a:schemeClr val="accent1"/>
+          </a:effectRef>
+          <a:fontRef idx="minor">
+            <a:schemeClr val="lt1"/>
+          </a:fontRef>
+        </p:style>
+        <p:txBody>
+          <a:bodyPr rtlCol="0" anchor="ctr"/>
+          <a:lstStyle/>
+          <a:p>
+            <a:pPr algn="ctr"/>
+            <a:endParaRPr/>
+          </a:p>
+        </p:txBody>
+      </p:sp>
+      <p:sp>
+        <p:nvSpPr>
+          <p:cNvPr id="7" name="Rectangle 6"/>
+          <p:cNvSpPr/>
+          <p:nvPr/>
+        </p:nvSpPr>
+        <p:spPr>
+          <a:xfrm>
+            <a:off x="274320" y="1143000"/>
+            <a:ext cx="3840480" cy="2286000"/>
+          </a:xfrm>
+          <a:prstGeom prst="rect">
+            <a:avLst/>
+          </a:prstGeom>
+          <a:solidFill>
+            <a:srgbClr val="FFFFFF"/>
+          </a:solidFill>
+          <a:ln>
+            <a:noFill/>
+          </a:ln>
+        </p:spPr>
+        <p:style>
+          <a:lnRef idx="1">
+            <a:schemeClr val="accent1"/>
+          </a:lnRef>
+          <a:fillRef idx="3">
+            <a:schemeClr val="accent1"/>
+          </a:fillRef>
+          <a:effectRef idx="2">
+            <a:schemeClr val="accent1"/>
+          </a:effectRef>
+          <a:fontRef idx="minor">
+            <a:schemeClr val="lt1"/>
+          </a:fontRef>
+        </p:style>
+        <p:txBody>
+          <a:bodyPr rtlCol="0" anchor="ctr"/>
+          <a:lstStyle/>
+          <a:p>
+            <a:pPr algn="ctr"/>
+            <a:endParaRPr/>
+          </a:p>
+        </p:txBody>
+      </p:sp>
+      <p:sp>
+        <p:nvSpPr>
+          <p:cNvPr id="8" name="Rectangle 7"/>
+          <p:cNvSpPr/>
+          <p:nvPr/>
+        </p:nvSpPr>
+        <p:spPr>
+          <a:xfrm>
+            <a:off x="274320" y="1143000"/>
+            <a:ext cx="91440" cy="2286000"/>
+          </a:xfrm>
+          <a:prstGeom prst="rect">
+            <a:avLst/>
+          </a:prstGeom>
+          <a:solidFill>
+            <a:srgbClr val="E74C3C"/>
+          </a:solidFill>
+          <a:ln>
+            <a:noFill/>
+          </a:ln>
+        </p:spPr>
+        <p:style>
+          <a:lnRef idx="1">
+            <a:schemeClr val="accent1"/>
+          </a:lnRef>
+          <a:fillRef idx="3">
+            <a:schemeClr val="accent1"/>
+          </a:fillRef>
+          <a:effectRef idx="2">
+            <a:schemeClr val="accent1"/>
+          </a:effectRef>
+          <a:fontRef idx="minor">
+            <a:schemeClr val="lt1"/>
+          </a:fontRef>
+        </p:style>
+        <p:txBody>
+          <a:bodyPr rtlCol="0" anchor="ctr"/>
+          <a:lstStyle/>
+          <a:p>
+            <a:pPr algn="ctr"/>
+            <a:endParaRPr/>
+          </a:p>
+        </p:txBody>
+      </p:sp>
+      <p:sp>
+        <p:nvSpPr>
+          <p:cNvPr id="9" name="TextBox 8"/>
+          <p:cNvSpPr txBox="1"/>
+          <p:nvPr/>
+        </p:nvSpPr>
+        <p:spPr>
+          <a:xfrm>
+            <a:off x="502920" y="1188720"/>
+            <a:ext cx="3520440" cy="411480"/>
+          </a:xfrm>
+          <a:prstGeom prst="rect">
+            <a:avLst/>
+          </a:prstGeom>
+          <a:noFill/>
+        </p:spPr>
+        <p:txBody>
+          <a:bodyPr wrap="square">
+            <a:spAutoFit/>
+          </a:bodyPr>
+          <a:lstStyle/>
+          <a:p>
+            <a:pPr algn="l"/>
+            <a:r>
+              <a:rPr sz="1400" b="1" i="0">
+                <a:solidFill>
+                  <a:srgbClr val="E74C3C"/>
+                </a:solidFill>
+              </a:rPr>
+              <a:t>What Actually Changes</a:t>
+            </a:r>
+          </a:p>
+        </p:txBody>
+      </p:sp>
+      <p:sp>
+        <p:nvSpPr>
+          <p:cNvPr id="10" name="TextBox 9"/>
+          <p:cNvSpPr txBox="1"/>
+          <p:nvPr/>
+        </p:nvSpPr>
+        <p:spPr>
+          <a:xfrm>
+            <a:off x="502920" y="1627632"/>
+            <a:ext cx="3520440" cy="1691640"/>
+          </a:xfrm>
+          <a:prstGeom prst="rect">
+            <a:avLst/>
+          </a:prstGeom>
+          <a:noFill/>
+        </p:spPr>
+        <p:txBody>
+          <a:bodyPr wrap="square">
+            <a:spAutoFit/>
+          </a:bodyPr>
+          <a:lstStyle/>
+          <a:p>
+            <a:r>
+              <a:rPr sz="1150">
+                <a:solidFill>
+                  <a:srgbClr val="1C2B3A"/>
+                </a:solidFill>
+              </a:rPr>
+              <a:t>CI finishes build + security scans</a:t>
+            </a:r>
+          </a:p>
+          <a:p>
+            <a:r>
+              <a:rPr sz="1150">
+                <a:solidFill>
+                  <a:srgbClr val="1C2B3A"/>
+                </a:solidFill>
+              </a:rPr>
+              <a:t>Image pushed to ECR, tag = sha-&lt;7chars&gt;</a:t>
+            </a:r>
+          </a:p>
+          <a:p>
+            <a:r>
+              <a:rPr sz="1150">
+                <a:solidFill>
+                  <a:srgbClr val="1C2B3A"/>
+                </a:solidFill>
+              </a:rPr>
+              <a:t>yq patches envs/&lt;env&gt;/values-&lt;service&gt;.yaml</a:t>
+            </a:r>
+          </a:p>
+          <a:p>
+            <a:r>
+              <a:rPr sz="1150">
+                <a:solidFill>
+                  <a:srgbClr val="1C2B3A"/>
+                </a:solidFill>
+              </a:rPr>
+              <a:t>Commit + push to zen-gitops</a:t>
+            </a:r>
+          </a:p>
+          <a:p>
+            <a:endParaRPr sz="1150">
+              <a:solidFill>
+                <a:srgbClr val="1C2B3A"/>
+              </a:solidFill>
+            </a:endParaRPr>
+          </a:p>
+          <a:p>
+            <a:r>
+              <a:rPr sz="1150">
+                <a:solidFill>
+                  <a:srgbClr val="1C2B3A"/>
+                </a:solidFill>
+              </a:rPr>
+              <a:t>Example diff:</a:t>
+            </a:r>
+          </a:p>
+          <a:p>
+            <a:r>
+              <a:rPr sz="1150">
+                <a:solidFill>
+                  <a:srgbClr val="1C2B3A"/>
+                </a:solidFill>
+              </a:rPr>
+              <a:t>• image.tag: sha-a0017b8 → sha-b21f90c</a:t>
+            </a:r>
+          </a:p>
+          <a:p>
+            <a:r>
+              <a:rPr sz="1150">
+                <a:solidFill>
+                  <a:srgbClr val="1C2B3A"/>
+                </a:solidFill>
+              </a:rPr>
+              <a:t>• nothing else in the file differs</a:t>
+            </a:r>
+          </a:p>
+          <a:p>
+            <a:r>
+              <a:rPr sz="1150">
+                <a:solidFill>
+                  <a:srgbClr val="1C2B3A"/>
+                </a:solidFill>
+              </a:rPr>
+              <a:t>• one line, one commit (or PR for QA/PROD)</a:t>
+            </a:r>
+          </a:p>
+        </p:txBody>
+      </p:sp>
+      <p:sp>
+        <p:nvSpPr>
+          <p:cNvPr id="11" name="Rectangle 10"/>
+          <p:cNvSpPr/>
+          <p:nvPr/>
+        </p:nvSpPr>
+        <p:spPr>
+          <a:xfrm>
+            <a:off x="4434840" y="1143000"/>
+            <a:ext cx="2395728" cy="457200"/>
+          </a:xfrm>
+          <a:prstGeom prst="rect">
+            <a:avLst/>
+          </a:prstGeom>
+          <a:solidFill>
+            <a:srgbClr val="E74C3C"/>
+          </a:solidFill>
+          <a:ln>
+            <a:noFill/>
+          </a:ln>
+        </p:spPr>
+        <p:style>
+          <a:lnRef idx="1">
+            <a:schemeClr val="accent1"/>
+          </a:lnRef>
+          <a:fillRef idx="3">
+            <a:schemeClr val="accent1"/>
+          </a:fillRef>
+          <a:effectRef idx="2">
+            <a:schemeClr val="accent1"/>
+          </a:effectRef>
+          <a:fontRef idx="minor">
+            <a:schemeClr val="lt1"/>
+          </a:fontRef>
+        </p:style>
+        <p:txBody>
+          <a:bodyPr rtlCol="0" anchor="ctr"/>
+          <a:lstStyle/>
+          <a:p>
+            <a:pPr algn="ctr"/>
+            <a:endParaRPr/>
+          </a:p>
+        </p:txBody>
+      </p:sp>
+      <p:sp>
+        <p:nvSpPr>
+          <p:cNvPr id="12" name="TextBox 11"/>
+          <p:cNvSpPr txBox="1"/>
+          <p:nvPr/>
+        </p:nvSpPr>
+        <p:spPr>
+          <a:xfrm>
+            <a:off x="4526279" y="1216152"/>
+            <a:ext cx="2240280" cy="347472"/>
+          </a:xfrm>
+          <a:prstGeom prst="rect">
+            <a:avLst/>
+          </a:prstGeom>
+          <a:noFill/>
+        </p:spPr>
+        <p:txBody>
+          <a:bodyPr wrap="square">
+            <a:spAutoFit/>
+          </a:bodyPr>
+          <a:lstStyle/>
+          <a:p>
+            <a:pPr algn="l"/>
+            <a:r>
+              <a:rPr sz="1300" b="1" i="0">
+                <a:solidFill>
+                  <a:srgbClr val="FFFFFF"/>
+                </a:solidFill>
+              </a:rPr>
+              <a:t>1  CI Patches Values File</a:t>
+            </a:r>
+          </a:p>
+        </p:txBody>
+      </p:sp>
+      <p:sp>
+        <p:nvSpPr>
+          <p:cNvPr id="13" name="Rectangle 12"/>
+          <p:cNvSpPr/>
+          <p:nvPr/>
+        </p:nvSpPr>
+        <p:spPr>
+          <a:xfrm>
+            <a:off x="4434840" y="1600200"/>
+            <a:ext cx="2395728" cy="1371600"/>
+          </a:xfrm>
+          <a:prstGeom prst="rect">
+            <a:avLst/>
+          </a:prstGeom>
+          <a:solidFill>
+            <a:srgbClr val="FFFFFF"/>
+          </a:solidFill>
+          <a:ln>
+            <a:noFill/>
+          </a:ln>
+        </p:spPr>
+        <p:style>
+          <a:lnRef idx="1">
+            <a:schemeClr val="accent1"/>
+          </a:lnRef>
+          <a:fillRef idx="3">
+            <a:schemeClr val="accent1"/>
+          </a:fillRef>
+          <a:effectRef idx="2">
+            <a:schemeClr val="accent1"/>
+          </a:effectRef>
+          <a:fontRef idx="minor">
+            <a:schemeClr val="lt1"/>
+          </a:fontRef>
+        </p:style>
+        <p:txBody>
+          <a:bodyPr rtlCol="0" anchor="ctr"/>
+          <a:lstStyle/>
+          <a:p>
+            <a:pPr algn="ctr"/>
+            <a:endParaRPr/>
+          </a:p>
+        </p:txBody>
+      </p:sp>
+      <p:sp>
+        <p:nvSpPr>
+          <p:cNvPr id="14" name="TextBox 13"/>
+          <p:cNvSpPr txBox="1"/>
+          <p:nvPr/>
+        </p:nvSpPr>
+        <p:spPr>
+          <a:xfrm>
+            <a:off x="4544568" y="1673352"/>
+            <a:ext cx="2212848" cy="1234440"/>
+          </a:xfrm>
+          <a:prstGeom prst="rect">
+            <a:avLst/>
+          </a:prstGeom>
+          <a:noFill/>
+        </p:spPr>
+        <p:txBody>
+          <a:bodyPr wrap="square">
+            <a:spAutoFit/>
+          </a:bodyPr>
+          <a:lstStyle/>
+          <a:p>
+            <a:pPr algn="l"/>
+            <a:r>
+              <a:rPr sz="1100" b="0" i="0">
+                <a:solidFill>
+                  <a:srgbClr val="1C2B3A"/>
+                </a:solidFill>
+              </a:rPr>
+              <a:t>yq e '.image.tag = "sha-b21f90c"' -i
+envs/dev/values-auth-service.yaml</a:t>
+            </a:r>
+          </a:p>
+        </p:txBody>
+      </p:sp>
+      <p:sp>
+        <p:nvSpPr>
+          <p:cNvPr id="15" name="TextBox 14"/>
+          <p:cNvSpPr txBox="1"/>
+          <p:nvPr/>
+        </p:nvSpPr>
+        <p:spPr>
+          <a:xfrm>
+            <a:off x="6830568" y="1645920"/>
+            <a:ext cx="164592" cy="365760"/>
+          </a:xfrm>
+          <a:prstGeom prst="rect">
+            <a:avLst/>
+          </a:prstGeom>
+          <a:noFill/>
+        </p:spPr>
+        <p:txBody>
+          <a:bodyPr wrap="square">
+            <a:spAutoFit/>
+          </a:bodyPr>
+          <a:lstStyle/>
+          <a:p>
+            <a:pPr algn="l"/>
+            <a:r>
+              <a:rPr sz="1800" b="0" i="0">
+                <a:solidFill>
+                  <a:srgbClr val="6C757D"/>
+                </a:solidFill>
+              </a:rPr>
+              <a:t>→</a:t>
+            </a:r>
+          </a:p>
+        </p:txBody>
+      </p:sp>
+      <p:sp>
+        <p:nvSpPr>
+          <p:cNvPr id="16" name="Rectangle 15"/>
+          <p:cNvSpPr/>
+          <p:nvPr/>
+        </p:nvSpPr>
+        <p:spPr>
+          <a:xfrm>
+            <a:off x="6995159" y="1143000"/>
+            <a:ext cx="2395728" cy="457200"/>
+          </a:xfrm>
+          <a:prstGeom prst="rect">
+            <a:avLst/>
+          </a:prstGeom>
+          <a:solidFill>
+            <a:srgbClr val="F39C12"/>
+          </a:solidFill>
+          <a:ln>
+            <a:noFill/>
+          </a:ln>
+        </p:spPr>
+        <p:style>
+          <a:lnRef idx="1">
+            <a:schemeClr val="accent1"/>
+          </a:lnRef>
+          <a:fillRef idx="3">
+            <a:schemeClr val="accent1"/>
+          </a:fillRef>
+          <a:effectRef idx="2">
+            <a:schemeClr val="accent1"/>
+          </a:effectRef>
+          <a:fontRef idx="minor">
+            <a:schemeClr val="lt1"/>
+          </a:fontRef>
+        </p:style>
+        <p:txBody>
+          <a:bodyPr rtlCol="0" anchor="ctr"/>
+          <a:lstStyle/>
+          <a:p>
+            <a:pPr algn="ctr"/>
+            <a:endParaRPr/>
+          </a:p>
+        </p:txBody>
+      </p:sp>
+      <p:sp>
+        <p:nvSpPr>
+          <p:cNvPr id="17" name="TextBox 16"/>
+          <p:cNvSpPr txBox="1"/>
+          <p:nvPr/>
+        </p:nvSpPr>
+        <p:spPr>
+          <a:xfrm>
+            <a:off x="7086599" y="1216152"/>
+            <a:ext cx="2240280" cy="347472"/>
+          </a:xfrm>
+          <a:prstGeom prst="rect">
+            <a:avLst/>
+          </a:prstGeom>
+          <a:noFill/>
+        </p:spPr>
+        <p:txBody>
+          <a:bodyPr wrap="square">
+            <a:spAutoFit/>
+          </a:bodyPr>
+          <a:lstStyle/>
+          <a:p>
+            <a:pPr algn="l"/>
+            <a:r>
+              <a:rPr sz="1300" b="1" i="0">
+                <a:solidFill>
+                  <a:srgbClr val="FFFFFF"/>
+                </a:solidFill>
+              </a:rPr>
+              <a:t>2  Commit + Push</a:t>
+            </a:r>
+          </a:p>
+        </p:txBody>
+      </p:sp>
+      <p:sp>
+        <p:nvSpPr>
+          <p:cNvPr id="18" name="Rectangle 17"/>
+          <p:cNvSpPr/>
+          <p:nvPr/>
+        </p:nvSpPr>
+        <p:spPr>
+          <a:xfrm>
+            <a:off x="6995159" y="1600200"/>
+            <a:ext cx="2395728" cy="1371600"/>
+          </a:xfrm>
+          <a:prstGeom prst="rect">
+            <a:avLst/>
+          </a:prstGeom>
+          <a:solidFill>
+            <a:srgbClr val="FFFFFF"/>
+          </a:solidFill>
+          <a:ln>
+            <a:noFill/>
+          </a:ln>
+        </p:spPr>
+        <p:style>
+          <a:lnRef idx="1">
+            <a:schemeClr val="accent1"/>
+          </a:lnRef>
+          <a:fillRef idx="3">
+            <a:schemeClr val="accent1"/>
+          </a:fillRef>
+          <a:effectRef idx="2">
+            <a:schemeClr val="accent1"/>
+          </a:effectRef>
+          <a:fontRef idx="minor">
+            <a:schemeClr val="lt1"/>
+          </a:fontRef>
+        </p:style>
+        <p:txBody>
+          <a:bodyPr rtlCol="0" anchor="ctr"/>
+          <a:lstStyle/>
+          <a:p>
+            <a:pPr algn="ctr"/>
+            <a:endParaRPr/>
+          </a:p>
+        </p:txBody>
+      </p:sp>
+      <p:sp>
+        <p:nvSpPr>
+          <p:cNvPr id="19" name="TextBox 18"/>
+          <p:cNvSpPr txBox="1"/>
+          <p:nvPr/>
+        </p:nvSpPr>
+        <p:spPr>
+          <a:xfrm>
+            <a:off x="7104888" y="1673352"/>
+            <a:ext cx="2212848" cy="1234440"/>
+          </a:xfrm>
+          <a:prstGeom prst="rect">
+            <a:avLst/>
+          </a:prstGeom>
+          <a:noFill/>
+        </p:spPr>
+        <p:txBody>
+          <a:bodyPr wrap="square">
+            <a:spAutoFit/>
+          </a:bodyPr>
+          <a:lstStyle/>
+          <a:p>
+            <a:pPr algn="l"/>
+            <a:r>
+              <a:rPr sz="1100" b="0" i="0">
+                <a:solidFill>
+                  <a:srgbClr val="1C2B3A"/>
+                </a:solidFill>
+              </a:rPr>
+              <a:t>git commit -m "ci(dev): update auth-service"
+git push → zen-gitops main branch</a:t>
+            </a:r>
+          </a:p>
+        </p:txBody>
+      </p:sp>
+      <p:sp>
+        <p:nvSpPr>
+          <p:cNvPr id="20" name="TextBox 19"/>
+          <p:cNvSpPr txBox="1"/>
+          <p:nvPr/>
+        </p:nvSpPr>
+        <p:spPr>
+          <a:xfrm>
+            <a:off x="9390888" y="1645920"/>
+            <a:ext cx="164592" cy="365760"/>
+          </a:xfrm>
+          <a:prstGeom prst="rect">
+            <a:avLst/>
+          </a:prstGeom>
+          <a:noFill/>
+        </p:spPr>
+        <p:txBody>
+          <a:bodyPr wrap="square">
+            <a:spAutoFit/>
+          </a:bodyPr>
+          <a:lstStyle/>
+          <a:p>
+            <a:pPr algn="l"/>
+            <a:r>
+              <a:rPr sz="1800" b="0" i="0">
+                <a:solidFill>
+                  <a:srgbClr val="6C757D"/>
+                </a:solidFill>
+              </a:rPr>
+              <a:t>→</a:t>
+            </a:r>
+          </a:p>
+        </p:txBody>
+      </p:sp>
+      <p:sp>
+        <p:nvSpPr>
+          <p:cNvPr id="21" name="Rectangle 20"/>
+          <p:cNvSpPr/>
+          <p:nvPr/>
+        </p:nvSpPr>
+        <p:spPr>
+          <a:xfrm>
+            <a:off x="9555480" y="1143000"/>
+            <a:ext cx="2395728" cy="457200"/>
+          </a:xfrm>
+          <a:prstGeom prst="rect">
+            <a:avLst/>
+          </a:prstGeom>
+          <a:solidFill>
+            <a:srgbClr val="27AE60"/>
+          </a:solidFill>
+          <a:ln>
+            <a:noFill/>
+          </a:ln>
+        </p:spPr>
+        <p:style>
+          <a:lnRef idx="1">
+            <a:schemeClr val="accent1"/>
+          </a:lnRef>
+          <a:fillRef idx="3">
+            <a:schemeClr val="accent1"/>
+          </a:fillRef>
+          <a:effectRef idx="2">
+            <a:schemeClr val="accent1"/>
+          </a:effectRef>
+          <a:fontRef idx="minor">
+            <a:schemeClr val="lt1"/>
+          </a:fontRef>
+        </p:style>
+        <p:txBody>
+          <a:bodyPr rtlCol="0" anchor="ctr"/>
+          <a:lstStyle/>
+          <a:p>
+            <a:pPr algn="ctr"/>
+            <a:endParaRPr/>
+          </a:p>
+        </p:txBody>
+      </p:sp>
+      <p:sp>
+        <p:nvSpPr>
+          <p:cNvPr id="22" name="TextBox 21"/>
+          <p:cNvSpPr txBox="1"/>
+          <p:nvPr/>
+        </p:nvSpPr>
+        <p:spPr>
+          <a:xfrm>
+            <a:off x="9646919" y="1216152"/>
+            <a:ext cx="2240280" cy="347472"/>
+          </a:xfrm>
+          <a:prstGeom prst="rect">
+            <a:avLst/>
+          </a:prstGeom>
+          <a:noFill/>
+        </p:spPr>
+        <p:txBody>
+          <a:bodyPr wrap="square">
+            <a:spAutoFit/>
+          </a:bodyPr>
+          <a:lstStyle/>
+          <a:p>
+            <a:pPr algn="l"/>
+            <a:r>
+              <a:rPr sz="1300" b="1" i="0">
+                <a:solidFill>
+                  <a:srgbClr val="FFFFFF"/>
+                </a:solidFill>
+              </a:rPr>
+              <a:t>3  ArgoCD Detects Drift</a:t>
+            </a:r>
+          </a:p>
+        </p:txBody>
+      </p:sp>
+      <p:sp>
+        <p:nvSpPr>
+          <p:cNvPr id="23" name="Rectangle 22"/>
+          <p:cNvSpPr/>
+          <p:nvPr/>
+        </p:nvSpPr>
+        <p:spPr>
+          <a:xfrm>
+            <a:off x="9555480" y="1600200"/>
+            <a:ext cx="2395728" cy="1371600"/>
+          </a:xfrm>
+          <a:prstGeom prst="rect">
+            <a:avLst/>
+          </a:prstGeom>
+          <a:solidFill>
+            <a:srgbClr val="FFFFFF"/>
+          </a:solidFill>
+          <a:ln>
+            <a:noFill/>
+          </a:ln>
+        </p:spPr>
+        <p:style>
+          <a:lnRef idx="1">
+            <a:schemeClr val="accent1"/>
+          </a:lnRef>
+          <a:fillRef idx="3">
+            <a:schemeClr val="accent1"/>
+          </a:fillRef>
+          <a:effectRef idx="2">
+            <a:schemeClr val="accent1"/>
+          </a:effectRef>
+          <a:fontRef idx="minor">
+            <a:schemeClr val="lt1"/>
+          </a:fontRef>
+        </p:style>
+        <p:txBody>
+          <a:bodyPr rtlCol="0" anchor="ctr"/>
+          <a:lstStyle/>
+          <a:p>
+            <a:pPr algn="ctr"/>
+            <a:endParaRPr/>
+          </a:p>
+        </p:txBody>
+      </p:sp>
+      <p:sp>
+        <p:nvSpPr>
+          <p:cNvPr id="24" name="TextBox 23"/>
+          <p:cNvSpPr txBox="1"/>
+          <p:nvPr/>
+        </p:nvSpPr>
+        <p:spPr>
+          <a:xfrm>
+            <a:off x="9665207" y="1673352"/>
+            <a:ext cx="2212848" cy="1234440"/>
+          </a:xfrm>
+          <a:prstGeom prst="rect">
+            <a:avLst/>
+          </a:prstGeom>
+          <a:noFill/>
+        </p:spPr>
+        <p:txBody>
+          <a:bodyPr wrap="square">
+            <a:spAutoFit/>
+          </a:bodyPr>
+          <a:lstStyle/>
+          <a:p>
+            <a:pPr algn="l"/>
+            <a:r>
+              <a:rPr sz="1100" b="0" i="0">
+                <a:solidFill>
+                  <a:srgbClr val="1C2B3A"/>
+                </a:solidFill>
+              </a:rPr>
+              <a:t>Controller polls zen-gitops every ~3 min
+(webhook can shorten this)
+Compares live state vs desired manifest</a:t>
+            </a:r>
+          </a:p>
+        </p:txBody>
+      </p:sp>
+      <p:sp>
+        <p:nvSpPr>
+          <p:cNvPr id="25" name="Rectangle 24"/>
+          <p:cNvSpPr/>
+          <p:nvPr/>
+        </p:nvSpPr>
+        <p:spPr>
+          <a:xfrm>
+            <a:off x="4434840" y="3520440"/>
+            <a:ext cx="2395728" cy="457200"/>
+          </a:xfrm>
+          <a:prstGeom prst="rect">
+            <a:avLst/>
+          </a:prstGeom>
+          <a:solidFill>
+            <a:srgbClr val="00A896"/>
+          </a:solidFill>
+          <a:ln>
+            <a:noFill/>
+          </a:ln>
+        </p:spPr>
+        <p:style>
+          <a:lnRef idx="1">
+            <a:schemeClr val="accent1"/>
+          </a:lnRef>
+          <a:fillRef idx="3">
+            <a:schemeClr val="accent1"/>
+          </a:fillRef>
+          <a:effectRef idx="2">
+            <a:schemeClr val="accent1"/>
+          </a:effectRef>
+          <a:fontRef idx="minor">
+            <a:schemeClr val="lt1"/>
+          </a:fontRef>
+        </p:style>
+        <p:txBody>
+          <a:bodyPr rtlCol="0" anchor="ctr"/>
+          <a:lstStyle/>
+          <a:p>
+            <a:pPr algn="ctr"/>
+            <a:endParaRPr/>
+          </a:p>
+        </p:txBody>
+      </p:sp>
+      <p:sp>
+        <p:nvSpPr>
+          <p:cNvPr id="26" name="TextBox 25"/>
+          <p:cNvSpPr txBox="1"/>
+          <p:nvPr/>
+        </p:nvSpPr>
+        <p:spPr>
+          <a:xfrm>
+            <a:off x="4526279" y="3593592"/>
+            <a:ext cx="2240280" cy="347472"/>
+          </a:xfrm>
+          <a:prstGeom prst="rect">
+            <a:avLst/>
+          </a:prstGeom>
+          <a:noFill/>
+        </p:spPr>
+        <p:txBody>
+          <a:bodyPr wrap="square">
+            <a:spAutoFit/>
+          </a:bodyPr>
+          <a:lstStyle/>
+          <a:p>
+            <a:pPr algn="l"/>
+            <a:r>
+              <a:rPr sz="1300" b="1" i="0">
+                <a:solidFill>
+                  <a:srgbClr val="FFFFFF"/>
+                </a:solidFill>
+              </a:rPr>
+              <a:t>4  Sync Executes</a:t>
+            </a:r>
+          </a:p>
+        </p:txBody>
+      </p:sp>
+      <p:sp>
+        <p:nvSpPr>
+          <p:cNvPr id="27" name="Rectangle 26"/>
+          <p:cNvSpPr/>
+          <p:nvPr/>
+        </p:nvSpPr>
+        <p:spPr>
+          <a:xfrm>
+            <a:off x="4434840" y="3977639"/>
+            <a:ext cx="2395728" cy="1371600"/>
+          </a:xfrm>
+          <a:prstGeom prst="rect">
+            <a:avLst/>
+          </a:prstGeom>
+          <a:solidFill>
+            <a:srgbClr val="FFFFFF"/>
+          </a:solidFill>
+          <a:ln>
+            <a:noFill/>
+          </a:ln>
+        </p:spPr>
+        <p:style>
+          <a:lnRef idx="1">
+            <a:schemeClr val="accent1"/>
+          </a:lnRef>
+          <a:fillRef idx="3">
+            <a:schemeClr val="accent1"/>
+          </a:fillRef>
+          <a:effectRef idx="2">
+            <a:schemeClr val="accent1"/>
+          </a:effectRef>
+          <a:fontRef idx="minor">
+            <a:schemeClr val="lt1"/>
+          </a:fontRef>
+        </p:style>
+        <p:txBody>
+          <a:bodyPr rtlCol="0" anchor="ctr"/>
+          <a:lstStyle/>
+          <a:p>
+            <a:pPr algn="ctr"/>
+            <a:endParaRPr/>
+          </a:p>
+        </p:txBody>
+      </p:sp>
+      <p:sp>
+        <p:nvSpPr>
+          <p:cNvPr id="28" name="TextBox 27"/>
+          <p:cNvSpPr txBox="1"/>
+          <p:nvPr/>
+        </p:nvSpPr>
+        <p:spPr>
+          <a:xfrm>
+            <a:off x="4544568" y="4050791"/>
+            <a:ext cx="2212848" cy="1234440"/>
+          </a:xfrm>
+          <a:prstGeom prst="rect">
+            <a:avLst/>
+          </a:prstGeom>
+          <a:noFill/>
+        </p:spPr>
+        <p:txBody>
+          <a:bodyPr wrap="square">
+            <a:spAutoFit/>
+          </a:bodyPr>
+          <a:lstStyle/>
+          <a:p>
+            <a:pPr algn="l"/>
+            <a:r>
+              <a:rPr sz="1100" b="0" i="0">
+                <a:solidFill>
+                  <a:srgbClr val="1C2B3A"/>
+                </a:solidFill>
+              </a:rPr>
+              <a:t>DEV/QA: automated sync fires immediately
+PROD: engineer clicks Sync in ArgoCD UI</a:t>
+            </a:r>
+          </a:p>
+        </p:txBody>
+      </p:sp>
+      <p:sp>
+        <p:nvSpPr>
+          <p:cNvPr id="29" name="TextBox 28"/>
+          <p:cNvSpPr txBox="1"/>
+          <p:nvPr/>
+        </p:nvSpPr>
+        <p:spPr>
+          <a:xfrm>
+            <a:off x="6830568" y="4023360"/>
+            <a:ext cx="164592" cy="365760"/>
+          </a:xfrm>
+          <a:prstGeom prst="rect">
+            <a:avLst/>
+          </a:prstGeom>
+          <a:noFill/>
+        </p:spPr>
+        <p:txBody>
+          <a:bodyPr wrap="square">
+            <a:spAutoFit/>
+          </a:bodyPr>
+          <a:lstStyle/>
+          <a:p>
+            <a:pPr algn="l"/>
+            <a:r>
+              <a:rPr sz="1800" b="0" i="0">
+                <a:solidFill>
+                  <a:srgbClr val="6C757D"/>
+                </a:solidFill>
+              </a:rPr>
+              <a:t>→</a:t>
+            </a:r>
+          </a:p>
+        </p:txBody>
+      </p:sp>
+      <p:sp>
+        <p:nvSpPr>
+          <p:cNvPr id="30" name="Rectangle 29"/>
+          <p:cNvSpPr/>
+          <p:nvPr/>
+        </p:nvSpPr>
+        <p:spPr>
+          <a:xfrm>
+            <a:off x="6995159" y="3520440"/>
+            <a:ext cx="2395728" cy="457200"/>
+          </a:xfrm>
+          <a:prstGeom prst="rect">
+            <a:avLst/>
+          </a:prstGeom>
+          <a:solidFill>
+            <a:srgbClr val="1A5496"/>
+          </a:solidFill>
+          <a:ln>
+            <a:noFill/>
+          </a:ln>
+        </p:spPr>
+        <p:style>
+          <a:lnRef idx="1">
+            <a:schemeClr val="accent1"/>
+          </a:lnRef>
+          <a:fillRef idx="3">
+            <a:schemeClr val="accent1"/>
+          </a:fillRef>
+          <a:effectRef idx="2">
+            <a:schemeClr val="accent1"/>
+          </a:effectRef>
+          <a:fontRef idx="minor">
+            <a:schemeClr val="lt1"/>
+          </a:fontRef>
+        </p:style>
+        <p:txBody>
+          <a:bodyPr rtlCol="0" anchor="ctr"/>
+          <a:lstStyle/>
+          <a:p>
+            <a:pPr algn="ctr"/>
+            <a:endParaRPr/>
+          </a:p>
+        </p:txBody>
+      </p:sp>
+      <p:sp>
+        <p:nvSpPr>
+          <p:cNvPr id="31" name="TextBox 30"/>
+          <p:cNvSpPr txBox="1"/>
+          <p:nvPr/>
+        </p:nvSpPr>
+        <p:spPr>
+          <a:xfrm>
+            <a:off x="7086599" y="3593592"/>
+            <a:ext cx="2240280" cy="347472"/>
+          </a:xfrm>
+          <a:prstGeom prst="rect">
+            <a:avLst/>
+          </a:prstGeom>
+          <a:noFill/>
+        </p:spPr>
+        <p:txBody>
+          <a:bodyPr wrap="square">
+            <a:spAutoFit/>
+          </a:bodyPr>
+          <a:lstStyle/>
+          <a:p>
+            <a:pPr algn="l"/>
+            <a:r>
+              <a:rPr sz="1300" b="1" i="0">
+                <a:solidFill>
+                  <a:srgbClr val="FFFFFF"/>
+                </a:solidFill>
+              </a:rPr>
+              <a:t>5  Helm Renders + Applies</a:t>
+            </a:r>
+          </a:p>
+        </p:txBody>
+      </p:sp>
+      <p:sp>
+        <p:nvSpPr>
+          <p:cNvPr id="32" name="Rectangle 31"/>
+          <p:cNvSpPr/>
+          <p:nvPr/>
+        </p:nvSpPr>
+        <p:spPr>
+          <a:xfrm>
+            <a:off x="6995159" y="3977639"/>
+            <a:ext cx="2395728" cy="1371600"/>
+          </a:xfrm>
+          <a:prstGeom prst="rect">
+            <a:avLst/>
+          </a:prstGeom>
+          <a:solidFill>
+            <a:srgbClr val="FFFFFF"/>
+          </a:solidFill>
+          <a:ln>
+            <a:noFill/>
+          </a:ln>
+        </p:spPr>
+        <p:style>
+          <a:lnRef idx="1">
+            <a:schemeClr val="accent1"/>
+          </a:lnRef>
+          <a:fillRef idx="3">
+            <a:schemeClr val="accent1"/>
+          </a:fillRef>
+          <a:effectRef idx="2">
+            <a:schemeClr val="accent1"/>
+          </a:effectRef>
+          <a:fontRef idx="minor">
+            <a:schemeClr val="lt1"/>
+          </a:fontRef>
+        </p:style>
+        <p:txBody>
+          <a:bodyPr rtlCol="0" anchor="ctr"/>
+          <a:lstStyle/>
+          <a:p>
+            <a:pPr algn="ctr"/>
+            <a:endParaRPr/>
+          </a:p>
+        </p:txBody>
+      </p:sp>
+      <p:sp>
+        <p:nvSpPr>
+          <p:cNvPr id="33" name="TextBox 32"/>
+          <p:cNvSpPr txBox="1"/>
+          <p:nvPr/>
+        </p:nvSpPr>
+        <p:spPr>
+          <a:xfrm>
+            <a:off x="7104888" y="4050791"/>
+            <a:ext cx="2212848" cy="1234440"/>
+          </a:xfrm>
+          <a:prstGeom prst="rect">
+            <a:avLst/>
+          </a:prstGeom>
+          <a:noFill/>
+        </p:spPr>
+        <p:txBody>
+          <a:bodyPr wrap="square">
+            <a:spAutoFit/>
+          </a:bodyPr>
+          <a:lstStyle/>
+          <a:p>
+            <a:pPr algn="l"/>
+            <a:r>
+              <a:rPr sz="1100" b="0" i="0">
+                <a:solidFill>
+                  <a:srgbClr val="1C2B3A"/>
+                </a:solidFill>
+              </a:rPr>
+              <a:t>helm-charts/ + values file → final manifests
+kubectl apply; pods roll with new image ✓</a:t>
             </a:r>
           </a:p>
         </p:txBody>
@@ -25217,8 +30347,932 @@
         </p:nvSpPr>
         <p:spPr>
           <a:xfrm>
-            <a:off x="6400800" y="2084831"/>
-            <a:ext cx="384048" cy="475488"/>
+            <a:off x="274320" y="5166360"/>
+            <a:ext cx="11612880" cy="347472"/>
+          </a:xfrm>
+          <a:prstGeom prst="rect">
+            <a:avLst/>
+          </a:prstGeom>
+          <a:solidFill>
+            <a:srgbClr val="1A5496"/>
+          </a:solidFill>
+          <a:ln>
+            <a:noFill/>
+          </a:ln>
+        </p:spPr>
+        <p:style>
+          <a:lnRef idx="1">
+            <a:schemeClr val="accent1"/>
+          </a:lnRef>
+          <a:fillRef idx="3">
+            <a:schemeClr val="accent1"/>
+          </a:fillRef>
+          <a:effectRef idx="2">
+            <a:schemeClr val="accent1"/>
+          </a:effectRef>
+          <a:fontRef idx="minor">
+            <a:schemeClr val="lt1"/>
+          </a:fontRef>
+        </p:style>
+        <p:txBody>
+          <a:bodyPr rtlCol="0" anchor="ctr"/>
+          <a:lstStyle/>
+          <a:p>
+            <a:pPr algn="ctr"/>
+            <a:endParaRPr/>
+          </a:p>
+        </p:txBody>
+      </p:sp>
+      <p:sp>
+        <p:nvSpPr>
+          <p:cNvPr id="35" name="TextBox 34"/>
+          <p:cNvSpPr txBox="1"/>
+          <p:nvPr/>
+        </p:nvSpPr>
+        <p:spPr>
+          <a:xfrm>
+            <a:off x="365760" y="5193792"/>
+            <a:ext cx="11430000" cy="274320"/>
+          </a:xfrm>
+          <a:prstGeom prst="rect">
+            <a:avLst/>
+          </a:prstGeom>
+          <a:noFill/>
+        </p:spPr>
+        <p:txBody>
+          <a:bodyPr wrap="square">
+            <a:spAutoFit/>
+          </a:bodyPr>
+          <a:lstStyle/>
+          <a:p>
+            <a:pPr algn="l"/>
+            <a:r>
+              <a:rPr sz="1300" b="1" i="0">
+                <a:solidFill>
+                  <a:srgbClr val="FFFFFF"/>
+                </a:solidFill>
+              </a:rPr>
+              <a:t>Propagation Timeline (DEV)</a:t>
+            </a:r>
+          </a:p>
+        </p:txBody>
+      </p:sp>
+      <p:sp>
+        <p:nvSpPr>
+          <p:cNvPr id="36" name="Rectangle 35"/>
+          <p:cNvSpPr/>
+          <p:nvPr/>
+        </p:nvSpPr>
+        <p:spPr>
+          <a:xfrm>
+            <a:off x="274320" y="5532120"/>
+            <a:ext cx="1920240" cy="685800"/>
+          </a:xfrm>
+          <a:prstGeom prst="rect">
+            <a:avLst/>
+          </a:prstGeom>
+          <a:solidFill>
+            <a:srgbClr val="E8F0FE"/>
+          </a:solidFill>
+          <a:ln>
+            <a:noFill/>
+          </a:ln>
+        </p:spPr>
+        <p:style>
+          <a:lnRef idx="1">
+            <a:schemeClr val="accent1"/>
+          </a:lnRef>
+          <a:fillRef idx="3">
+            <a:schemeClr val="accent1"/>
+          </a:fillRef>
+          <a:effectRef idx="2">
+            <a:schemeClr val="accent1"/>
+          </a:effectRef>
+          <a:fontRef idx="minor">
+            <a:schemeClr val="lt1"/>
+          </a:fontRef>
+        </p:style>
+        <p:txBody>
+          <a:bodyPr rtlCol="0" anchor="ctr"/>
+          <a:lstStyle/>
+          <a:p>
+            <a:pPr algn="ctr"/>
+            <a:endParaRPr/>
+          </a:p>
+        </p:txBody>
+      </p:sp>
+      <p:sp>
+        <p:nvSpPr>
+          <p:cNvPr id="37" name="TextBox 36"/>
+          <p:cNvSpPr txBox="1"/>
+          <p:nvPr/>
+        </p:nvSpPr>
+        <p:spPr>
+          <a:xfrm>
+            <a:off x="347472" y="5559552"/>
+            <a:ext cx="1783080" cy="320040"/>
+          </a:xfrm>
+          <a:prstGeom prst="rect">
+            <a:avLst/>
+          </a:prstGeom>
+          <a:noFill/>
+        </p:spPr>
+        <p:txBody>
+          <a:bodyPr wrap="square">
+            <a:spAutoFit/>
+          </a:bodyPr>
+          <a:lstStyle/>
+          <a:p>
+            <a:pPr algn="l"/>
+            <a:r>
+              <a:rPr sz="1050" b="0" i="0">
+                <a:solidFill>
+                  <a:srgbClr val="1C2B3A"/>
+                </a:solidFill>
+              </a:rPr>
+              <a:t>CI patch + push</a:t>
+            </a:r>
+          </a:p>
+        </p:txBody>
+      </p:sp>
+      <p:sp>
+        <p:nvSpPr>
+          <p:cNvPr id="38" name="TextBox 37"/>
+          <p:cNvSpPr txBox="1"/>
+          <p:nvPr/>
+        </p:nvSpPr>
+        <p:spPr>
+          <a:xfrm>
+            <a:off x="347472" y="5897880"/>
+            <a:ext cx="1783080" cy="274320"/>
+          </a:xfrm>
+          <a:prstGeom prst="rect">
+            <a:avLst/>
+          </a:prstGeom>
+          <a:noFill/>
+        </p:spPr>
+        <p:txBody>
+          <a:bodyPr wrap="square">
+            <a:spAutoFit/>
+          </a:bodyPr>
+          <a:lstStyle/>
+          <a:p>
+            <a:pPr algn="l"/>
+            <a:r>
+              <a:rPr sz="1200" b="1" i="0">
+                <a:solidFill>
+                  <a:srgbClr val="27AE60"/>
+                </a:solidFill>
+              </a:rPr>
+              <a:t>~10 sec</a:t>
+            </a:r>
+          </a:p>
+        </p:txBody>
+      </p:sp>
+      <p:sp>
+        <p:nvSpPr>
+          <p:cNvPr id="39" name="Rectangle 38"/>
+          <p:cNvSpPr/>
+          <p:nvPr/>
+        </p:nvSpPr>
+        <p:spPr>
+          <a:xfrm>
+            <a:off x="2212848" y="5532120"/>
+            <a:ext cx="1920240" cy="685800"/>
+          </a:xfrm>
+          <a:prstGeom prst="rect">
+            <a:avLst/>
+          </a:prstGeom>
+          <a:solidFill>
+            <a:srgbClr val="FFFFFF"/>
+          </a:solidFill>
+          <a:ln>
+            <a:noFill/>
+          </a:ln>
+        </p:spPr>
+        <p:style>
+          <a:lnRef idx="1">
+            <a:schemeClr val="accent1"/>
+          </a:lnRef>
+          <a:fillRef idx="3">
+            <a:schemeClr val="accent1"/>
+          </a:fillRef>
+          <a:effectRef idx="2">
+            <a:schemeClr val="accent1"/>
+          </a:effectRef>
+          <a:fontRef idx="minor">
+            <a:schemeClr val="lt1"/>
+          </a:fontRef>
+        </p:style>
+        <p:txBody>
+          <a:bodyPr rtlCol="0" anchor="ctr"/>
+          <a:lstStyle/>
+          <a:p>
+            <a:pPr algn="ctr"/>
+            <a:endParaRPr/>
+          </a:p>
+        </p:txBody>
+      </p:sp>
+      <p:sp>
+        <p:nvSpPr>
+          <p:cNvPr id="40" name="TextBox 39"/>
+          <p:cNvSpPr txBox="1"/>
+          <p:nvPr/>
+        </p:nvSpPr>
+        <p:spPr>
+          <a:xfrm>
+            <a:off x="2286000" y="5559552"/>
+            <a:ext cx="1783080" cy="320040"/>
+          </a:xfrm>
+          <a:prstGeom prst="rect">
+            <a:avLst/>
+          </a:prstGeom>
+          <a:noFill/>
+        </p:spPr>
+        <p:txBody>
+          <a:bodyPr wrap="square">
+            <a:spAutoFit/>
+          </a:bodyPr>
+          <a:lstStyle/>
+          <a:p>
+            <a:pPr algn="l"/>
+            <a:r>
+              <a:rPr sz="1050" b="0" i="0">
+                <a:solidFill>
+                  <a:srgbClr val="1C2B3A"/>
+                </a:solidFill>
+              </a:rPr>
+              <a:t>ArgoCD poll</a:t>
+            </a:r>
+          </a:p>
+        </p:txBody>
+      </p:sp>
+      <p:sp>
+        <p:nvSpPr>
+          <p:cNvPr id="41" name="TextBox 40"/>
+          <p:cNvSpPr txBox="1"/>
+          <p:nvPr/>
+        </p:nvSpPr>
+        <p:spPr>
+          <a:xfrm>
+            <a:off x="2286000" y="5897880"/>
+            <a:ext cx="1783080" cy="274320"/>
+          </a:xfrm>
+          <a:prstGeom prst="rect">
+            <a:avLst/>
+          </a:prstGeom>
+          <a:noFill/>
+        </p:spPr>
+        <p:txBody>
+          <a:bodyPr wrap="square">
+            <a:spAutoFit/>
+          </a:bodyPr>
+          <a:lstStyle/>
+          <a:p>
+            <a:pPr algn="l"/>
+            <a:r>
+              <a:rPr sz="1200" b="1" i="0">
+                <a:solidFill>
+                  <a:srgbClr val="27AE60"/>
+                </a:solidFill>
+              </a:rPr>
+              <a:t>~3 min</a:t>
+            </a:r>
+          </a:p>
+        </p:txBody>
+      </p:sp>
+      <p:sp>
+        <p:nvSpPr>
+          <p:cNvPr id="42" name="Rectangle 41"/>
+          <p:cNvSpPr/>
+          <p:nvPr/>
+        </p:nvSpPr>
+        <p:spPr>
+          <a:xfrm>
+            <a:off x="4151376" y="5532120"/>
+            <a:ext cx="1920240" cy="685800"/>
+          </a:xfrm>
+          <a:prstGeom prst="rect">
+            <a:avLst/>
+          </a:prstGeom>
+          <a:solidFill>
+            <a:srgbClr val="E8F0FE"/>
+          </a:solidFill>
+          <a:ln>
+            <a:noFill/>
+          </a:ln>
+        </p:spPr>
+        <p:style>
+          <a:lnRef idx="1">
+            <a:schemeClr val="accent1"/>
+          </a:lnRef>
+          <a:fillRef idx="3">
+            <a:schemeClr val="accent1"/>
+          </a:fillRef>
+          <a:effectRef idx="2">
+            <a:schemeClr val="accent1"/>
+          </a:effectRef>
+          <a:fontRef idx="minor">
+            <a:schemeClr val="lt1"/>
+          </a:fontRef>
+        </p:style>
+        <p:txBody>
+          <a:bodyPr rtlCol="0" anchor="ctr"/>
+          <a:lstStyle/>
+          <a:p>
+            <a:pPr algn="ctr"/>
+            <a:endParaRPr/>
+          </a:p>
+        </p:txBody>
+      </p:sp>
+      <p:sp>
+        <p:nvSpPr>
+          <p:cNvPr id="43" name="TextBox 42"/>
+          <p:cNvSpPr txBox="1"/>
+          <p:nvPr/>
+        </p:nvSpPr>
+        <p:spPr>
+          <a:xfrm>
+            <a:off x="4224528" y="5559552"/>
+            <a:ext cx="1783080" cy="320040"/>
+          </a:xfrm>
+          <a:prstGeom prst="rect">
+            <a:avLst/>
+          </a:prstGeom>
+          <a:noFill/>
+        </p:spPr>
+        <p:txBody>
+          <a:bodyPr wrap="square">
+            <a:spAutoFit/>
+          </a:bodyPr>
+          <a:lstStyle/>
+          <a:p>
+            <a:pPr algn="l"/>
+            <a:r>
+              <a:rPr sz="1050" b="0" i="0">
+                <a:solidFill>
+                  <a:srgbClr val="1C2B3A"/>
+                </a:solidFill>
+              </a:rPr>
+              <a:t>Diff computed</a:t>
+            </a:r>
+          </a:p>
+        </p:txBody>
+      </p:sp>
+      <p:sp>
+        <p:nvSpPr>
+          <p:cNvPr id="44" name="TextBox 43"/>
+          <p:cNvSpPr txBox="1"/>
+          <p:nvPr/>
+        </p:nvSpPr>
+        <p:spPr>
+          <a:xfrm>
+            <a:off x="4224528" y="5897880"/>
+            <a:ext cx="1783080" cy="274320"/>
+          </a:xfrm>
+          <a:prstGeom prst="rect">
+            <a:avLst/>
+          </a:prstGeom>
+          <a:noFill/>
+        </p:spPr>
+        <p:txBody>
+          <a:bodyPr wrap="square">
+            <a:spAutoFit/>
+          </a:bodyPr>
+          <a:lstStyle/>
+          <a:p>
+            <a:pPr algn="l"/>
+            <a:r>
+              <a:rPr sz="1200" b="1" i="0">
+                <a:solidFill>
+                  <a:srgbClr val="27AE60"/>
+                </a:solidFill>
+              </a:rPr>
+              <a:t>~5 sec</a:t>
+            </a:r>
+          </a:p>
+        </p:txBody>
+      </p:sp>
+      <p:sp>
+        <p:nvSpPr>
+          <p:cNvPr id="45" name="Rectangle 44"/>
+          <p:cNvSpPr/>
+          <p:nvPr/>
+        </p:nvSpPr>
+        <p:spPr>
+          <a:xfrm>
+            <a:off x="6089904" y="5532120"/>
+            <a:ext cx="1920240" cy="685800"/>
+          </a:xfrm>
+          <a:prstGeom prst="rect">
+            <a:avLst/>
+          </a:prstGeom>
+          <a:solidFill>
+            <a:srgbClr val="FFFFFF"/>
+          </a:solidFill>
+          <a:ln>
+            <a:noFill/>
+          </a:ln>
+        </p:spPr>
+        <p:style>
+          <a:lnRef idx="1">
+            <a:schemeClr val="accent1"/>
+          </a:lnRef>
+          <a:fillRef idx="3">
+            <a:schemeClr val="accent1"/>
+          </a:fillRef>
+          <a:effectRef idx="2">
+            <a:schemeClr val="accent1"/>
+          </a:effectRef>
+          <a:fontRef idx="minor">
+            <a:schemeClr val="lt1"/>
+          </a:fontRef>
+        </p:style>
+        <p:txBody>
+          <a:bodyPr rtlCol="0" anchor="ctr"/>
+          <a:lstStyle/>
+          <a:p>
+            <a:pPr algn="ctr"/>
+            <a:endParaRPr/>
+          </a:p>
+        </p:txBody>
+      </p:sp>
+      <p:sp>
+        <p:nvSpPr>
+          <p:cNvPr id="46" name="TextBox 45"/>
+          <p:cNvSpPr txBox="1"/>
+          <p:nvPr/>
+        </p:nvSpPr>
+        <p:spPr>
+          <a:xfrm>
+            <a:off x="6163056" y="5559552"/>
+            <a:ext cx="1783080" cy="320040"/>
+          </a:xfrm>
+          <a:prstGeom prst="rect">
+            <a:avLst/>
+          </a:prstGeom>
+          <a:noFill/>
+        </p:spPr>
+        <p:txBody>
+          <a:bodyPr wrap="square">
+            <a:spAutoFit/>
+          </a:bodyPr>
+          <a:lstStyle/>
+          <a:p>
+            <a:pPr algn="l"/>
+            <a:r>
+              <a:rPr sz="1050" b="0" i="0">
+                <a:solidFill>
+                  <a:srgbClr val="1C2B3A"/>
+                </a:solidFill>
+              </a:rPr>
+              <a:t>Auto-sync fires</a:t>
+            </a:r>
+          </a:p>
+        </p:txBody>
+      </p:sp>
+      <p:sp>
+        <p:nvSpPr>
+          <p:cNvPr id="47" name="TextBox 46"/>
+          <p:cNvSpPr txBox="1"/>
+          <p:nvPr/>
+        </p:nvSpPr>
+        <p:spPr>
+          <a:xfrm>
+            <a:off x="6163056" y="5897880"/>
+            <a:ext cx="1783080" cy="274320"/>
+          </a:xfrm>
+          <a:prstGeom prst="rect">
+            <a:avLst/>
+          </a:prstGeom>
+          <a:noFill/>
+        </p:spPr>
+        <p:txBody>
+          <a:bodyPr wrap="square">
+            <a:spAutoFit/>
+          </a:bodyPr>
+          <a:lstStyle/>
+          <a:p>
+            <a:pPr algn="l"/>
+            <a:r>
+              <a:rPr sz="1200" b="1" i="0">
+                <a:solidFill>
+                  <a:srgbClr val="27AE60"/>
+                </a:solidFill>
+              </a:rPr>
+              <a:t>instant</a:t>
+            </a:r>
+          </a:p>
+        </p:txBody>
+      </p:sp>
+      <p:sp>
+        <p:nvSpPr>
+          <p:cNvPr id="48" name="Rectangle 47"/>
+          <p:cNvSpPr/>
+          <p:nvPr/>
+        </p:nvSpPr>
+        <p:spPr>
+          <a:xfrm>
+            <a:off x="8028432" y="5532120"/>
+            <a:ext cx="1920240" cy="685800"/>
+          </a:xfrm>
+          <a:prstGeom prst="rect">
+            <a:avLst/>
+          </a:prstGeom>
+          <a:solidFill>
+            <a:srgbClr val="E8F0FE"/>
+          </a:solidFill>
+          <a:ln>
+            <a:noFill/>
+          </a:ln>
+        </p:spPr>
+        <p:style>
+          <a:lnRef idx="1">
+            <a:schemeClr val="accent1"/>
+          </a:lnRef>
+          <a:fillRef idx="3">
+            <a:schemeClr val="accent1"/>
+          </a:fillRef>
+          <a:effectRef idx="2">
+            <a:schemeClr val="accent1"/>
+          </a:effectRef>
+          <a:fontRef idx="minor">
+            <a:schemeClr val="lt1"/>
+          </a:fontRef>
+        </p:style>
+        <p:txBody>
+          <a:bodyPr rtlCol="0" anchor="ctr"/>
+          <a:lstStyle/>
+          <a:p>
+            <a:pPr algn="ctr"/>
+            <a:endParaRPr/>
+          </a:p>
+        </p:txBody>
+      </p:sp>
+      <p:sp>
+        <p:nvSpPr>
+          <p:cNvPr id="49" name="TextBox 48"/>
+          <p:cNvSpPr txBox="1"/>
+          <p:nvPr/>
+        </p:nvSpPr>
+        <p:spPr>
+          <a:xfrm>
+            <a:off x="8101584" y="5559552"/>
+            <a:ext cx="1783080" cy="320040"/>
+          </a:xfrm>
+          <a:prstGeom prst="rect">
+            <a:avLst/>
+          </a:prstGeom>
+          <a:noFill/>
+        </p:spPr>
+        <p:txBody>
+          <a:bodyPr wrap="square">
+            <a:spAutoFit/>
+          </a:bodyPr>
+          <a:lstStyle/>
+          <a:p>
+            <a:pPr algn="l"/>
+            <a:r>
+              <a:rPr sz="1050" b="0" i="0">
+                <a:solidFill>
+                  <a:srgbClr val="1C2B3A"/>
+                </a:solidFill>
+              </a:rPr>
+              <a:t>Pods rolling</a:t>
+            </a:r>
+          </a:p>
+        </p:txBody>
+      </p:sp>
+      <p:sp>
+        <p:nvSpPr>
+          <p:cNvPr id="50" name="TextBox 49"/>
+          <p:cNvSpPr txBox="1"/>
+          <p:nvPr/>
+        </p:nvSpPr>
+        <p:spPr>
+          <a:xfrm>
+            <a:off x="8101584" y="5897880"/>
+            <a:ext cx="1783080" cy="274320"/>
+          </a:xfrm>
+          <a:prstGeom prst="rect">
+            <a:avLst/>
+          </a:prstGeom>
+          <a:noFill/>
+        </p:spPr>
+        <p:txBody>
+          <a:bodyPr wrap="square">
+            <a:spAutoFit/>
+          </a:bodyPr>
+          <a:lstStyle/>
+          <a:p>
+            <a:pPr algn="l"/>
+            <a:r>
+              <a:rPr sz="1200" b="1" i="0">
+                <a:solidFill>
+                  <a:srgbClr val="27AE60"/>
+                </a:solidFill>
+              </a:rPr>
+              <a:t>~30 sec</a:t>
+            </a:r>
+          </a:p>
+        </p:txBody>
+      </p:sp>
+      <p:sp>
+        <p:nvSpPr>
+          <p:cNvPr id="51" name="Rectangle 50"/>
+          <p:cNvSpPr/>
+          <p:nvPr/>
+        </p:nvSpPr>
+        <p:spPr>
+          <a:xfrm>
+            <a:off x="9966960" y="5532120"/>
+            <a:ext cx="1920240" cy="685800"/>
+          </a:xfrm>
+          <a:prstGeom prst="rect">
+            <a:avLst/>
+          </a:prstGeom>
+          <a:solidFill>
+            <a:srgbClr val="FFF0F0"/>
+          </a:solidFill>
+          <a:ln>
+            <a:noFill/>
+          </a:ln>
+        </p:spPr>
+        <p:style>
+          <a:lnRef idx="1">
+            <a:schemeClr val="accent1"/>
+          </a:lnRef>
+          <a:fillRef idx="3">
+            <a:schemeClr val="accent1"/>
+          </a:fillRef>
+          <a:effectRef idx="2">
+            <a:schemeClr val="accent1"/>
+          </a:effectRef>
+          <a:fontRef idx="minor">
+            <a:schemeClr val="lt1"/>
+          </a:fontRef>
+        </p:style>
+        <p:txBody>
+          <a:bodyPr rtlCol="0" anchor="ctr"/>
+          <a:lstStyle/>
+          <a:p>
+            <a:pPr algn="ctr"/>
+            <a:endParaRPr/>
+          </a:p>
+        </p:txBody>
+      </p:sp>
+      <p:sp>
+        <p:nvSpPr>
+          <p:cNvPr id="52" name="TextBox 51"/>
+          <p:cNvSpPr txBox="1"/>
+          <p:nvPr/>
+        </p:nvSpPr>
+        <p:spPr>
+          <a:xfrm>
+            <a:off x="10040112" y="5559552"/>
+            <a:ext cx="1783080" cy="320040"/>
+          </a:xfrm>
+          <a:prstGeom prst="rect">
+            <a:avLst/>
+          </a:prstGeom>
+          <a:noFill/>
+        </p:spPr>
+        <p:txBody>
+          <a:bodyPr wrap="square">
+            <a:spAutoFit/>
+          </a:bodyPr>
+          <a:lstStyle/>
+          <a:p>
+            <a:pPr algn="l"/>
+            <a:r>
+              <a:rPr sz="1050" b="0" i="0">
+                <a:solidFill>
+                  <a:srgbClr val="1C2B3A"/>
+                </a:solidFill>
+              </a:rPr>
+              <a:t>TOTAL</a:t>
+            </a:r>
+          </a:p>
+        </p:txBody>
+      </p:sp>
+      <p:sp>
+        <p:nvSpPr>
+          <p:cNvPr id="53" name="TextBox 52"/>
+          <p:cNvSpPr txBox="1"/>
+          <p:nvPr/>
+        </p:nvSpPr>
+        <p:spPr>
+          <a:xfrm>
+            <a:off x="10040112" y="5897880"/>
+            <a:ext cx="1783080" cy="274320"/>
+          </a:xfrm>
+          <a:prstGeom prst="rect">
+            <a:avLst/>
+          </a:prstGeom>
+          <a:noFill/>
+        </p:spPr>
+        <p:txBody>
+          <a:bodyPr wrap="square">
+            <a:spAutoFit/>
+          </a:bodyPr>
+          <a:lstStyle/>
+          <a:p>
+            <a:pPr algn="l"/>
+            <a:r>
+              <a:rPr sz="1200" b="1" i="0">
+                <a:solidFill>
+                  <a:srgbClr val="E74C3C"/>
+                </a:solidFill>
+              </a:rPr>
+              <a:t>~4 min (DEV)</a:t>
+            </a:r>
+          </a:p>
+        </p:txBody>
+      </p:sp>
+    </p:spTree>
+  </p:cSld>
+  <p:clrMapOvr>
+    <a:masterClrMapping/>
+  </p:clrMapOvr>
+</p:sld>
+</file>
+
+<file path=ppt/slides/slide23.xml><?xml version="1.0" encoding="utf-8"?>
+<p:sld xmlns:a="http://schemas.openxmlformats.org/drawingml/2006/main" xmlns:p="http://schemas.openxmlformats.org/presentationml/2006/main" xmlns:r="http://schemas.openxmlformats.org/officeDocument/2006/relationships">
+  <p:cSld>
+    <p:spTree>
+      <p:nvGrpSpPr>
+        <p:cNvPr id="1" name=""/>
+        <p:cNvGrpSpPr/>
+        <p:nvPr/>
+      </p:nvGrpSpPr>
+      <p:grpSpPr/>
+      <p:sp>
+        <p:nvSpPr>
+          <p:cNvPr id="2" name="Rectangle 1"/>
+          <p:cNvSpPr/>
+          <p:nvPr/>
+        </p:nvSpPr>
+        <p:spPr>
+          <a:xfrm>
+            <a:off x="0" y="0"/>
+            <a:ext cx="12188952" cy="6858000"/>
+          </a:xfrm>
+          <a:prstGeom prst="rect">
+            <a:avLst/>
+          </a:prstGeom>
+          <a:solidFill>
+            <a:srgbClr val="F5F7FA"/>
+          </a:solidFill>
+          <a:ln>
+            <a:noFill/>
+          </a:ln>
+        </p:spPr>
+        <p:style>
+          <a:lnRef idx="1">
+            <a:schemeClr val="accent1"/>
+          </a:lnRef>
+          <a:fillRef idx="3">
+            <a:schemeClr val="accent1"/>
+          </a:fillRef>
+          <a:effectRef idx="2">
+            <a:schemeClr val="accent1"/>
+          </a:effectRef>
+          <a:fontRef idx="minor">
+            <a:schemeClr val="lt1"/>
+          </a:fontRef>
+        </p:style>
+        <p:txBody>
+          <a:bodyPr rtlCol="0" anchor="ctr"/>
+          <a:lstStyle/>
+          <a:p>
+            <a:pPr algn="ctr"/>
+            <a:endParaRPr/>
+          </a:p>
+        </p:txBody>
+      </p:sp>
+      <p:sp>
+        <p:nvSpPr>
+          <p:cNvPr id="3" name="Rectangle 2"/>
+          <p:cNvSpPr/>
+          <p:nvPr/>
+        </p:nvSpPr>
+        <p:spPr>
+          <a:xfrm>
+            <a:off x="0" y="0"/>
+            <a:ext cx="12188952" cy="1005840"/>
+          </a:xfrm>
+          <a:prstGeom prst="rect">
+            <a:avLst/>
+          </a:prstGeom>
+          <a:solidFill>
+            <a:srgbClr val="1A5496"/>
+          </a:solidFill>
+          <a:ln>
+            <a:noFill/>
+          </a:ln>
+        </p:spPr>
+        <p:style>
+          <a:lnRef idx="1">
+            <a:schemeClr val="accent1"/>
+          </a:lnRef>
+          <a:fillRef idx="3">
+            <a:schemeClr val="accent1"/>
+          </a:fillRef>
+          <a:effectRef idx="2">
+            <a:schemeClr val="accent1"/>
+          </a:effectRef>
+          <a:fontRef idx="minor">
+            <a:schemeClr val="lt1"/>
+          </a:fontRef>
+        </p:style>
+        <p:txBody>
+          <a:bodyPr rtlCol="0" anchor="ctr"/>
+          <a:lstStyle/>
+          <a:p>
+            <a:pPr algn="ctr"/>
+            <a:endParaRPr/>
+          </a:p>
+        </p:txBody>
+      </p:sp>
+      <p:sp>
+        <p:nvSpPr>
+          <p:cNvPr id="4" name="TextBox 3"/>
+          <p:cNvSpPr txBox="1"/>
+          <p:nvPr/>
+        </p:nvSpPr>
+        <p:spPr>
+          <a:xfrm>
+            <a:off x="320040" y="109728"/>
+            <a:ext cx="10972800" cy="640080"/>
+          </a:xfrm>
+          <a:prstGeom prst="rect">
+            <a:avLst/>
+          </a:prstGeom>
+          <a:noFill/>
+        </p:spPr>
+        <p:txBody>
+          <a:bodyPr wrap="square">
+            <a:spAutoFit/>
+          </a:bodyPr>
+          <a:lstStyle/>
+          <a:p>
+            <a:pPr algn="l"/>
+            <a:r>
+              <a:rPr sz="2800" b="1" i="0">
+                <a:solidFill>
+                  <a:srgbClr val="FFFFFF"/>
+                </a:solidFill>
+              </a:rPr>
+              <a:t>Kubernetes Resources per Service</a:t>
+            </a:r>
+          </a:p>
+        </p:txBody>
+      </p:sp>
+      <p:sp>
+        <p:nvSpPr>
+          <p:cNvPr id="5" name="TextBox 4"/>
+          <p:cNvSpPr txBox="1"/>
+          <p:nvPr/>
+        </p:nvSpPr>
+        <p:spPr>
+          <a:xfrm>
+            <a:off x="320040" y="658368"/>
+            <a:ext cx="10972800" cy="365760"/>
+          </a:xfrm>
+          <a:prstGeom prst="rect">
+            <a:avLst/>
+          </a:prstGeom>
+          <a:noFill/>
+        </p:spPr>
+        <p:txBody>
+          <a:bodyPr wrap="square">
+            <a:spAutoFit/>
+          </a:bodyPr>
+          <a:lstStyle/>
+          <a:p>
+            <a:pPr algn="l"/>
+            <a:r>
+              <a:rPr sz="1400" b="0" i="0">
+                <a:solidFill>
+                  <a:srgbClr val="ADCCF5"/>
+                </a:solidFill>
+              </a:rPr>
+              <a:t>One Helm chart renders the same 6 resource kinds for every microservice</a:t>
+            </a:r>
+          </a:p>
+        </p:txBody>
+      </p:sp>
+      <p:sp>
+        <p:nvSpPr>
+          <p:cNvPr id="6" name="Rectangle 5"/>
+          <p:cNvSpPr/>
+          <p:nvPr/>
+        </p:nvSpPr>
+        <p:spPr>
+          <a:xfrm>
+            <a:off x="0" y="1005840"/>
+            <a:ext cx="12188952" cy="36576"/>
           </a:xfrm>
           <a:prstGeom prst="rect">
             <a:avLst/>
@@ -25255,48 +31309,92 @@
       </p:sp>
       <p:sp>
         <p:nvSpPr>
-          <p:cNvPr id="35" name="TextBox 34"/>
-          <p:cNvSpPr txBox="1"/>
-          <p:nvPr/>
-        </p:nvSpPr>
-        <p:spPr>
-          <a:xfrm>
-            <a:off x="6400800" y="2121408"/>
-            <a:ext cx="384048" cy="384048"/>
-          </a:xfrm>
-          <a:prstGeom prst="rect">
-            <a:avLst/>
-          </a:prstGeom>
-          <a:noFill/>
-        </p:spPr>
-        <p:txBody>
-          <a:bodyPr wrap="square">
-            <a:spAutoFit/>
-          </a:bodyPr>
-          <a:lstStyle/>
-          <a:p>
-            <a:pPr algn="ctr"/>
+          <p:cNvPr id="7" name="Rectangle 6"/>
+          <p:cNvSpPr/>
+          <p:nvPr/>
+        </p:nvSpPr>
+        <p:spPr>
+          <a:xfrm>
+            <a:off x="228600" y="1188720"/>
+            <a:ext cx="3749039" cy="438912"/>
+          </a:xfrm>
+          <a:prstGeom prst="rect">
+            <a:avLst/>
+          </a:prstGeom>
+          <a:solidFill>
+            <a:srgbClr val="E74C3C"/>
+          </a:solidFill>
+          <a:ln>
+            <a:noFill/>
+          </a:ln>
+        </p:spPr>
+        <p:style>
+          <a:lnRef idx="1">
+            <a:schemeClr val="accent1"/>
+          </a:lnRef>
+          <a:fillRef idx="3">
+            <a:schemeClr val="accent1"/>
+          </a:fillRef>
+          <a:effectRef idx="2">
+            <a:schemeClr val="accent1"/>
+          </a:effectRef>
+          <a:fontRef idx="minor">
+            <a:schemeClr val="lt1"/>
+          </a:fontRef>
+        </p:style>
+        <p:txBody>
+          <a:bodyPr rtlCol="0" anchor="ctr"/>
+          <a:lstStyle/>
+          <a:p>
+            <a:pPr algn="ctr"/>
+            <a:endParaRPr/>
+          </a:p>
+        </p:txBody>
+      </p:sp>
+      <p:sp>
+        <p:nvSpPr>
+          <p:cNvPr id="8" name="TextBox 7"/>
+          <p:cNvSpPr txBox="1"/>
+          <p:nvPr/>
+        </p:nvSpPr>
+        <p:spPr>
+          <a:xfrm>
+            <a:off x="320040" y="1252728"/>
+            <a:ext cx="3566160" cy="347472"/>
+          </a:xfrm>
+          <a:prstGeom prst="rect">
+            <a:avLst/>
+          </a:prstGeom>
+          <a:noFill/>
+        </p:spPr>
+        <p:txBody>
+          <a:bodyPr wrap="square">
+            <a:spAutoFit/>
+          </a:bodyPr>
+          <a:lstStyle/>
+          <a:p>
+            <a:pPr algn="l"/>
             <a:r>
               <a:rPr sz="1300" b="1" i="0">
                 <a:solidFill>
                   <a:srgbClr val="FFFFFF"/>
                 </a:solidFill>
               </a:rPr>
-              <a:t>8</a:t>
-            </a:r>
-          </a:p>
-        </p:txBody>
-      </p:sp>
-      <p:sp>
-        <p:nvSpPr>
-          <p:cNvPr id="36" name="Rectangle 35"/>
-          <p:cNvSpPr/>
-          <p:nvPr/>
-        </p:nvSpPr>
-        <p:spPr>
-          <a:xfrm>
-            <a:off x="6821424" y="2084831"/>
-            <a:ext cx="5120640" cy="475488"/>
+              <a:t>1  Workload  ·  Deployment</a:t>
+            </a:r>
+          </a:p>
+        </p:txBody>
+      </p:sp>
+      <p:sp>
+        <p:nvSpPr>
+          <p:cNvPr id="9" name="Rectangle 8"/>
+          <p:cNvSpPr/>
+          <p:nvPr/>
+        </p:nvSpPr>
+        <p:spPr>
+          <a:xfrm>
+            <a:off x="228600" y="1627632"/>
+            <a:ext cx="3749039" cy="2148840"/>
           </a:xfrm>
           <a:prstGeom prst="rect">
             <a:avLst/>
@@ -25333,126 +31431,208 @@
       </p:sp>
       <p:sp>
         <p:nvSpPr>
-          <p:cNvPr id="37" name="TextBox 36"/>
-          <p:cNvSpPr txBox="1"/>
-          <p:nvPr/>
-        </p:nvSpPr>
-        <p:spPr>
-          <a:xfrm>
-            <a:off x="6894576" y="2167127"/>
-            <a:ext cx="4937760" cy="347472"/>
-          </a:xfrm>
-          <a:prstGeom prst="rect">
-            <a:avLst/>
-          </a:prstGeom>
-          <a:noFill/>
-        </p:spPr>
-        <p:txBody>
-          <a:bodyPr wrap="square">
-            <a:spAutoFit/>
-          </a:bodyPr>
-          <a:lstStyle/>
-          <a:p>
-            <a:pPr algn="l"/>
-            <a:r>
-              <a:rPr sz="1300" b="0" i="0">
+          <p:cNvPr id="10" name="TextBox 9"/>
+          <p:cNvSpPr txBox="1"/>
+          <p:nvPr/>
+        </p:nvSpPr>
+        <p:spPr>
+          <a:xfrm>
+            <a:off x="338328" y="1700784"/>
+            <a:ext cx="3547872" cy="1965960"/>
+          </a:xfrm>
+          <a:prstGeom prst="rect">
+            <a:avLst/>
+          </a:prstGeom>
+          <a:noFill/>
+        </p:spPr>
+        <p:txBody>
+          <a:bodyPr wrap="square">
+            <a:spAutoFit/>
+          </a:bodyPr>
+          <a:lstStyle/>
+          <a:p>
+            <a:pPr algn="l"/>
+            <a:r>
+              <a:rPr sz="1050" b="0" i="0">
                 <a:solidFill>
                   <a:srgbClr val="1C2B3A"/>
                 </a:solidFill>
               </a:rPr>
-              <a:t>GitOps &amp; ArgoCD</a:t>
-            </a:r>
-          </a:p>
-        </p:txBody>
-      </p:sp>
-      <p:sp>
-        <p:nvSpPr>
-          <p:cNvPr id="38" name="Rectangle 37"/>
-          <p:cNvSpPr/>
-          <p:nvPr/>
-        </p:nvSpPr>
-        <p:spPr>
-          <a:xfrm>
-            <a:off x="6400800" y="2889504"/>
-            <a:ext cx="384048" cy="475488"/>
-          </a:xfrm>
-          <a:prstGeom prst="rect">
-            <a:avLst/>
-          </a:prstGeom>
-          <a:solidFill>
-            <a:srgbClr val="27AE60"/>
-          </a:solidFill>
-          <a:ln>
-            <a:noFill/>
-          </a:ln>
-        </p:spPr>
-        <p:style>
-          <a:lnRef idx="1">
-            <a:schemeClr val="accent1"/>
-          </a:lnRef>
-          <a:fillRef idx="3">
-            <a:schemeClr val="accent1"/>
-          </a:fillRef>
-          <a:effectRef idx="2">
-            <a:schemeClr val="accent1"/>
-          </a:effectRef>
-          <a:fontRef idx="minor">
-            <a:schemeClr val="lt1"/>
-          </a:fontRef>
-        </p:style>
-        <p:txBody>
-          <a:bodyPr rtlCol="0" anchor="ctr"/>
-          <a:lstStyle/>
-          <a:p>
-            <a:pPr algn="ctr"/>
-            <a:endParaRPr/>
-          </a:p>
-        </p:txBody>
-      </p:sp>
-      <p:sp>
-        <p:nvSpPr>
-          <p:cNvPr id="39" name="TextBox 38"/>
-          <p:cNvSpPr txBox="1"/>
-          <p:nvPr/>
-        </p:nvSpPr>
-        <p:spPr>
-          <a:xfrm>
-            <a:off x="6400800" y="2926080"/>
-            <a:ext cx="384048" cy="384048"/>
-          </a:xfrm>
-          <a:prstGeom prst="rect">
-            <a:avLst/>
-          </a:prstGeom>
-          <a:noFill/>
-        </p:spPr>
-        <p:txBody>
-          <a:bodyPr wrap="square">
-            <a:spAutoFit/>
-          </a:bodyPr>
-          <a:lstStyle/>
-          <a:p>
-            <a:pPr algn="ctr"/>
+              <a:t>apps/v1 Deployment — owns the pod template
+1 container; image + tag come from the values file
+replicas set directly (omitted when autoscaling.enabled)
+Rolling update gated by liveness/readiness probes on /actuator/health
+checksum/config annotation forces a pod restart on ConfigMap change</a:t>
+            </a:r>
+          </a:p>
+        </p:txBody>
+      </p:sp>
+      <p:sp>
+        <p:nvSpPr>
+          <p:cNvPr id="11" name="Rectangle 10"/>
+          <p:cNvSpPr/>
+          <p:nvPr/>
+        </p:nvSpPr>
+        <p:spPr>
+          <a:xfrm>
+            <a:off x="228600" y="3776472"/>
+            <a:ext cx="3749039" cy="292608"/>
+          </a:xfrm>
+          <a:prstGeom prst="rect">
+            <a:avLst/>
+          </a:prstGeom>
+          <a:solidFill>
+            <a:srgbClr val="E8F0FE"/>
+          </a:solidFill>
+          <a:ln>
+            <a:noFill/>
+          </a:ln>
+        </p:spPr>
+        <p:style>
+          <a:lnRef idx="1">
+            <a:schemeClr val="accent1"/>
+          </a:lnRef>
+          <a:fillRef idx="3">
+            <a:schemeClr val="accent1"/>
+          </a:fillRef>
+          <a:effectRef idx="2">
+            <a:schemeClr val="accent1"/>
+          </a:effectRef>
+          <a:fontRef idx="minor">
+            <a:schemeClr val="lt1"/>
+          </a:fontRef>
+        </p:style>
+        <p:txBody>
+          <a:bodyPr rtlCol="0" anchor="ctr"/>
+          <a:lstStyle/>
+          <a:p>
+            <a:pPr algn="ctr"/>
+            <a:endParaRPr/>
+          </a:p>
+        </p:txBody>
+      </p:sp>
+      <p:sp>
+        <p:nvSpPr>
+          <p:cNvPr id="12" name="TextBox 11"/>
+          <p:cNvSpPr txBox="1"/>
+          <p:nvPr/>
+        </p:nvSpPr>
+        <p:spPr>
+          <a:xfrm>
+            <a:off x="338328" y="3803904"/>
+            <a:ext cx="3566160" cy="228600"/>
+          </a:xfrm>
+          <a:prstGeom prst="rect">
+            <a:avLst/>
+          </a:prstGeom>
+          <a:noFill/>
+        </p:spPr>
+        <p:txBody>
+          <a:bodyPr wrap="square">
+            <a:spAutoFit/>
+          </a:bodyPr>
+          <a:lstStyle/>
+          <a:p>
+            <a:pPr algn="l"/>
+            <a:r>
+              <a:rPr sz="1000" b="0" i="1">
+                <a:solidFill>
+                  <a:srgbClr val="1A5496"/>
+                </a:solidFill>
+              </a:rPr>
+              <a:t>File: templates/deployment.yaml</a:t>
+            </a:r>
+          </a:p>
+        </p:txBody>
+      </p:sp>
+      <p:sp>
+        <p:nvSpPr>
+          <p:cNvPr id="13" name="Rectangle 12"/>
+          <p:cNvSpPr/>
+          <p:nvPr/>
+        </p:nvSpPr>
+        <p:spPr>
+          <a:xfrm>
+            <a:off x="4224528" y="1188720"/>
+            <a:ext cx="3749039" cy="438912"/>
+          </a:xfrm>
+          <a:prstGeom prst="rect">
+            <a:avLst/>
+          </a:prstGeom>
+          <a:solidFill>
+            <a:srgbClr val="E74C3C"/>
+          </a:solidFill>
+          <a:ln>
+            <a:noFill/>
+          </a:ln>
+        </p:spPr>
+        <p:style>
+          <a:lnRef idx="1">
+            <a:schemeClr val="accent1"/>
+          </a:lnRef>
+          <a:fillRef idx="3">
+            <a:schemeClr val="accent1"/>
+          </a:fillRef>
+          <a:effectRef idx="2">
+            <a:schemeClr val="accent1"/>
+          </a:effectRef>
+          <a:fontRef idx="minor">
+            <a:schemeClr val="lt1"/>
+          </a:fontRef>
+        </p:style>
+        <p:txBody>
+          <a:bodyPr rtlCol="0" anchor="ctr"/>
+          <a:lstStyle/>
+          <a:p>
+            <a:pPr algn="ctr"/>
+            <a:endParaRPr/>
+          </a:p>
+        </p:txBody>
+      </p:sp>
+      <p:sp>
+        <p:nvSpPr>
+          <p:cNvPr id="14" name="TextBox 13"/>
+          <p:cNvSpPr txBox="1"/>
+          <p:nvPr/>
+        </p:nvSpPr>
+        <p:spPr>
+          <a:xfrm>
+            <a:off x="4315968" y="1252728"/>
+            <a:ext cx="3566160" cy="347472"/>
+          </a:xfrm>
+          <a:prstGeom prst="rect">
+            <a:avLst/>
+          </a:prstGeom>
+          <a:noFill/>
+        </p:spPr>
+        <p:txBody>
+          <a:bodyPr wrap="square">
+            <a:spAutoFit/>
+          </a:bodyPr>
+          <a:lstStyle/>
+          <a:p>
+            <a:pPr algn="l"/>
             <a:r>
               <a:rPr sz="1300" b="1" i="0">
                 <a:solidFill>
                   <a:srgbClr val="FFFFFF"/>
                 </a:solidFill>
               </a:rPr>
-              <a:t>9</a:t>
-            </a:r>
-          </a:p>
-        </p:txBody>
-      </p:sp>
-      <p:sp>
-        <p:nvSpPr>
-          <p:cNvPr id="40" name="Rectangle 39"/>
-          <p:cNvSpPr/>
-          <p:nvPr/>
-        </p:nvSpPr>
-        <p:spPr>
-          <a:xfrm>
-            <a:off x="6821424" y="2889504"/>
-            <a:ext cx="5120640" cy="475488"/>
+              <a:t>2  Networking  ·  Service</a:t>
+            </a:r>
+          </a:p>
+        </p:txBody>
+      </p:sp>
+      <p:sp>
+        <p:nvSpPr>
+          <p:cNvPr id="15" name="Rectangle 14"/>
+          <p:cNvSpPr/>
+          <p:nvPr/>
+        </p:nvSpPr>
+        <p:spPr>
+          <a:xfrm>
+            <a:off x="4224528" y="1627632"/>
+            <a:ext cx="3749039" cy="2148840"/>
           </a:xfrm>
           <a:prstGeom prst="rect">
             <a:avLst/>
@@ -25489,48 +31669,604 @@
       </p:sp>
       <p:sp>
         <p:nvSpPr>
-          <p:cNvPr id="41" name="TextBox 40"/>
-          <p:cNvSpPr txBox="1"/>
-          <p:nvPr/>
-        </p:nvSpPr>
-        <p:spPr>
-          <a:xfrm>
-            <a:off x="6894576" y="2971800"/>
-            <a:ext cx="4937760" cy="347472"/>
-          </a:xfrm>
-          <a:prstGeom prst="rect">
-            <a:avLst/>
-          </a:prstGeom>
-          <a:noFill/>
-        </p:spPr>
-        <p:txBody>
-          <a:bodyPr wrap="square">
-            <a:spAutoFit/>
-          </a:bodyPr>
-          <a:lstStyle/>
-          <a:p>
-            <a:pPr algn="l"/>
-            <a:r>
-              <a:rPr sz="1300" b="0" i="0">
+          <p:cNvPr id="16" name="TextBox 15"/>
+          <p:cNvSpPr txBox="1"/>
+          <p:nvPr/>
+        </p:nvSpPr>
+        <p:spPr>
+          <a:xfrm>
+            <a:off x="4334256" y="1700784"/>
+            <a:ext cx="3547872" cy="1965960"/>
+          </a:xfrm>
+          <a:prstGeom prst="rect">
+            <a:avLst/>
+          </a:prstGeom>
+          <a:noFill/>
+        </p:spPr>
+        <p:txBody>
+          <a:bodyPr wrap="square">
+            <a:spAutoFit/>
+          </a:bodyPr>
+          <a:lstStyle/>
+          <a:p>
+            <a:pPr algn="l"/>
+            <a:r>
+              <a:rPr sz="1050" b="0" i="0">
                 <a:solidFill>
                   <a:srgbClr val="1C2B3A"/>
                 </a:solidFill>
               </a:rPr>
-              <a:t>Environment Promotion: DEV → QA → PROD</a:t>
-            </a:r>
-          </a:p>
-        </p:txBody>
-      </p:sp>
-      <p:sp>
-        <p:nvSpPr>
-          <p:cNvPr id="42" name="Rectangle 41"/>
-          <p:cNvSpPr/>
-          <p:nvPr/>
-        </p:nvSpPr>
-        <p:spPr>
-          <a:xfrm>
-            <a:off x="6400800" y="3694176"/>
-            <a:ext cx="384048" cy="475488"/>
+              <a:t>ClusterIP Service — stable in-cluster DNS name
+Routes traffic to pods via selectorLabels
+port/targetPort from values (e.g. 8081 for auth-service)
+One Service per microservice, internal-only by default
+Consumed by api-gateway and other in-cluster callers</a:t>
+            </a:r>
+          </a:p>
+        </p:txBody>
+      </p:sp>
+      <p:sp>
+        <p:nvSpPr>
+          <p:cNvPr id="17" name="Rectangle 16"/>
+          <p:cNvSpPr/>
+          <p:nvPr/>
+        </p:nvSpPr>
+        <p:spPr>
+          <a:xfrm>
+            <a:off x="4224528" y="3776472"/>
+            <a:ext cx="3749039" cy="292608"/>
+          </a:xfrm>
+          <a:prstGeom prst="rect">
+            <a:avLst/>
+          </a:prstGeom>
+          <a:solidFill>
+            <a:srgbClr val="E8F0FE"/>
+          </a:solidFill>
+          <a:ln>
+            <a:noFill/>
+          </a:ln>
+        </p:spPr>
+        <p:style>
+          <a:lnRef idx="1">
+            <a:schemeClr val="accent1"/>
+          </a:lnRef>
+          <a:fillRef idx="3">
+            <a:schemeClr val="accent1"/>
+          </a:fillRef>
+          <a:effectRef idx="2">
+            <a:schemeClr val="accent1"/>
+          </a:effectRef>
+          <a:fontRef idx="minor">
+            <a:schemeClr val="lt1"/>
+          </a:fontRef>
+        </p:style>
+        <p:txBody>
+          <a:bodyPr rtlCol="0" anchor="ctr"/>
+          <a:lstStyle/>
+          <a:p>
+            <a:pPr algn="ctr"/>
+            <a:endParaRPr/>
+          </a:p>
+        </p:txBody>
+      </p:sp>
+      <p:sp>
+        <p:nvSpPr>
+          <p:cNvPr id="18" name="TextBox 17"/>
+          <p:cNvSpPr txBox="1"/>
+          <p:nvPr/>
+        </p:nvSpPr>
+        <p:spPr>
+          <a:xfrm>
+            <a:off x="4334256" y="3803904"/>
+            <a:ext cx="3566160" cy="228600"/>
+          </a:xfrm>
+          <a:prstGeom prst="rect">
+            <a:avLst/>
+          </a:prstGeom>
+          <a:noFill/>
+        </p:spPr>
+        <p:txBody>
+          <a:bodyPr wrap="square">
+            <a:spAutoFit/>
+          </a:bodyPr>
+          <a:lstStyle/>
+          <a:p>
+            <a:pPr algn="l"/>
+            <a:r>
+              <a:rPr sz="1000" b="0" i="1">
+                <a:solidFill>
+                  <a:srgbClr val="1A5496"/>
+                </a:solidFill>
+              </a:rPr>
+              <a:t>File: templates/service.yaml</a:t>
+            </a:r>
+          </a:p>
+        </p:txBody>
+      </p:sp>
+      <p:sp>
+        <p:nvSpPr>
+          <p:cNvPr id="19" name="Rectangle 18"/>
+          <p:cNvSpPr/>
+          <p:nvPr/>
+        </p:nvSpPr>
+        <p:spPr>
+          <a:xfrm>
+            <a:off x="8220456" y="1188720"/>
+            <a:ext cx="3749039" cy="438912"/>
+          </a:xfrm>
+          <a:prstGeom prst="rect">
+            <a:avLst/>
+          </a:prstGeom>
+          <a:solidFill>
+            <a:srgbClr val="F39C12"/>
+          </a:solidFill>
+          <a:ln>
+            <a:noFill/>
+          </a:ln>
+        </p:spPr>
+        <p:style>
+          <a:lnRef idx="1">
+            <a:schemeClr val="accent1"/>
+          </a:lnRef>
+          <a:fillRef idx="3">
+            <a:schemeClr val="accent1"/>
+          </a:fillRef>
+          <a:effectRef idx="2">
+            <a:schemeClr val="accent1"/>
+          </a:effectRef>
+          <a:fontRef idx="minor">
+            <a:schemeClr val="lt1"/>
+          </a:fontRef>
+        </p:style>
+        <p:txBody>
+          <a:bodyPr rtlCol="0" anchor="ctr"/>
+          <a:lstStyle/>
+          <a:p>
+            <a:pPr algn="ctr"/>
+            <a:endParaRPr/>
+          </a:p>
+        </p:txBody>
+      </p:sp>
+      <p:sp>
+        <p:nvSpPr>
+          <p:cNvPr id="20" name="TextBox 19"/>
+          <p:cNvSpPr txBox="1"/>
+          <p:nvPr/>
+        </p:nvSpPr>
+        <p:spPr>
+          <a:xfrm>
+            <a:off x="8311896" y="1252728"/>
+            <a:ext cx="3566160" cy="347472"/>
+          </a:xfrm>
+          <a:prstGeom prst="rect">
+            <a:avLst/>
+          </a:prstGeom>
+          <a:noFill/>
+        </p:spPr>
+        <p:txBody>
+          <a:bodyPr wrap="square">
+            <a:spAutoFit/>
+          </a:bodyPr>
+          <a:lstStyle/>
+          <a:p>
+            <a:pPr algn="l"/>
+            <a:r>
+              <a:rPr sz="1300" b="1" i="0">
+                <a:solidFill>
+                  <a:srgbClr val="FFFFFF"/>
+                </a:solidFill>
+              </a:rPr>
+              <a:t>3  Configuration  ·  ConfigMap</a:t>
+            </a:r>
+          </a:p>
+        </p:txBody>
+      </p:sp>
+      <p:sp>
+        <p:nvSpPr>
+          <p:cNvPr id="21" name="Rectangle 20"/>
+          <p:cNvSpPr/>
+          <p:nvPr/>
+        </p:nvSpPr>
+        <p:spPr>
+          <a:xfrm>
+            <a:off x="8220456" y="1627632"/>
+            <a:ext cx="3749039" cy="2148840"/>
+          </a:xfrm>
+          <a:prstGeom prst="rect">
+            <a:avLst/>
+          </a:prstGeom>
+          <a:solidFill>
+            <a:srgbClr val="FFFFFF"/>
+          </a:solidFill>
+          <a:ln>
+            <a:noFill/>
+          </a:ln>
+        </p:spPr>
+        <p:style>
+          <a:lnRef idx="1">
+            <a:schemeClr val="accent1"/>
+          </a:lnRef>
+          <a:fillRef idx="3">
+            <a:schemeClr val="accent1"/>
+          </a:fillRef>
+          <a:effectRef idx="2">
+            <a:schemeClr val="accent1"/>
+          </a:effectRef>
+          <a:fontRef idx="minor">
+            <a:schemeClr val="lt1"/>
+          </a:fontRef>
+        </p:style>
+        <p:txBody>
+          <a:bodyPr rtlCol="0" anchor="ctr"/>
+          <a:lstStyle/>
+          <a:p>
+            <a:pPr algn="ctr"/>
+            <a:endParaRPr/>
+          </a:p>
+        </p:txBody>
+      </p:sp>
+      <p:sp>
+        <p:nvSpPr>
+          <p:cNvPr id="22" name="TextBox 21"/>
+          <p:cNvSpPr txBox="1"/>
+          <p:nvPr/>
+        </p:nvSpPr>
+        <p:spPr>
+          <a:xfrm>
+            <a:off x="8330183" y="1700784"/>
+            <a:ext cx="3547872" cy="1965960"/>
+          </a:xfrm>
+          <a:prstGeom prst="rect">
+            <a:avLst/>
+          </a:prstGeom>
+          <a:noFill/>
+        </p:spPr>
+        <p:txBody>
+          <a:bodyPr wrap="square">
+            <a:spAutoFit/>
+          </a:bodyPr>
+          <a:lstStyle/>
+          <a:p>
+            <a:pPr algn="l"/>
+            <a:r>
+              <a:rPr sz="1050" b="0" i="0">
+                <a:solidFill>
+                  <a:srgbClr val="1C2B3A"/>
+                </a:solidFill>
+              </a:rPr>
+              <a:t>Non-secret environment variables — SPRING_PROFILES_ACTIVE, DB_HOST, LOG_LEVEL, etc.
+Injected into the pod via envFrom: configMapRef
+Contents are hashed into deployment.yaml's checksum/config annotation
+Edit a value here → pods roll automatically, no manual restart needed</a:t>
+            </a:r>
+          </a:p>
+        </p:txBody>
+      </p:sp>
+      <p:sp>
+        <p:nvSpPr>
+          <p:cNvPr id="23" name="Rectangle 22"/>
+          <p:cNvSpPr/>
+          <p:nvPr/>
+        </p:nvSpPr>
+        <p:spPr>
+          <a:xfrm>
+            <a:off x="8220456" y="3776472"/>
+            <a:ext cx="3749039" cy="292608"/>
+          </a:xfrm>
+          <a:prstGeom prst="rect">
+            <a:avLst/>
+          </a:prstGeom>
+          <a:solidFill>
+            <a:srgbClr val="E8F0FE"/>
+          </a:solidFill>
+          <a:ln>
+            <a:noFill/>
+          </a:ln>
+        </p:spPr>
+        <p:style>
+          <a:lnRef idx="1">
+            <a:schemeClr val="accent1"/>
+          </a:lnRef>
+          <a:fillRef idx="3">
+            <a:schemeClr val="accent1"/>
+          </a:fillRef>
+          <a:effectRef idx="2">
+            <a:schemeClr val="accent1"/>
+          </a:effectRef>
+          <a:fontRef idx="minor">
+            <a:schemeClr val="lt1"/>
+          </a:fontRef>
+        </p:style>
+        <p:txBody>
+          <a:bodyPr rtlCol="0" anchor="ctr"/>
+          <a:lstStyle/>
+          <a:p>
+            <a:pPr algn="ctr"/>
+            <a:endParaRPr/>
+          </a:p>
+        </p:txBody>
+      </p:sp>
+      <p:sp>
+        <p:nvSpPr>
+          <p:cNvPr id="24" name="TextBox 23"/>
+          <p:cNvSpPr txBox="1"/>
+          <p:nvPr/>
+        </p:nvSpPr>
+        <p:spPr>
+          <a:xfrm>
+            <a:off x="8330183" y="3803904"/>
+            <a:ext cx="3566160" cy="228600"/>
+          </a:xfrm>
+          <a:prstGeom prst="rect">
+            <a:avLst/>
+          </a:prstGeom>
+          <a:noFill/>
+        </p:spPr>
+        <p:txBody>
+          <a:bodyPr wrap="square">
+            <a:spAutoFit/>
+          </a:bodyPr>
+          <a:lstStyle/>
+          <a:p>
+            <a:pPr algn="l"/>
+            <a:r>
+              <a:rPr sz="1000" b="0" i="1">
+                <a:solidFill>
+                  <a:srgbClr val="1A5496"/>
+                </a:solidFill>
+              </a:rPr>
+              <a:t>File: templates/configmap.yaml</a:t>
+            </a:r>
+          </a:p>
+        </p:txBody>
+      </p:sp>
+      <p:sp>
+        <p:nvSpPr>
+          <p:cNvPr id="25" name="Rectangle 24"/>
+          <p:cNvSpPr/>
+          <p:nvPr/>
+        </p:nvSpPr>
+        <p:spPr>
+          <a:xfrm>
+            <a:off x="228600" y="3840480"/>
+            <a:ext cx="3749039" cy="438912"/>
+          </a:xfrm>
+          <a:prstGeom prst="rect">
+            <a:avLst/>
+          </a:prstGeom>
+          <a:solidFill>
+            <a:srgbClr val="F39C12"/>
+          </a:solidFill>
+          <a:ln>
+            <a:noFill/>
+          </a:ln>
+        </p:spPr>
+        <p:style>
+          <a:lnRef idx="1">
+            <a:schemeClr val="accent1"/>
+          </a:lnRef>
+          <a:fillRef idx="3">
+            <a:schemeClr val="accent1"/>
+          </a:fillRef>
+          <a:effectRef idx="2">
+            <a:schemeClr val="accent1"/>
+          </a:effectRef>
+          <a:fontRef idx="minor">
+            <a:schemeClr val="lt1"/>
+          </a:fontRef>
+        </p:style>
+        <p:txBody>
+          <a:bodyPr rtlCol="0" anchor="ctr"/>
+          <a:lstStyle/>
+          <a:p>
+            <a:pPr algn="ctr"/>
+            <a:endParaRPr/>
+          </a:p>
+        </p:txBody>
+      </p:sp>
+      <p:sp>
+        <p:nvSpPr>
+          <p:cNvPr id="26" name="TextBox 25"/>
+          <p:cNvSpPr txBox="1"/>
+          <p:nvPr/>
+        </p:nvSpPr>
+        <p:spPr>
+          <a:xfrm>
+            <a:off x="320040" y="3904488"/>
+            <a:ext cx="3566160" cy="347472"/>
+          </a:xfrm>
+          <a:prstGeom prst="rect">
+            <a:avLst/>
+          </a:prstGeom>
+          <a:noFill/>
+        </p:spPr>
+        <p:txBody>
+          <a:bodyPr wrap="square">
+            <a:spAutoFit/>
+          </a:bodyPr>
+          <a:lstStyle/>
+          <a:p>
+            <a:pPr algn="l"/>
+            <a:r>
+              <a:rPr sz="1300" b="1" i="0">
+                <a:solidFill>
+                  <a:srgbClr val="FFFFFF"/>
+                </a:solidFill>
+              </a:rPr>
+              <a:t>4  External Access  ·  Ingress</a:t>
+            </a:r>
+          </a:p>
+        </p:txBody>
+      </p:sp>
+      <p:sp>
+        <p:nvSpPr>
+          <p:cNvPr id="27" name="Rectangle 26"/>
+          <p:cNvSpPr/>
+          <p:nvPr/>
+        </p:nvSpPr>
+        <p:spPr>
+          <a:xfrm>
+            <a:off x="228600" y="4279392"/>
+            <a:ext cx="3749039" cy="2148840"/>
+          </a:xfrm>
+          <a:prstGeom prst="rect">
+            <a:avLst/>
+          </a:prstGeom>
+          <a:solidFill>
+            <a:srgbClr val="FFFFFF"/>
+          </a:solidFill>
+          <a:ln>
+            <a:noFill/>
+          </a:ln>
+        </p:spPr>
+        <p:style>
+          <a:lnRef idx="1">
+            <a:schemeClr val="accent1"/>
+          </a:lnRef>
+          <a:fillRef idx="3">
+            <a:schemeClr val="accent1"/>
+          </a:fillRef>
+          <a:effectRef idx="2">
+            <a:schemeClr val="accent1"/>
+          </a:effectRef>
+          <a:fontRef idx="minor">
+            <a:schemeClr val="lt1"/>
+          </a:fontRef>
+        </p:style>
+        <p:txBody>
+          <a:bodyPr rtlCol="0" anchor="ctr"/>
+          <a:lstStyle/>
+          <a:p>
+            <a:pPr algn="ctr"/>
+            <a:endParaRPr/>
+          </a:p>
+        </p:txBody>
+      </p:sp>
+      <p:sp>
+        <p:nvSpPr>
+          <p:cNvPr id="28" name="TextBox 27"/>
+          <p:cNvSpPr txBox="1"/>
+          <p:nvPr/>
+        </p:nvSpPr>
+        <p:spPr>
+          <a:xfrm>
+            <a:off x="338328" y="4352544"/>
+            <a:ext cx="3547872" cy="1965960"/>
+          </a:xfrm>
+          <a:prstGeom prst="rect">
+            <a:avLst/>
+          </a:prstGeom>
+          <a:noFill/>
+        </p:spPr>
+        <p:txBody>
+          <a:bodyPr wrap="square">
+            <a:spAutoFit/>
+          </a:bodyPr>
+          <a:lstStyle/>
+          <a:p>
+            <a:pPr algn="l"/>
+            <a:r>
+              <a:rPr sz="1050" b="0" i="0">
+                <a:solidFill>
+                  <a:srgbClr val="1C2B3A"/>
+                </a:solidFill>
+              </a:rPr>
+              <a:t>Optional per service — off unless ingress.enabled: true in values
+Path-based routing on the nginx ingress class
+Host + path set per environment: dev.pharma.internal/auth, qa.pharma.internal/auth...
+Most services stay cluster-internal; only edge-facing ones expose an Ingress</a:t>
+            </a:r>
+          </a:p>
+        </p:txBody>
+      </p:sp>
+      <p:sp>
+        <p:nvSpPr>
+          <p:cNvPr id="29" name="Rectangle 28"/>
+          <p:cNvSpPr/>
+          <p:nvPr/>
+        </p:nvSpPr>
+        <p:spPr>
+          <a:xfrm>
+            <a:off x="228600" y="6428232"/>
+            <a:ext cx="3749039" cy="292608"/>
+          </a:xfrm>
+          <a:prstGeom prst="rect">
+            <a:avLst/>
+          </a:prstGeom>
+          <a:solidFill>
+            <a:srgbClr val="E8F0FE"/>
+          </a:solidFill>
+          <a:ln>
+            <a:noFill/>
+          </a:ln>
+        </p:spPr>
+        <p:style>
+          <a:lnRef idx="1">
+            <a:schemeClr val="accent1"/>
+          </a:lnRef>
+          <a:fillRef idx="3">
+            <a:schemeClr val="accent1"/>
+          </a:fillRef>
+          <a:effectRef idx="2">
+            <a:schemeClr val="accent1"/>
+          </a:effectRef>
+          <a:fontRef idx="minor">
+            <a:schemeClr val="lt1"/>
+          </a:fontRef>
+        </p:style>
+        <p:txBody>
+          <a:bodyPr rtlCol="0" anchor="ctr"/>
+          <a:lstStyle/>
+          <a:p>
+            <a:pPr algn="ctr"/>
+            <a:endParaRPr/>
+          </a:p>
+        </p:txBody>
+      </p:sp>
+      <p:sp>
+        <p:nvSpPr>
+          <p:cNvPr id="30" name="TextBox 29"/>
+          <p:cNvSpPr txBox="1"/>
+          <p:nvPr/>
+        </p:nvSpPr>
+        <p:spPr>
+          <a:xfrm>
+            <a:off x="338328" y="6455664"/>
+            <a:ext cx="3566160" cy="228600"/>
+          </a:xfrm>
+          <a:prstGeom prst="rect">
+            <a:avLst/>
+          </a:prstGeom>
+          <a:noFill/>
+        </p:spPr>
+        <p:txBody>
+          <a:bodyPr wrap="square">
+            <a:spAutoFit/>
+          </a:bodyPr>
+          <a:lstStyle/>
+          <a:p>
+            <a:pPr algn="l"/>
+            <a:r>
+              <a:rPr sz="1000" b="0" i="1">
+                <a:solidFill>
+                  <a:srgbClr val="1A5496"/>
+                </a:solidFill>
+              </a:rPr>
+              <a:t>File: templates/ingress.yaml</a:t>
+            </a:r>
+          </a:p>
+        </p:txBody>
+      </p:sp>
+      <p:sp>
+        <p:nvSpPr>
+          <p:cNvPr id="31" name="Rectangle 30"/>
+          <p:cNvSpPr/>
+          <p:nvPr/>
+        </p:nvSpPr>
+        <p:spPr>
+          <a:xfrm>
+            <a:off x="4224528" y="3840480"/>
+            <a:ext cx="3749039" cy="438912"/>
           </a:xfrm>
           <a:prstGeom prst="rect">
             <a:avLst/>
@@ -25567,48 +32303,48 @@
       </p:sp>
       <p:sp>
         <p:nvSpPr>
-          <p:cNvPr id="43" name="TextBox 42"/>
-          <p:cNvSpPr txBox="1"/>
-          <p:nvPr/>
-        </p:nvSpPr>
-        <p:spPr>
-          <a:xfrm>
-            <a:off x="6400800" y="3730752"/>
-            <a:ext cx="384048" cy="384048"/>
-          </a:xfrm>
-          <a:prstGeom prst="rect">
-            <a:avLst/>
-          </a:prstGeom>
-          <a:noFill/>
-        </p:spPr>
-        <p:txBody>
-          <a:bodyPr wrap="square">
-            <a:spAutoFit/>
-          </a:bodyPr>
-          <a:lstStyle/>
-          <a:p>
-            <a:pPr algn="ctr"/>
+          <p:cNvPr id="32" name="TextBox 31"/>
+          <p:cNvSpPr txBox="1"/>
+          <p:nvPr/>
+        </p:nvSpPr>
+        <p:spPr>
+          <a:xfrm>
+            <a:off x="4315968" y="3904488"/>
+            <a:ext cx="3566160" cy="347472"/>
+          </a:xfrm>
+          <a:prstGeom prst="rect">
+            <a:avLst/>
+          </a:prstGeom>
+          <a:noFill/>
+        </p:spPr>
+        <p:txBody>
+          <a:bodyPr wrap="square">
+            <a:spAutoFit/>
+          </a:bodyPr>
+          <a:lstStyle/>
+          <a:p>
+            <a:pPr algn="l"/>
             <a:r>
               <a:rPr sz="1300" b="1" i="0">
                 <a:solidFill>
                   <a:srgbClr val="FFFFFF"/>
                 </a:solidFill>
               </a:rPr>
-              <a:t>10</a:t>
-            </a:r>
-          </a:p>
-        </p:txBody>
-      </p:sp>
-      <p:sp>
-        <p:nvSpPr>
-          <p:cNvPr id="44" name="Rectangle 43"/>
-          <p:cNvSpPr/>
-          <p:nvPr/>
-        </p:nvSpPr>
-        <p:spPr>
-          <a:xfrm>
-            <a:off x="6821424" y="3694176"/>
-            <a:ext cx="5120640" cy="475488"/>
+              <a:t>5  Autoscaling  ·  HPA</a:t>
+            </a:r>
+          </a:p>
+        </p:txBody>
+      </p:sp>
+      <p:sp>
+        <p:nvSpPr>
+          <p:cNvPr id="33" name="Rectangle 32"/>
+          <p:cNvSpPr/>
+          <p:nvPr/>
+        </p:nvSpPr>
+        <p:spPr>
+          <a:xfrm>
+            <a:off x="4224528" y="4279392"/>
+            <a:ext cx="3749039" cy="2148840"/>
           </a:xfrm>
           <a:prstGeom prst="rect">
             <a:avLst/>
@@ -25645,126 +32381,207 @@
       </p:sp>
       <p:sp>
         <p:nvSpPr>
-          <p:cNvPr id="45" name="TextBox 44"/>
-          <p:cNvSpPr txBox="1"/>
-          <p:nvPr/>
-        </p:nvSpPr>
-        <p:spPr>
-          <a:xfrm>
-            <a:off x="6894576" y="3776472"/>
-            <a:ext cx="4937760" cy="347472"/>
-          </a:xfrm>
-          <a:prstGeom prst="rect">
-            <a:avLst/>
-          </a:prstGeom>
-          <a:noFill/>
-        </p:spPr>
-        <p:txBody>
-          <a:bodyPr wrap="square">
-            <a:spAutoFit/>
-          </a:bodyPr>
-          <a:lstStyle/>
-          <a:p>
-            <a:pPr algn="l"/>
-            <a:r>
-              <a:rPr sz="1300" b="0" i="0">
+          <p:cNvPr id="34" name="TextBox 33"/>
+          <p:cNvSpPr txBox="1"/>
+          <p:nvPr/>
+        </p:nvSpPr>
+        <p:spPr>
+          <a:xfrm>
+            <a:off x="4334256" y="4352544"/>
+            <a:ext cx="3547872" cy="1965960"/>
+          </a:xfrm>
+          <a:prstGeom prst="rect">
+            <a:avLst/>
+          </a:prstGeom>
+          <a:noFill/>
+        </p:spPr>
+        <p:txBody>
+          <a:bodyPr wrap="square">
+            <a:spAutoFit/>
+          </a:bodyPr>
+          <a:lstStyle/>
+          <a:p>
+            <a:pPr algn="l"/>
+            <a:r>
+              <a:rPr sz="1050" b="0" i="0">
                 <a:solidFill>
                   <a:srgbClr val="1C2B3A"/>
                 </a:solidFill>
               </a:rPr>
-              <a:t>Frontend CI (zen-pharma-frontend)</a:t>
-            </a:r>
-          </a:p>
-        </p:txBody>
-      </p:sp>
-      <p:sp>
-        <p:nvSpPr>
-          <p:cNvPr id="46" name="Rectangle 45"/>
-          <p:cNvSpPr/>
-          <p:nvPr/>
-        </p:nvSpPr>
-        <p:spPr>
-          <a:xfrm>
-            <a:off x="6400800" y="4498848"/>
-            <a:ext cx="384048" cy="475488"/>
-          </a:xfrm>
-          <a:prstGeom prst="rect">
-            <a:avLst/>
-          </a:prstGeom>
-          <a:solidFill>
-            <a:srgbClr val="F39C12"/>
-          </a:solidFill>
-          <a:ln>
-            <a:noFill/>
-          </a:ln>
-        </p:spPr>
-        <p:style>
-          <a:lnRef idx="1">
-            <a:schemeClr val="accent1"/>
-          </a:lnRef>
-          <a:fillRef idx="3">
-            <a:schemeClr val="accent1"/>
-          </a:fillRef>
-          <a:effectRef idx="2">
-            <a:schemeClr val="accent1"/>
-          </a:effectRef>
-          <a:fontRef idx="minor">
-            <a:schemeClr val="lt1"/>
-          </a:fontRef>
-        </p:style>
-        <p:txBody>
-          <a:bodyPr rtlCol="0" anchor="ctr"/>
-          <a:lstStyle/>
-          <a:p>
-            <a:pPr algn="ctr"/>
-            <a:endParaRPr/>
-          </a:p>
-        </p:txBody>
-      </p:sp>
-      <p:sp>
-        <p:nvSpPr>
-          <p:cNvPr id="47" name="TextBox 46"/>
-          <p:cNvSpPr txBox="1"/>
-          <p:nvPr/>
-        </p:nvSpPr>
-        <p:spPr>
-          <a:xfrm>
-            <a:off x="6400800" y="4535424"/>
-            <a:ext cx="384048" cy="384048"/>
-          </a:xfrm>
-          <a:prstGeom prst="rect">
-            <a:avLst/>
-          </a:prstGeom>
-          <a:noFill/>
-        </p:spPr>
-        <p:txBody>
-          <a:bodyPr wrap="square">
-            <a:spAutoFit/>
-          </a:bodyPr>
-          <a:lstStyle/>
-          <a:p>
-            <a:pPr algn="ctr"/>
+              <a:t>HorizontalPodAutoscaler — on when autoscaling.enabled: true
+Targets CPU/memory utilization (70%/80% defaults)
+Disabled in dev; qa scales 1–3 replicas, prod scales 2–5
+When enabled, deployment.yaml drops its static replicas field</a:t>
+            </a:r>
+          </a:p>
+        </p:txBody>
+      </p:sp>
+      <p:sp>
+        <p:nvSpPr>
+          <p:cNvPr id="35" name="Rectangle 34"/>
+          <p:cNvSpPr/>
+          <p:nvPr/>
+        </p:nvSpPr>
+        <p:spPr>
+          <a:xfrm>
+            <a:off x="4224528" y="6428232"/>
+            <a:ext cx="3749039" cy="292608"/>
+          </a:xfrm>
+          <a:prstGeom prst="rect">
+            <a:avLst/>
+          </a:prstGeom>
+          <a:solidFill>
+            <a:srgbClr val="E8F0FE"/>
+          </a:solidFill>
+          <a:ln>
+            <a:noFill/>
+          </a:ln>
+        </p:spPr>
+        <p:style>
+          <a:lnRef idx="1">
+            <a:schemeClr val="accent1"/>
+          </a:lnRef>
+          <a:fillRef idx="3">
+            <a:schemeClr val="accent1"/>
+          </a:fillRef>
+          <a:effectRef idx="2">
+            <a:schemeClr val="accent1"/>
+          </a:effectRef>
+          <a:fontRef idx="minor">
+            <a:schemeClr val="lt1"/>
+          </a:fontRef>
+        </p:style>
+        <p:txBody>
+          <a:bodyPr rtlCol="0" anchor="ctr"/>
+          <a:lstStyle/>
+          <a:p>
+            <a:pPr algn="ctr"/>
+            <a:endParaRPr/>
+          </a:p>
+        </p:txBody>
+      </p:sp>
+      <p:sp>
+        <p:nvSpPr>
+          <p:cNvPr id="36" name="TextBox 35"/>
+          <p:cNvSpPr txBox="1"/>
+          <p:nvPr/>
+        </p:nvSpPr>
+        <p:spPr>
+          <a:xfrm>
+            <a:off x="4334256" y="6455664"/>
+            <a:ext cx="3566160" cy="228600"/>
+          </a:xfrm>
+          <a:prstGeom prst="rect">
+            <a:avLst/>
+          </a:prstGeom>
+          <a:noFill/>
+        </p:spPr>
+        <p:txBody>
+          <a:bodyPr wrap="square">
+            <a:spAutoFit/>
+          </a:bodyPr>
+          <a:lstStyle/>
+          <a:p>
+            <a:pPr algn="l"/>
+            <a:r>
+              <a:rPr sz="1000" b="0" i="1">
+                <a:solidFill>
+                  <a:srgbClr val="1A5496"/>
+                </a:solidFill>
+              </a:rPr>
+              <a:t>File: templates/hpa.yaml</a:t>
+            </a:r>
+          </a:p>
+        </p:txBody>
+      </p:sp>
+      <p:sp>
+        <p:nvSpPr>
+          <p:cNvPr id="37" name="Rectangle 36"/>
+          <p:cNvSpPr/>
+          <p:nvPr/>
+        </p:nvSpPr>
+        <p:spPr>
+          <a:xfrm>
+            <a:off x="8220456" y="3840480"/>
+            <a:ext cx="3749039" cy="438912"/>
+          </a:xfrm>
+          <a:prstGeom prst="rect">
+            <a:avLst/>
+          </a:prstGeom>
+          <a:solidFill>
+            <a:srgbClr val="6C757D"/>
+          </a:solidFill>
+          <a:ln>
+            <a:noFill/>
+          </a:ln>
+        </p:spPr>
+        <p:style>
+          <a:lnRef idx="1">
+            <a:schemeClr val="accent1"/>
+          </a:lnRef>
+          <a:fillRef idx="3">
+            <a:schemeClr val="accent1"/>
+          </a:fillRef>
+          <a:effectRef idx="2">
+            <a:schemeClr val="accent1"/>
+          </a:effectRef>
+          <a:fontRef idx="minor">
+            <a:schemeClr val="lt1"/>
+          </a:fontRef>
+        </p:style>
+        <p:txBody>
+          <a:bodyPr rtlCol="0" anchor="ctr"/>
+          <a:lstStyle/>
+          <a:p>
+            <a:pPr algn="ctr"/>
+            <a:endParaRPr/>
+          </a:p>
+        </p:txBody>
+      </p:sp>
+      <p:sp>
+        <p:nvSpPr>
+          <p:cNvPr id="38" name="TextBox 37"/>
+          <p:cNvSpPr txBox="1"/>
+          <p:nvPr/>
+        </p:nvSpPr>
+        <p:spPr>
+          <a:xfrm>
+            <a:off x="8311896" y="3904488"/>
+            <a:ext cx="3566160" cy="347472"/>
+          </a:xfrm>
+          <a:prstGeom prst="rect">
+            <a:avLst/>
+          </a:prstGeom>
+          <a:noFill/>
+        </p:spPr>
+        <p:txBody>
+          <a:bodyPr wrap="square">
+            <a:spAutoFit/>
+          </a:bodyPr>
+          <a:lstStyle/>
+          <a:p>
+            <a:pPr algn="l"/>
             <a:r>
               <a:rPr sz="1300" b="1" i="0">
                 <a:solidFill>
                   <a:srgbClr val="FFFFFF"/>
                 </a:solidFill>
               </a:rPr>
-              <a:t>11</a:t>
-            </a:r>
-          </a:p>
-        </p:txBody>
-      </p:sp>
-      <p:sp>
-        <p:nvSpPr>
-          <p:cNvPr id="48" name="Rectangle 47"/>
-          <p:cNvSpPr/>
-          <p:nvPr/>
-        </p:nvSpPr>
-        <p:spPr>
-          <a:xfrm>
-            <a:off x="6821424" y="4498848"/>
-            <a:ext cx="5120640" cy="475488"/>
+              <a:t>6  Identity &amp; Secrets  ·  ServiceAccount</a:t>
+            </a:r>
+          </a:p>
+        </p:txBody>
+      </p:sp>
+      <p:sp>
+        <p:nvSpPr>
+          <p:cNvPr id="39" name="Rectangle 38"/>
+          <p:cNvSpPr/>
+          <p:nvPr/>
+        </p:nvSpPr>
+        <p:spPr>
+          <a:xfrm>
+            <a:off x="8220456" y="4279392"/>
+            <a:ext cx="3749039" cy="2148840"/>
           </a:xfrm>
           <a:prstGeom prst="rect">
             <a:avLst/>
@@ -25801,190 +32618,116 @@
       </p:sp>
       <p:sp>
         <p:nvSpPr>
-          <p:cNvPr id="49" name="TextBox 48"/>
-          <p:cNvSpPr txBox="1"/>
-          <p:nvPr/>
-        </p:nvSpPr>
-        <p:spPr>
-          <a:xfrm>
-            <a:off x="6894576" y="4581144"/>
-            <a:ext cx="4937760" cy="347472"/>
-          </a:xfrm>
-          <a:prstGeom prst="rect">
-            <a:avLst/>
-          </a:prstGeom>
-          <a:noFill/>
-        </p:spPr>
-        <p:txBody>
-          <a:bodyPr wrap="square">
-            <a:spAutoFit/>
-          </a:bodyPr>
-          <a:lstStyle/>
-          <a:p>
-            <a:pPr algn="l"/>
-            <a:r>
-              <a:rPr sz="1300" b="0" i="0">
+          <p:cNvPr id="40" name="TextBox 39"/>
+          <p:cNvSpPr txBox="1"/>
+          <p:nvPr/>
+        </p:nvSpPr>
+        <p:spPr>
+          <a:xfrm>
+            <a:off x="8330183" y="4352544"/>
+            <a:ext cx="3547872" cy="1965960"/>
+          </a:xfrm>
+          <a:prstGeom prst="rect">
+            <a:avLst/>
+          </a:prstGeom>
+          <a:noFill/>
+        </p:spPr>
+        <p:txBody>
+          <a:bodyPr wrap="square">
+            <a:spAutoFit/>
+          </a:bodyPr>
+          <a:lstStyle/>
+          <a:p>
+            <a:pPr algn="l"/>
+            <a:r>
+              <a:rPr sz="1050" b="0" i="0">
                 <a:solidFill>
                   <a:srgbClr val="1C2B3A"/>
                 </a:solidFill>
               </a:rPr>
-              <a:t>Post-Deployment: Rollback</a:t>
-            </a:r>
-          </a:p>
-        </p:txBody>
-      </p:sp>
-      <p:sp>
-        <p:nvSpPr>
-          <p:cNvPr id="50" name="Rectangle 49"/>
-          <p:cNvSpPr/>
-          <p:nvPr/>
-        </p:nvSpPr>
-        <p:spPr>
-          <a:xfrm>
-            <a:off x="6400800" y="5303520"/>
-            <a:ext cx="384048" cy="475488"/>
-          </a:xfrm>
-          <a:prstGeom prst="rect">
-            <a:avLst/>
-          </a:prstGeom>
-          <a:solidFill>
-            <a:srgbClr val="E74C3C"/>
-          </a:solidFill>
-          <a:ln>
-            <a:noFill/>
-          </a:ln>
-        </p:spPr>
-        <p:style>
-          <a:lnRef idx="1">
-            <a:schemeClr val="accent1"/>
-          </a:lnRef>
-          <a:fillRef idx="3">
-            <a:schemeClr val="accent1"/>
-          </a:fillRef>
-          <a:effectRef idx="2">
-            <a:schemeClr val="accent1"/>
-          </a:effectRef>
-          <a:fontRef idx="minor">
-            <a:schemeClr val="lt1"/>
-          </a:fontRef>
-        </p:style>
-        <p:txBody>
-          <a:bodyPr rtlCol="0" anchor="ctr"/>
-          <a:lstStyle/>
-          <a:p>
-            <a:pPr algn="ctr"/>
-            <a:endParaRPr/>
-          </a:p>
-        </p:txBody>
-      </p:sp>
-      <p:sp>
-        <p:nvSpPr>
-          <p:cNvPr id="51" name="TextBox 50"/>
-          <p:cNvSpPr txBox="1"/>
-          <p:nvPr/>
-        </p:nvSpPr>
-        <p:spPr>
-          <a:xfrm>
-            <a:off x="6400800" y="5340096"/>
-            <a:ext cx="384048" cy="384048"/>
-          </a:xfrm>
-          <a:prstGeom prst="rect">
-            <a:avLst/>
-          </a:prstGeom>
-          <a:noFill/>
-        </p:spPr>
-        <p:txBody>
-          <a:bodyPr wrap="square">
-            <a:spAutoFit/>
-          </a:bodyPr>
-          <a:lstStyle/>
-          <a:p>
-            <a:pPr algn="ctr"/>
-            <a:r>
-              <a:rPr sz="1300" b="1" i="0">
-                <a:solidFill>
-                  <a:srgbClr val="FFFFFF"/>
-                </a:solidFill>
-              </a:rPr>
-              <a:t>12</a:t>
-            </a:r>
-          </a:p>
-        </p:txBody>
-      </p:sp>
-      <p:sp>
-        <p:nvSpPr>
-          <p:cNvPr id="52" name="Rectangle 51"/>
-          <p:cNvSpPr/>
-          <p:nvPr/>
-        </p:nvSpPr>
-        <p:spPr>
-          <a:xfrm>
-            <a:off x="6821424" y="5303520"/>
-            <a:ext cx="5120640" cy="475488"/>
-          </a:xfrm>
-          <a:prstGeom prst="rect">
-            <a:avLst/>
-          </a:prstGeom>
-          <a:solidFill>
-            <a:srgbClr val="FFFFFF"/>
-          </a:solidFill>
-          <a:ln>
-            <a:noFill/>
-          </a:ln>
-        </p:spPr>
-        <p:style>
-          <a:lnRef idx="1">
-            <a:schemeClr val="accent1"/>
-          </a:lnRef>
-          <a:fillRef idx="3">
-            <a:schemeClr val="accent1"/>
-          </a:fillRef>
-          <a:effectRef idx="2">
-            <a:schemeClr val="accent1"/>
-          </a:effectRef>
-          <a:fontRef idx="minor">
-            <a:schemeClr val="lt1"/>
-          </a:fontRef>
-        </p:style>
-        <p:txBody>
-          <a:bodyPr rtlCol="0" anchor="ctr"/>
-          <a:lstStyle/>
-          <a:p>
-            <a:pPr algn="ctr"/>
-            <a:endParaRPr/>
-          </a:p>
-        </p:txBody>
-      </p:sp>
-      <p:sp>
-        <p:nvSpPr>
-          <p:cNvPr id="53" name="TextBox 52"/>
-          <p:cNvSpPr txBox="1"/>
-          <p:nvPr/>
-        </p:nvSpPr>
-        <p:spPr>
-          <a:xfrm>
-            <a:off x="6894576" y="5385816"/>
-            <a:ext cx="4937760" cy="347472"/>
-          </a:xfrm>
-          <a:prstGeom prst="rect">
-            <a:avLst/>
-          </a:prstGeom>
-          <a:noFill/>
-        </p:spPr>
-        <p:txBody>
-          <a:bodyPr wrap="square">
-            <a:spAutoFit/>
-          </a:bodyPr>
-          <a:lstStyle/>
-          <a:p>
-            <a:pPr algn="l"/>
-            <a:r>
-              <a:rPr sz="1300" b="0" i="0">
-                <a:solidFill>
-                  <a:srgbClr val="1C2B3A"/>
-                </a:solidFill>
-              </a:rPr>
-              <a:t>Post-Deployment: Bugfix</a:t>
+              <a:t>ServiceAccount created per service (serviceAccount.create: true)
+Bound to the pod via serviceAccountName — enables IRSA / pod identity
+Secrets are NOT rendered by this chart — External Secrets Operator syncs
+db-credentials &amp; jwt-secret from AWS Secrets Manager into native K8s Secrets
+Pods consume them via envFrom: secretRef, the same pattern as ConfigMap</a:t>
+            </a:r>
+          </a:p>
+        </p:txBody>
+      </p:sp>
+      <p:sp>
+        <p:nvSpPr>
+          <p:cNvPr id="41" name="Rectangle 40"/>
+          <p:cNvSpPr/>
+          <p:nvPr/>
+        </p:nvSpPr>
+        <p:spPr>
+          <a:xfrm>
+            <a:off x="8220456" y="6428232"/>
+            <a:ext cx="3749039" cy="292608"/>
+          </a:xfrm>
+          <a:prstGeom prst="rect">
+            <a:avLst/>
+          </a:prstGeom>
+          <a:solidFill>
+            <a:srgbClr val="E8F0FE"/>
+          </a:solidFill>
+          <a:ln>
+            <a:noFill/>
+          </a:ln>
+        </p:spPr>
+        <p:style>
+          <a:lnRef idx="1">
+            <a:schemeClr val="accent1"/>
+          </a:lnRef>
+          <a:fillRef idx="3">
+            <a:schemeClr val="accent1"/>
+          </a:fillRef>
+          <a:effectRef idx="2">
+            <a:schemeClr val="accent1"/>
+          </a:effectRef>
+          <a:fontRef idx="minor">
+            <a:schemeClr val="lt1"/>
+          </a:fontRef>
+        </p:style>
+        <p:txBody>
+          <a:bodyPr rtlCol="0" anchor="ctr"/>
+          <a:lstStyle/>
+          <a:p>
+            <a:pPr algn="ctr"/>
+            <a:endParaRPr/>
+          </a:p>
+        </p:txBody>
+      </p:sp>
+      <p:sp>
+        <p:nvSpPr>
+          <p:cNvPr id="42" name="TextBox 41"/>
+          <p:cNvSpPr txBox="1"/>
+          <p:nvPr/>
+        </p:nvSpPr>
+        <p:spPr>
+          <a:xfrm>
+            <a:off x="8330183" y="6455664"/>
+            <a:ext cx="3566160" cy="228600"/>
+          </a:xfrm>
+          <a:prstGeom prst="rect">
+            <a:avLst/>
+          </a:prstGeom>
+          <a:noFill/>
+        </p:spPr>
+        <p:txBody>
+          <a:bodyPr wrap="square">
+            <a:spAutoFit/>
+          </a:bodyPr>
+          <a:lstStyle/>
+          <a:p>
+            <a:pPr algn="l"/>
+            <a:r>
+              <a:rPr sz="1000" b="0" i="1">
+                <a:solidFill>
+                  <a:srgbClr val="1A5496"/>
+                </a:solidFill>
+              </a:rPr>
+              <a:t>Config: k8s/external-secrets/*.yaml (separate from helm-charts/)</a:t>
             </a:r>
           </a:p>
         </p:txBody>
